--- a/network/sir-slides/4. Networking for Web Developers.pptx
+++ b/network/sir-slides/4. Networking for Web Developers.pptx
@@ -4,6 +4,9 @@
   <p:sldMasterIdLst>
     <p:sldMasterId id="2147483648" r:id="rId1"/>
   </p:sldMasterIdLst>
+  <p:notesMasterIdLst>
+    <p:notesMasterId r:id="rId21"/>
+  </p:notesMasterIdLst>
   <p:sldIdLst>
     <p:sldId id="256" r:id="rId2"/>
     <p:sldId id="257" r:id="rId3"/>
@@ -25,21 +28,120 @@
     <p:sldId id="273" r:id="rId19"/>
     <p:sldId id="274" r:id="rId20"/>
   </p:sldIdLst>
-  <p:notesMasterIdLst>
-    <p:notesMasterId r:id="rId21"/>
-  </p:notesMasterIdLst>
   <p:sldSz cx="16256000" cy="9144000"/>
   <p:notesSz cx="9144000" cy="16256000"/>
   <p:embeddedFontLst>
     <p:embeddedFont>
-      <p:font typeface="Liter" charset="-122" pitchFamily="34"/>
-      <p:regular r:id="rId26"/>
+      <p:font typeface="Liter" panose="020B0604020202020204" charset="0"/>
+      <p:regular r:id="rId22"/>
     </p:embeddedFont>
     <p:embeddedFont>
-      <p:font typeface="Quattrocento Sans" charset="-122" pitchFamily="34"/>
-      <p:regular r:id="rId27"/>
+      <p:font typeface="Quattrocento Sans" panose="020B0502050000020003" pitchFamily="34" charset="0"/>
+      <p:regular r:id="rId23"/>
+      <p:bold r:id="rId24"/>
+      <p:italic r:id="rId25"/>
     </p:embeddedFont>
   </p:embeddedFontLst>
+  <p:defaultTextStyle>
+    <a:defPPr>
+      <a:defRPr lang="en-US"/>
+    </a:defPPr>
+    <a:lvl1pPr marL="0" algn="l" defTabSz="914400" rtl="0" eaLnBrk="1" latinLnBrk="0" hangingPunct="1">
+      <a:defRPr sz="1800" kern="1200">
+        <a:solidFill>
+          <a:schemeClr val="tx1"/>
+        </a:solidFill>
+        <a:latin typeface="+mn-lt"/>
+        <a:ea typeface="+mn-ea"/>
+        <a:cs typeface="+mn-cs"/>
+      </a:defRPr>
+    </a:lvl1pPr>
+    <a:lvl2pPr marL="457200" algn="l" defTabSz="914400" rtl="0" eaLnBrk="1" latinLnBrk="0" hangingPunct="1">
+      <a:defRPr sz="1800" kern="1200">
+        <a:solidFill>
+          <a:schemeClr val="tx1"/>
+        </a:solidFill>
+        <a:latin typeface="+mn-lt"/>
+        <a:ea typeface="+mn-ea"/>
+        <a:cs typeface="+mn-cs"/>
+      </a:defRPr>
+    </a:lvl2pPr>
+    <a:lvl3pPr marL="914400" algn="l" defTabSz="914400" rtl="0" eaLnBrk="1" latinLnBrk="0" hangingPunct="1">
+      <a:defRPr sz="1800" kern="1200">
+        <a:solidFill>
+          <a:schemeClr val="tx1"/>
+        </a:solidFill>
+        <a:latin typeface="+mn-lt"/>
+        <a:ea typeface="+mn-ea"/>
+        <a:cs typeface="+mn-cs"/>
+      </a:defRPr>
+    </a:lvl3pPr>
+    <a:lvl4pPr marL="1371600" algn="l" defTabSz="914400" rtl="0" eaLnBrk="1" latinLnBrk="0" hangingPunct="1">
+      <a:defRPr sz="1800" kern="1200">
+        <a:solidFill>
+          <a:schemeClr val="tx1"/>
+        </a:solidFill>
+        <a:latin typeface="+mn-lt"/>
+        <a:ea typeface="+mn-ea"/>
+        <a:cs typeface="+mn-cs"/>
+      </a:defRPr>
+    </a:lvl4pPr>
+    <a:lvl5pPr marL="1828800" algn="l" defTabSz="914400" rtl="0" eaLnBrk="1" latinLnBrk="0" hangingPunct="1">
+      <a:defRPr sz="1800" kern="1200">
+        <a:solidFill>
+          <a:schemeClr val="tx1"/>
+        </a:solidFill>
+        <a:latin typeface="+mn-lt"/>
+        <a:ea typeface="+mn-ea"/>
+        <a:cs typeface="+mn-cs"/>
+      </a:defRPr>
+    </a:lvl5pPr>
+    <a:lvl6pPr marL="2286000" algn="l" defTabSz="914400" rtl="0" eaLnBrk="1" latinLnBrk="0" hangingPunct="1">
+      <a:defRPr sz="1800" kern="1200">
+        <a:solidFill>
+          <a:schemeClr val="tx1"/>
+        </a:solidFill>
+        <a:latin typeface="+mn-lt"/>
+        <a:ea typeface="+mn-ea"/>
+        <a:cs typeface="+mn-cs"/>
+      </a:defRPr>
+    </a:lvl6pPr>
+    <a:lvl7pPr marL="2743200" algn="l" defTabSz="914400" rtl="0" eaLnBrk="1" latinLnBrk="0" hangingPunct="1">
+      <a:defRPr sz="1800" kern="1200">
+        <a:solidFill>
+          <a:schemeClr val="tx1"/>
+        </a:solidFill>
+        <a:latin typeface="+mn-lt"/>
+        <a:ea typeface="+mn-ea"/>
+        <a:cs typeface="+mn-cs"/>
+      </a:defRPr>
+    </a:lvl7pPr>
+    <a:lvl8pPr marL="3200400" algn="l" defTabSz="914400" rtl="0" eaLnBrk="1" latinLnBrk="0" hangingPunct="1">
+      <a:defRPr sz="1800" kern="1200">
+        <a:solidFill>
+          <a:schemeClr val="tx1"/>
+        </a:solidFill>
+        <a:latin typeface="+mn-lt"/>
+        <a:ea typeface="+mn-ea"/>
+        <a:cs typeface="+mn-cs"/>
+      </a:defRPr>
+    </a:lvl8pPr>
+    <a:lvl9pPr marL="3657600" algn="l" defTabSz="914400" rtl="0" eaLnBrk="1" latinLnBrk="0" hangingPunct="1">
+      <a:defRPr sz="1800" kern="1200">
+        <a:solidFill>
+          <a:schemeClr val="tx1"/>
+        </a:solidFill>
+        <a:latin typeface="+mn-lt"/>
+        <a:ea typeface="+mn-ea"/>
+        <a:cs typeface="+mn-cs"/>
+      </a:defRPr>
+    </a:lvl9pPr>
+  </p:defaultTextStyle>
+  <p:extLst>
+    <p:ext uri="{EFAFB233-063F-42B5-8137-9DF3F51BA10A}">
+      <p15:sldGuideLst xmlns:p15="http://schemas.microsoft.com/office/powerpoint/2012/main"/>
+    </p:ext>
+  </p:extLst>
 </p:presentation>
 </file>
 
@@ -65,234 +167,10 @@
           <a:chExt cx="0" cy="0"/>
         </a:xfrm>
       </p:grpSpPr>
-      <p:sp>
-        <p:nvSpPr>
-          <p:cNvPr id="2" name="Header Placeholder 1"/>
-          <p:cNvSpPr>
-            <a:spLocks noGrp="1"/>
-          </p:cNvSpPr>
-          <p:nvPr>
-            <p:ph type="hdr" sz="quarter"/>
-          </p:nvPr>
-        </p:nvSpPr>
-        <p:spPr>
-          <a:xfrm>
-            <a:off x="0" y="0"/>
-            <a:ext cx="2971800" cy="458788"/>
-          </a:xfrm>
-          <a:prstGeom prst="rect">
-            <a:avLst/>
-          </a:prstGeom>
-        </p:spPr>
-        <p:txBody>
-          <a:bodyPr vert="horz" lIns="91440" tIns="45720" rIns="91440" bIns="45720" rtlCol="0"/>
-          <a:lstStyle>
-            <a:lvl1pPr algn="l">
-              <a:defRPr sz="1200"/>
-            </a:lvl1pPr>
-          </a:lstStyle>
-          <a:p>
-            <a:endParaRPr lang="en-US"/>
-          </a:p>
-        </p:txBody>
-      </p:sp>
-      <p:sp>
-        <p:nvSpPr>
-          <p:cNvPr id="3" name="Date Placeholder 2"/>
-          <p:cNvSpPr>
-            <a:spLocks noGrp="1"/>
-          </p:cNvSpPr>
-          <p:nvPr>
-            <p:ph type="dt" idx="1"/>
-          </p:nvPr>
-        </p:nvSpPr>
-        <p:spPr>
-          <a:xfrm>
-            <a:off x="3884613" y="0"/>
-            <a:ext cx="2971800" cy="458788"/>
-          </a:xfrm>
-          <a:prstGeom prst="rect">
-            <a:avLst/>
-          </a:prstGeom>
-        </p:spPr>
-        <p:txBody>
-          <a:bodyPr vert="horz" lIns="91440" tIns="45720" rIns="91440" bIns="45720" rtlCol="0"/>
-          <a:lstStyle>
-            <a:lvl1pPr algn="r">
-              <a:defRPr sz="1200"/>
-            </a:lvl1pPr>
-          </a:lstStyle>
-          <a:p>
-            <a:fld id="{5282F153-3F37-0F45-9E97-73ACFA13230C}" type="datetimeFigureOut">
-              <a:rPr lang="en-US"/>
-              <a:t>7/23/19</a:t>
-            </a:fld>
-            <a:endParaRPr lang="en-US"/>
-          </a:p>
-        </p:txBody>
-      </p:sp>
-      <p:sp>
-        <p:nvSpPr>
-          <p:cNvPr id="4" name="Slide Image Placeholder 3"/>
-          <p:cNvSpPr>
-            <a:spLocks noGrp="1" noRot="1" noChangeAspect="1"/>
-          </p:cNvSpPr>
-          <p:nvPr>
-            <p:ph type="sldImg" idx="2"/>
-          </p:nvPr>
-        </p:nvSpPr>
-        <p:spPr>
-          <a:xfrm>
-            <a:off x="685800" y="1143000"/>
-            <a:ext cx="5486400" cy="3086100"/>
-          </a:xfrm>
-          <a:prstGeom prst="rect">
-            <a:avLst/>
-          </a:prstGeom>
-          <a:noFill/>
-          <a:ln w="12700">
-            <a:solidFill>
-              <a:prstClr val="black"/>
-            </a:solidFill>
-          </a:ln>
-        </p:spPr>
-        <p:txBody>
-          <a:bodyPr vert="horz" lIns="91440" tIns="45720" rIns="91440" bIns="45720" rtlCol="0" anchor="ctr"/>
-          <a:lstStyle/>
-          <a:p>
-            <a:endParaRPr lang="en-US"/>
-          </a:p>
-        </p:txBody>
-      </p:sp>
-      <p:sp>
-        <p:nvSpPr>
-          <p:cNvPr id="5" name="Notes Placeholder 4"/>
-          <p:cNvSpPr>
-            <a:spLocks noGrp="1"/>
-          </p:cNvSpPr>
-          <p:nvPr>
-            <p:ph type="body" sz="quarter" idx="3"/>
-          </p:nvPr>
-        </p:nvSpPr>
-        <p:spPr>
-          <a:xfrm>
-            <a:off x="685800" y="4400550"/>
-            <a:ext cx="5486400" cy="3600450"/>
-          </a:xfrm>
-          <a:prstGeom prst="rect">
-            <a:avLst/>
-          </a:prstGeom>
-        </p:spPr>
-        <p:txBody>
-          <a:bodyPr vert="horz" lIns="91440" tIns="45720" rIns="91440" bIns="45720" rtlCol="0"/>
-          <a:lstStyle/>
-          <a:p>
-            <a:pPr lvl="0"/>
-            <a:r>
-              <a:rPr lang="en-US"/>
-              <a:t>Click to edit Master text styles</a:t>
-            </a:r>
-          </a:p>
-          <a:p>
-            <a:pPr lvl="1"/>
-            <a:r>
-              <a:rPr lang="en-US"/>
-              <a:t>Second level</a:t>
-            </a:r>
-          </a:p>
-          <a:p>
-            <a:pPr lvl="2"/>
-            <a:r>
-              <a:rPr lang="en-US"/>
-              <a:t>Third level</a:t>
-            </a:r>
-          </a:p>
-          <a:p>
-            <a:pPr lvl="3"/>
-            <a:r>
-              <a:rPr lang="en-US"/>
-              <a:t>Fourth level</a:t>
-            </a:r>
-          </a:p>
-          <a:p>
-            <a:pPr lvl="4"/>
-            <a:r>
-              <a:rPr lang="en-US"/>
-              <a:t>Fifth level</a:t>
-            </a:r>
-          </a:p>
-        </p:txBody>
-      </p:sp>
-      <p:sp>
-        <p:nvSpPr>
-          <p:cNvPr id="6" name="Footer Placeholder 5"/>
-          <p:cNvSpPr>
-            <a:spLocks noGrp="1"/>
-          </p:cNvSpPr>
-          <p:nvPr>
-            <p:ph type="ftr" sz="quarter" idx="4"/>
-          </p:nvPr>
-        </p:nvSpPr>
-        <p:spPr>
-          <a:xfrm>
-            <a:off x="0" y="8685213"/>
-            <a:ext cx="2971800" cy="458787"/>
-          </a:xfrm>
-          <a:prstGeom prst="rect">
-            <a:avLst/>
-          </a:prstGeom>
-        </p:spPr>
-        <p:txBody>
-          <a:bodyPr vert="horz" lIns="91440" tIns="45720" rIns="91440" bIns="45720" rtlCol="0" anchor="b"/>
-          <a:lstStyle>
-            <a:lvl1pPr algn="l">
-              <a:defRPr sz="1200"/>
-            </a:lvl1pPr>
-          </a:lstStyle>
-          <a:p>
-            <a:endParaRPr lang="en-US"/>
-          </a:p>
-        </p:txBody>
-      </p:sp>
-      <p:sp>
-        <p:nvSpPr>
-          <p:cNvPr id="7" name="Slide Number Placeholder 6"/>
-          <p:cNvSpPr>
-            <a:spLocks noGrp="1"/>
-          </p:cNvSpPr>
-          <p:nvPr>
-            <p:ph type="sldNum" sz="quarter" idx="5"/>
-          </p:nvPr>
-        </p:nvSpPr>
-        <p:spPr>
-          <a:xfrm>
-            <a:off x="3884613" y="8685213"/>
-            <a:ext cx="2971800" cy="458787"/>
-          </a:xfrm>
-          <a:prstGeom prst="rect">
-            <a:avLst/>
-          </a:prstGeom>
-        </p:spPr>
-        <p:txBody>
-          <a:bodyPr vert="horz" lIns="91440" tIns="45720" rIns="91440" bIns="45720" rtlCol="0" anchor="b"/>
-          <a:lstStyle>
-            <a:lvl1pPr algn="r">
-              <a:defRPr sz="1200"/>
-            </a:lvl1pPr>
-          </a:lstStyle>
-          <a:p>
-            <a:fld id="{CE5E9CC1-C706-0F49-92D6-E571CC5EEA8F}" type="slidenum">
-              <a:rPr lang="en-US"/>
-              <a:t>‹#›</a:t>
-            </a:fld>
-            <a:endParaRPr lang="en-US"/>
-          </a:p>
-        </p:txBody>
-      </p:sp>
     </p:spTree>
     <p:extLst>
       <p:ext uri="{BB962C8B-B14F-4D97-AF65-F5344CB8AC3E}">
-        <p14:creationId xmlns:p14="http://schemas.microsoft.com/office/powerpoint/2010/main" val="1024086991"/>
+        <p14:creationId xmlns:p14="http://schemas.microsoft.com/office/powerpoint/2010/main" val="2303489230"/>
       </p:ext>
     </p:extLst>
   </p:cSld>
@@ -436,10 +314,6 @@
           <a:bodyPr/>
           <a:lstStyle/>
           <a:p>
-            <a:r>
-              <a:rPr lang="en-US" dirty="0"/>
-              <a:t/>
-            </a:r>
             <a:endParaRPr lang="en-US" dirty="0"/>
           </a:p>
         </p:txBody>
@@ -524,10 +398,6 @@
           <a:bodyPr/>
           <a:lstStyle/>
           <a:p>
-            <a:r>
-              <a:rPr lang="en-US" dirty="0"/>
-              <a:t/>
-            </a:r>
             <a:endParaRPr lang="en-US" dirty="0"/>
           </a:p>
         </p:txBody>
@@ -612,10 +482,6 @@
           <a:bodyPr/>
           <a:lstStyle/>
           <a:p>
-            <a:r>
-              <a:rPr lang="en-US" dirty="0"/>
-              <a:t/>
-            </a:r>
             <a:endParaRPr lang="en-US" dirty="0"/>
           </a:p>
         </p:txBody>
@@ -700,10 +566,6 @@
           <a:bodyPr/>
           <a:lstStyle/>
           <a:p>
-            <a:r>
-              <a:rPr lang="en-US" dirty="0"/>
-              <a:t/>
-            </a:r>
             <a:endParaRPr lang="en-US" dirty="0"/>
           </a:p>
         </p:txBody>
@@ -788,10 +650,6 @@
           <a:bodyPr/>
           <a:lstStyle/>
           <a:p>
-            <a:r>
-              <a:rPr lang="en-US" dirty="0"/>
-              <a:t/>
-            </a:r>
             <a:endParaRPr lang="en-US" dirty="0"/>
           </a:p>
         </p:txBody>
@@ -876,10 +734,6 @@
           <a:bodyPr/>
           <a:lstStyle/>
           <a:p>
-            <a:r>
-              <a:rPr lang="en-US" dirty="0"/>
-              <a:t/>
-            </a:r>
             <a:endParaRPr lang="en-US" dirty="0"/>
           </a:p>
         </p:txBody>
@@ -964,10 +818,6 @@
           <a:bodyPr/>
           <a:lstStyle/>
           <a:p>
-            <a:r>
-              <a:rPr lang="en-US" dirty="0"/>
-              <a:t/>
-            </a:r>
             <a:endParaRPr lang="en-US" dirty="0"/>
           </a:p>
         </p:txBody>
@@ -1052,10 +902,6 @@
           <a:bodyPr/>
           <a:lstStyle/>
           <a:p>
-            <a:r>
-              <a:rPr lang="en-US" dirty="0"/>
-              <a:t/>
-            </a:r>
             <a:endParaRPr lang="en-US" dirty="0"/>
           </a:p>
         </p:txBody>
@@ -1140,10 +986,6 @@
           <a:bodyPr/>
           <a:lstStyle/>
           <a:p>
-            <a:r>
-              <a:rPr lang="en-US" dirty="0"/>
-              <a:t/>
-            </a:r>
             <a:endParaRPr lang="en-US" dirty="0"/>
           </a:p>
         </p:txBody>
@@ -1228,10 +1070,6 @@
           <a:bodyPr/>
           <a:lstStyle/>
           <a:p>
-            <a:r>
-              <a:rPr lang="en-US" dirty="0"/>
-              <a:t/>
-            </a:r>
             <a:endParaRPr lang="en-US" dirty="0"/>
           </a:p>
         </p:txBody>
@@ -1316,10 +1154,6 @@
           <a:bodyPr/>
           <a:lstStyle/>
           <a:p>
-            <a:r>
-              <a:rPr lang="en-US" dirty="0"/>
-              <a:t/>
-            </a:r>
             <a:endParaRPr lang="en-US" dirty="0"/>
           </a:p>
         </p:txBody>
@@ -1404,10 +1238,6 @@
           <a:bodyPr/>
           <a:lstStyle/>
           <a:p>
-            <a:r>
-              <a:rPr lang="en-US" dirty="0"/>
-              <a:t/>
-            </a:r>
             <a:endParaRPr lang="en-US" dirty="0"/>
           </a:p>
         </p:txBody>
@@ -1492,10 +1322,6 @@
           <a:bodyPr/>
           <a:lstStyle/>
           <a:p>
-            <a:r>
-              <a:rPr lang="en-US" dirty="0"/>
-              <a:t/>
-            </a:r>
             <a:endParaRPr lang="en-US" dirty="0"/>
           </a:p>
         </p:txBody>
@@ -1580,10 +1406,6 @@
           <a:bodyPr/>
           <a:lstStyle/>
           <a:p>
-            <a:r>
-              <a:rPr lang="en-US" dirty="0"/>
-              <a:t/>
-            </a:r>
             <a:endParaRPr lang="en-US" dirty="0"/>
           </a:p>
         </p:txBody>
@@ -1668,10 +1490,6 @@
           <a:bodyPr/>
           <a:lstStyle/>
           <a:p>
-            <a:r>
-              <a:rPr lang="en-US" dirty="0"/>
-              <a:t/>
-            </a:r>
             <a:endParaRPr lang="en-US" dirty="0"/>
           </a:p>
         </p:txBody>
@@ -1756,10 +1574,6 @@
           <a:bodyPr/>
           <a:lstStyle/>
           <a:p>
-            <a:r>
-              <a:rPr lang="en-US" dirty="0"/>
-              <a:t/>
-            </a:r>
             <a:endParaRPr lang="en-US" dirty="0"/>
           </a:p>
         </p:txBody>
@@ -1844,10 +1658,6 @@
           <a:bodyPr/>
           <a:lstStyle/>
           <a:p>
-            <a:r>
-              <a:rPr lang="en-US" dirty="0"/>
-              <a:t/>
-            </a:r>
             <a:endParaRPr lang="en-US" dirty="0"/>
           </a:p>
         </p:txBody>
@@ -1932,10 +1742,6 @@
           <a:bodyPr/>
           <a:lstStyle/>
           <a:p>
-            <a:r>
-              <a:rPr lang="en-US" dirty="0"/>
-              <a:t/>
-            </a:r>
             <a:endParaRPr lang="en-US" dirty="0"/>
           </a:p>
         </p:txBody>
@@ -2020,10 +1826,6 @@
           <a:bodyPr/>
           <a:lstStyle/>
           <a:p>
-            <a:r>
-              <a:rPr lang="en-US" dirty="0"/>
-              <a:t/>
-            </a:r>
             <a:endParaRPr lang="en-US" dirty="0"/>
           </a:p>
         </p:txBody>
@@ -2102,6 +1904,7 @@
         <a:solidFill>
           <a:srgbClr val="FFFFFF"/>
         </a:solidFill>
+        <a:effectLst/>
       </p:bgPr>
     </p:bg>
     <p:spTree>
@@ -2129,6 +1932,11 @@
 <file path=ppt/slideMasters/slideMaster1.xml><?xml version="1.0" encoding="utf-8"?>
 <p:sldMaster xmlns:a="http://schemas.openxmlformats.org/drawingml/2006/main" xmlns:r="http://schemas.openxmlformats.org/officeDocument/2006/relationships" xmlns:p="http://schemas.openxmlformats.org/presentationml/2006/main">
   <p:cSld>
+    <p:bg>
+      <p:bgRef idx="1001">
+        <a:schemeClr val="bg1"/>
+      </p:bgRef>
+    </p:bg>
     <p:spTree>
       <p:nvGrpSpPr>
         <p:cNvPr id="1" name=""/>
@@ -2423,15 +2231,15 @@
       </p:grpSpPr>
       <p:pic>
         <p:nvPicPr>
-          <p:cNvPr id="2" name="Image 0" descr="https://kimi-img.moonshot.cn/pub/slides/okc/sm26tdp357svy/mnt/agents/output/networking-for-developers/images/5_Dark_Fiber_in_Europe_and_its_Leading.png">    </p:cNvPr>
+          <p:cNvPr id="2" name="Image 0" descr="https://kimi-img.moonshot.cn/pub/slides/okc/sm26tdp357svy/mnt/agents/output/networking-for-developers/images/5_Dark_Fiber_in_Europe_and_its_Leading.png"/>
           <p:cNvPicPr>
             <a:picLocks noChangeAspect="1"/>
           </p:cNvPicPr>
           <p:nvPr/>
         </p:nvPicPr>
         <p:blipFill>
-          <a:blip r:embed="rId1"/>
-          <a:srcRect l="2296" r="2296" t="0" b="0"/>
+          <a:blip r:embed="rId3"/>
+          <a:srcRect l="2296" r="2296"/>
           <a:stretch/>
         </p:blipFill>
         <p:spPr>
@@ -2458,7 +2266,7 @@
           <a:prstGeom prst="rect">
             <a:avLst/>
           </a:prstGeom>
-          <a:gradFill rotWithShape="1" flip="none">
+          <a:gradFill flip="none" rotWithShape="1">
             <a:gsLst>
               <a:gs pos="0">
                 <a:srgbClr val="2D3142">
@@ -2485,6 +2293,13 @@
             <a:prstDash val="solid"/>
           </a:ln>
         </p:spPr>
+        <p:txBody>
+          <a:bodyPr/>
+          <a:lstStyle/>
+          <a:p>
+            <a:endParaRPr lang="en-US"/>
+          </a:p>
+        </p:txBody>
       </p:sp>
       <p:sp>
         <p:nvSpPr>
@@ -2507,6 +2322,13 @@
           </a:solidFill>
           <a:ln/>
         </p:spPr>
+        <p:txBody>
+          <a:bodyPr/>
+          <a:lstStyle/>
+          <a:p>
+            <a:endParaRPr lang="en-US"/>
+          </a:p>
+        </p:txBody>
       </p:sp>
       <p:sp>
         <p:nvSpPr>
@@ -2529,6 +2351,13 @@
           </a:solidFill>
           <a:ln/>
         </p:spPr>
+        <p:txBody>
+          <a:bodyPr/>
+          <a:lstStyle/>
+          <a:p>
+            <a:endParaRPr lang="en-US"/>
+          </a:p>
+        </p:txBody>
       </p:sp>
       <p:sp>
         <p:nvSpPr>
@@ -2557,7 +2386,7 @@
               </a:lnSpc>
             </a:pPr>
             <a:r>
-              <a:rPr lang="en-US" sz="1400" b="1" spc="400" kern="0" dirty="0">
+              <a:rPr lang="en-US" sz="1400" b="1" kern="0" spc="400" dirty="0">
                 <a:solidFill>
                   <a:srgbClr val="E07A5F"/>
                 </a:solidFill>
@@ -2631,6 +2460,13 @@
           </a:solidFill>
           <a:ln/>
         </p:spPr>
+        <p:txBody>
+          <a:bodyPr/>
+          <a:lstStyle/>
+          <a:p>
+            <a:endParaRPr lang="en-US"/>
+          </a:p>
+        </p:txBody>
       </p:sp>
       <p:sp>
         <p:nvSpPr>
@@ -2721,7 +2557,6 @@
   </p:clrMapOvr>
   <p:transition>
     <p:fade/>
-    <p:spd val="med"/>
   </p:transition>
 </p:sld>
 </file>
@@ -2734,6 +2569,7 @@
         <a:solidFill>
           <a:srgbClr val="F4F1DE"/>
         </a:solidFill>
+        <a:effectLst/>
       </p:bgPr>
     </p:bg>
     <p:spTree>
@@ -2810,6 +2646,13 @@
           </a:solidFill>
           <a:ln/>
         </p:spPr>
+        <p:txBody>
+          <a:bodyPr/>
+          <a:lstStyle/>
+          <a:p>
+            <a:endParaRPr lang="en-US"/>
+          </a:p>
+        </p:txBody>
       </p:sp>
       <p:graphicFrame>
         <p:nvGraphicFramePr>
@@ -2834,9 +2677,27 @@
             <a:tbl>
               <a:tblPr/>
               <a:tblGrid>
-                <a:gridCol w="3241040"/>
-                <a:gridCol w="5745480"/>
-                <a:gridCol w="5745480"/>
+                <a:gridCol w="3241040">
+                  <a:extLst>
+                    <a:ext uri="{9D8B030D-6E8A-4147-A177-3AD203B41FA5}">
+                      <a16:colId xmlns:a16="http://schemas.microsoft.com/office/drawing/2014/main" val="20000"/>
+                    </a:ext>
+                  </a:extLst>
+                </a:gridCol>
+                <a:gridCol w="5745480">
+                  <a:extLst>
+                    <a:ext uri="{9D8B030D-6E8A-4147-A177-3AD203B41FA5}">
+                      <a16:colId xmlns:a16="http://schemas.microsoft.com/office/drawing/2014/main" val="20001"/>
+                    </a:ext>
+                  </a:extLst>
+                </a:gridCol>
+                <a:gridCol w="5745480">
+                  <a:extLst>
+                    <a:ext uri="{9D8B030D-6E8A-4147-A177-3AD203B41FA5}">
+                      <a16:colId xmlns:a16="http://schemas.microsoft.com/office/drawing/2014/main" val="20002"/>
+                    </a:ext>
+                  </a:extLst>
+                </a:gridCol>
               </a:tblGrid>
               <a:tr h="709426">
                 <a:tc>
@@ -2863,7 +2724,7 @@
                       </a:endParaRPr>
                     </a:p>
                   </a:txBody>
-                  <a:tcPr marL="91440" marR="91440" marT="0" marB="0" anchor="ctr">
+                  <a:tcPr marT="0" marB="0" anchor="ctr">
                     <a:lnL w="12700" cap="flat" cmpd="sng" algn="ctr">
                       <a:solidFill>
                         <a:srgbClr val="8D99AE"/>
@@ -2929,7 +2790,7 @@
                       </a:endParaRPr>
                     </a:p>
                   </a:txBody>
-                  <a:tcPr marL="91440" marR="91440" marT="0" marB="0" anchor="ctr">
+                  <a:tcPr marT="0" marB="0" anchor="ctr">
                     <a:lnL w="12700" cap="flat" cmpd="sng" algn="ctr">
                       <a:solidFill>
                         <a:srgbClr val="8D99AE"/>
@@ -2995,7 +2856,7 @@
                       </a:endParaRPr>
                     </a:p>
                   </a:txBody>
-                  <a:tcPr marL="91440" marR="91440" marT="0" marB="0" anchor="ctr">
+                  <a:tcPr marT="0" marB="0" anchor="ctr">
                     <a:lnL w="12700" cap="flat" cmpd="sng" algn="ctr">
                       <a:solidFill>
                         <a:srgbClr val="8D99AE"/>
@@ -3037,6 +2898,11 @@
                     </a:solidFill>
                   </a:tcPr>
                 </a:tc>
+                <a:extLst>
+                  <a:ext uri="{0D108BD9-81ED-4DB2-BD59-A6C34878D82A}">
+                    <a16:rowId xmlns:a16="http://schemas.microsoft.com/office/drawing/2014/main" val="10000"/>
+                  </a:ext>
+                </a:extLst>
               </a:tr>
               <a:tr h="874115">
                 <a:tc>
@@ -3063,7 +2929,7 @@
                       </a:endParaRPr>
                     </a:p>
                   </a:txBody>
-                  <a:tcPr marL="91440" marR="91440" marT="0" marB="0" anchor="ctr">
+                  <a:tcPr marT="0" marB="0" anchor="ctr">
                     <a:lnL w="12700" cap="flat" cmpd="sng" algn="ctr">
                       <a:solidFill>
                         <a:srgbClr val="8D99AE"/>
@@ -3129,7 +2995,7 @@
                       </a:endParaRPr>
                     </a:p>
                   </a:txBody>
-                  <a:tcPr marL="91440" marR="91440" marT="0" marB="0" anchor="ctr">
+                  <a:tcPr marT="0" marB="0" anchor="ctr">
                     <a:lnL w="12700" cap="flat" cmpd="sng" algn="ctr">
                       <a:solidFill>
                         <a:srgbClr val="8D99AE"/>
@@ -3195,7 +3061,7 @@
                       </a:endParaRPr>
                     </a:p>
                   </a:txBody>
-                  <a:tcPr marL="91440" marR="91440" marT="0" marB="0" anchor="ctr">
+                  <a:tcPr marT="0" marB="0" anchor="ctr">
                     <a:lnL w="12700" cap="flat" cmpd="sng" algn="ctr">
                       <a:solidFill>
                         <a:srgbClr val="8D99AE"/>
@@ -3237,6 +3103,11 @@
                     </a:solidFill>
                   </a:tcPr>
                 </a:tc>
+                <a:extLst>
+                  <a:ext uri="{0D108BD9-81ED-4DB2-BD59-A6C34878D82A}">
+                    <a16:rowId xmlns:a16="http://schemas.microsoft.com/office/drawing/2014/main" val="10001"/>
+                  </a:ext>
+                </a:extLst>
               </a:tr>
               <a:tr h="874115">
                 <a:tc>
@@ -3263,7 +3134,7 @@
                       </a:endParaRPr>
                     </a:p>
                   </a:txBody>
-                  <a:tcPr marL="91440" marR="91440" marT="0" marB="0" anchor="ctr">
+                  <a:tcPr marT="0" marB="0" anchor="ctr">
                     <a:lnL w="12700" cap="flat" cmpd="sng" algn="ctr">
                       <a:solidFill>
                         <a:srgbClr val="8D99AE"/>
@@ -3329,7 +3200,7 @@
                       </a:endParaRPr>
                     </a:p>
                   </a:txBody>
-                  <a:tcPr marL="91440" marR="91440" marT="0" marB="0" anchor="ctr">
+                  <a:tcPr marT="0" marB="0" anchor="ctr">
                     <a:lnL w="12700" cap="flat" cmpd="sng" algn="ctr">
                       <a:solidFill>
                         <a:srgbClr val="8D99AE"/>
@@ -3395,7 +3266,7 @@
                       </a:endParaRPr>
                     </a:p>
                   </a:txBody>
-                  <a:tcPr marL="91440" marR="91440" marT="0" marB="0" anchor="ctr">
+                  <a:tcPr marT="0" marB="0" anchor="ctr">
                     <a:lnL w="12700" cap="flat" cmpd="sng" algn="ctr">
                       <a:solidFill>
                         <a:srgbClr val="8D99AE"/>
@@ -3437,6 +3308,11 @@
                     </a:solidFill>
                   </a:tcPr>
                 </a:tc>
+                <a:extLst>
+                  <a:ext uri="{0D108BD9-81ED-4DB2-BD59-A6C34878D82A}">
+                    <a16:rowId xmlns:a16="http://schemas.microsoft.com/office/drawing/2014/main" val="10002"/>
+                  </a:ext>
+                </a:extLst>
               </a:tr>
               <a:tr h="874115">
                 <a:tc>
@@ -3463,7 +3339,7 @@
                       </a:endParaRPr>
                     </a:p>
                   </a:txBody>
-                  <a:tcPr marL="91440" marR="91440" marT="0" marB="0" anchor="ctr">
+                  <a:tcPr marT="0" marB="0" anchor="ctr">
                     <a:lnL w="12700" cap="flat" cmpd="sng" algn="ctr">
                       <a:solidFill>
                         <a:srgbClr val="8D99AE"/>
@@ -3529,7 +3405,7 @@
                       </a:endParaRPr>
                     </a:p>
                   </a:txBody>
-                  <a:tcPr marL="91440" marR="91440" marT="0" marB="0" anchor="ctr">
+                  <a:tcPr marT="0" marB="0" anchor="ctr">
                     <a:lnL w="12700" cap="flat" cmpd="sng" algn="ctr">
                       <a:solidFill>
                         <a:srgbClr val="8D99AE"/>
@@ -3595,7 +3471,7 @@
                       </a:endParaRPr>
                     </a:p>
                   </a:txBody>
-                  <a:tcPr marL="91440" marR="91440" marT="0" marB="0" anchor="ctr">
+                  <a:tcPr marT="0" marB="0" anchor="ctr">
                     <a:lnL w="12700" cap="flat" cmpd="sng" algn="ctr">
                       <a:solidFill>
                         <a:srgbClr val="8D99AE"/>
@@ -3637,6 +3513,11 @@
                     </a:solidFill>
                   </a:tcPr>
                 </a:tc>
+                <a:extLst>
+                  <a:ext uri="{0D108BD9-81ED-4DB2-BD59-A6C34878D82A}">
+                    <a16:rowId xmlns:a16="http://schemas.microsoft.com/office/drawing/2014/main" val="10003"/>
+                  </a:ext>
+                </a:extLst>
               </a:tr>
               <a:tr h="874115">
                 <a:tc>
@@ -3663,7 +3544,7 @@
                       </a:endParaRPr>
                     </a:p>
                   </a:txBody>
-                  <a:tcPr marL="91440" marR="91440" marT="0" marB="0" anchor="ctr">
+                  <a:tcPr marT="0" marB="0" anchor="ctr">
                     <a:lnL w="12700" cap="flat" cmpd="sng" algn="ctr">
                       <a:solidFill>
                         <a:srgbClr val="8D99AE"/>
@@ -3729,7 +3610,7 @@
                       </a:endParaRPr>
                     </a:p>
                   </a:txBody>
-                  <a:tcPr marL="91440" marR="91440" marT="0" marB="0" anchor="ctr">
+                  <a:tcPr marT="0" marB="0" anchor="ctr">
                     <a:lnL w="12700" cap="flat" cmpd="sng" algn="ctr">
                       <a:solidFill>
                         <a:srgbClr val="8D99AE"/>
@@ -3795,7 +3676,7 @@
                       </a:endParaRPr>
                     </a:p>
                   </a:txBody>
-                  <a:tcPr marL="91440" marR="91440" marT="0" marB="0" anchor="ctr">
+                  <a:tcPr marT="0" marB="0" anchor="ctr">
                     <a:lnL w="12700" cap="flat" cmpd="sng" algn="ctr">
                       <a:solidFill>
                         <a:srgbClr val="8D99AE"/>
@@ -3837,6 +3718,11 @@
                     </a:solidFill>
                   </a:tcPr>
                 </a:tc>
+                <a:extLst>
+                  <a:ext uri="{0D108BD9-81ED-4DB2-BD59-A6C34878D82A}">
+                    <a16:rowId xmlns:a16="http://schemas.microsoft.com/office/drawing/2014/main" val="10004"/>
+                  </a:ext>
+                </a:extLst>
               </a:tr>
               <a:tr h="874115">
                 <a:tc>
@@ -3863,7 +3749,7 @@
                       </a:endParaRPr>
                     </a:p>
                   </a:txBody>
-                  <a:tcPr marL="91440" marR="91440" marT="0" marB="0" anchor="ctr">
+                  <a:tcPr marT="0" marB="0" anchor="ctr">
                     <a:lnL w="12700" cap="flat" cmpd="sng" algn="ctr">
                       <a:solidFill>
                         <a:srgbClr val="8D99AE"/>
@@ -3929,7 +3815,7 @@
                       </a:endParaRPr>
                     </a:p>
                   </a:txBody>
-                  <a:tcPr marL="91440" marR="91440" marT="0" marB="0" anchor="ctr">
+                  <a:tcPr marT="0" marB="0" anchor="ctr">
                     <a:lnL w="12700" cap="flat" cmpd="sng" algn="ctr">
                       <a:solidFill>
                         <a:srgbClr val="8D99AE"/>
@@ -3995,7 +3881,7 @@
                       </a:endParaRPr>
                     </a:p>
                   </a:txBody>
-                  <a:tcPr marL="91440" marR="91440" marT="0" marB="0" anchor="ctr">
+                  <a:tcPr marT="0" marB="0" anchor="ctr">
                     <a:lnL w="12700" cap="flat" cmpd="sng" algn="ctr">
                       <a:solidFill>
                         <a:srgbClr val="8D99AE"/>
@@ -4037,6 +3923,11 @@
                     </a:solidFill>
                   </a:tcPr>
                 </a:tc>
+                <a:extLst>
+                  <a:ext uri="{0D108BD9-81ED-4DB2-BD59-A6C34878D82A}">
+                    <a16:rowId xmlns:a16="http://schemas.microsoft.com/office/drawing/2014/main" val="10005"/>
+                  </a:ext>
+                </a:extLst>
               </a:tr>
             </a:tbl>
           </a:graphicData>
@@ -4061,6 +3952,13 @@
           </a:solidFill>
           <a:ln/>
         </p:spPr>
+        <p:txBody>
+          <a:bodyPr/>
+          <a:lstStyle/>
+          <a:p>
+            <a:endParaRPr lang="en-US"/>
+          </a:p>
+        </p:txBody>
       </p:sp>
       <p:sp>
         <p:nvSpPr>
@@ -4197,6 +4095,13 @@
           </a:solidFill>
           <a:ln/>
         </p:spPr>
+        <p:txBody>
+          <a:bodyPr/>
+          <a:lstStyle/>
+          <a:p>
+            <a:endParaRPr lang="en-US"/>
+          </a:p>
+        </p:txBody>
       </p:sp>
       <p:sp>
         <p:nvSpPr>
@@ -4235,11 +4140,6 @@
               </a:rPr>
               <a:t>Both are essential:</a:t>
             </a:r>
-            <a:pPr>
-              <a:lnSpc>
-                <a:spcPct val="150000"/>
-              </a:lnSpc>
-            </a:pPr>
             <a:r>
               <a:rPr lang="en-US" sz="1800" dirty="0">
                 <a:solidFill>
@@ -4251,11 +4151,6 @@
               </a:rPr>
               <a:t> IP finds the destination </a:t>
             </a:r>
-            <a:pPr>
-              <a:lnSpc>
-                <a:spcPct val="150000"/>
-              </a:lnSpc>
-            </a:pPr>
             <a:r>
               <a:rPr lang="en-US" sz="1800" i="1" dirty="0">
                 <a:solidFill>
@@ -4267,11 +4162,6 @@
               </a:rPr>
               <a:t>network</a:t>
             </a:r>
-            <a:pPr>
-              <a:lnSpc>
-                <a:spcPct val="150000"/>
-              </a:lnSpc>
-            </a:pPr>
             <a:r>
               <a:rPr lang="en-US" sz="1800" dirty="0">
                 <a:solidFill>
@@ -4283,11 +4173,6 @@
               </a:rPr>
               <a:t>; MAC finds the destination </a:t>
             </a:r>
-            <a:pPr>
-              <a:lnSpc>
-                <a:spcPct val="150000"/>
-              </a:lnSpc>
-            </a:pPr>
             <a:r>
               <a:rPr lang="en-US" sz="1800" i="1" dirty="0">
                 <a:solidFill>
@@ -4299,11 +4184,6 @@
               </a:rPr>
               <a:t>device</a:t>
             </a:r>
-            <a:pPr>
-              <a:lnSpc>
-                <a:spcPct val="150000"/>
-              </a:lnSpc>
-            </a:pPr>
             <a:r>
               <a:rPr lang="en-US" sz="1800" dirty="0">
                 <a:solidFill>
@@ -4367,7 +4247,6 @@
   </p:clrMapOvr>
   <p:transition>
     <p:fade/>
-    <p:spd val="med"/>
   </p:transition>
 </p:sld>
 </file>
@@ -4380,6 +4259,7 @@
         <a:solidFill>
           <a:srgbClr val="F4F1DE"/>
         </a:solidFill>
+        <a:effectLst/>
       </p:bgPr>
     </p:bg>
     <p:spTree>
@@ -4456,6 +4336,13 @@
           </a:solidFill>
           <a:ln/>
         </p:spPr>
+        <p:txBody>
+          <a:bodyPr/>
+          <a:lstStyle/>
+          <a:p>
+            <a:endParaRPr lang="en-US"/>
+          </a:p>
+        </p:txBody>
       </p:sp>
       <p:sp>
         <p:nvSpPr>
@@ -4476,6 +4363,13 @@
           </a:solidFill>
           <a:ln/>
         </p:spPr>
+        <p:txBody>
+          <a:bodyPr/>
+          <a:lstStyle/>
+          <a:p>
+            <a:endParaRPr lang="en-US"/>
+          </a:p>
+        </p:txBody>
       </p:sp>
       <p:sp>
         <p:nvSpPr>
@@ -4514,11 +4408,6 @@
               </a:rPr>
               <a:t>The </a:t>
             </a:r>
-            <a:pPr>
-              <a:lnSpc>
-                <a:spcPct val="160000"/>
-              </a:lnSpc>
-            </a:pPr>
             <a:r>
               <a:rPr lang="en-US" sz="1800" b="1" dirty="0">
                 <a:solidFill>
@@ -4530,11 +4419,6 @@
               </a:rPr>
               <a:t>default gateway</a:t>
             </a:r>
-            <a:pPr>
-              <a:lnSpc>
-                <a:spcPct val="160000"/>
-              </a:lnSpc>
-            </a:pPr>
             <a:r>
               <a:rPr lang="en-US" sz="1800" dirty="0">
                 <a:solidFill>
@@ -4569,6 +4453,13 @@
           </a:solidFill>
           <a:ln/>
         </p:spPr>
+        <p:txBody>
+          <a:bodyPr/>
+          <a:lstStyle/>
+          <a:p>
+            <a:endParaRPr lang="en-US"/>
+          </a:p>
+        </p:txBody>
       </p:sp>
       <p:sp>
         <p:nvSpPr>
@@ -4591,6 +4482,13 @@
           </a:solidFill>
           <a:ln/>
         </p:spPr>
+        <p:txBody>
+          <a:bodyPr/>
+          <a:lstStyle/>
+          <a:p>
+            <a:endParaRPr lang="en-US"/>
+          </a:p>
+        </p:txBody>
       </p:sp>
       <p:sp>
         <p:nvSpPr>
@@ -4673,6 +4571,13 @@
           </a:solidFill>
           <a:ln/>
         </p:spPr>
+        <p:txBody>
+          <a:bodyPr/>
+          <a:lstStyle/>
+          <a:p>
+            <a:endParaRPr lang="en-US"/>
+          </a:p>
+        </p:txBody>
       </p:sp>
       <p:sp>
         <p:nvSpPr>
@@ -4755,6 +4660,13 @@
           </a:solidFill>
           <a:ln/>
         </p:spPr>
+        <p:txBody>
+          <a:bodyPr/>
+          <a:lstStyle/>
+          <a:p>
+            <a:endParaRPr lang="en-US"/>
+          </a:p>
+        </p:txBody>
       </p:sp>
       <p:sp>
         <p:nvSpPr>
@@ -4840,6 +4752,13 @@
             <a:tailEnd type="arrow"/>
           </a:ln>
         </p:spPr>
+        <p:txBody>
+          <a:bodyPr/>
+          <a:lstStyle/>
+          <a:p>
+            <a:endParaRPr lang="en-US"/>
+          </a:p>
+        </p:txBody>
       </p:sp>
       <p:sp>
         <p:nvSpPr>
@@ -4865,6 +4784,13 @@
             <a:tailEnd type="arrow"/>
           </a:ln>
         </p:spPr>
+        <p:txBody>
+          <a:bodyPr/>
+          <a:lstStyle/>
+          <a:p>
+            <a:endParaRPr lang="en-US"/>
+          </a:p>
+        </p:txBody>
       </p:sp>
       <p:sp>
         <p:nvSpPr>
@@ -4887,6 +4813,13 @@
           </a:solidFill>
           <a:ln/>
         </p:spPr>
+        <p:txBody>
+          <a:bodyPr/>
+          <a:lstStyle/>
+          <a:p>
+            <a:endParaRPr lang="en-US"/>
+          </a:p>
+        </p:txBody>
       </p:sp>
       <p:sp>
         <p:nvSpPr>
@@ -4991,6 +4924,13 @@
             <a:tailEnd type="arrow"/>
           </a:ln>
         </p:spPr>
+        <p:txBody>
+          <a:bodyPr/>
+          <a:lstStyle/>
+          <a:p>
+            <a:endParaRPr lang="en-US"/>
+          </a:p>
+        </p:txBody>
       </p:sp>
       <p:sp>
         <p:nvSpPr>
@@ -5016,6 +4956,13 @@
             <a:tailEnd type="arrow"/>
           </a:ln>
         </p:spPr>
+        <p:txBody>
+          <a:bodyPr/>
+          <a:lstStyle/>
+          <a:p>
+            <a:endParaRPr lang="en-US"/>
+          </a:p>
+        </p:txBody>
       </p:sp>
       <p:sp>
         <p:nvSpPr>
@@ -5038,6 +4985,13 @@
           </a:solidFill>
           <a:ln/>
         </p:spPr>
+        <p:txBody>
+          <a:bodyPr/>
+          <a:lstStyle/>
+          <a:p>
+            <a:endParaRPr lang="en-US"/>
+          </a:p>
+        </p:txBody>
       </p:sp>
       <p:sp>
         <p:nvSpPr>
@@ -5200,6 +5154,13 @@
           </a:solidFill>
           <a:ln/>
         </p:spPr>
+        <p:txBody>
+          <a:bodyPr/>
+          <a:lstStyle/>
+          <a:p>
+            <a:endParaRPr lang="en-US"/>
+          </a:p>
+        </p:txBody>
       </p:sp>
       <p:sp>
         <p:nvSpPr>
@@ -5238,11 +5199,6 @@
               </a:rPr>
               <a:t>Key Point:</a:t>
             </a:r>
-            <a:pPr>
-              <a:lnSpc>
-                <a:spcPct val="100000"/>
-              </a:lnSpc>
-            </a:pPr>
             <a:r>
               <a:rPr lang="en-US" sz="1800" dirty="0">
                 <a:solidFill>
@@ -5306,7 +5262,6 @@
   </p:clrMapOvr>
   <p:transition>
     <p:fade/>
-    <p:spd val="med"/>
   </p:transition>
 </p:sld>
 </file>
@@ -5319,6 +5274,7 @@
         <a:solidFill>
           <a:srgbClr val="F4F1DE"/>
         </a:solidFill>
+        <a:effectLst/>
       </p:bgPr>
     </p:bg>
     <p:spTree>
@@ -5395,6 +5351,13 @@
           </a:solidFill>
           <a:ln/>
         </p:spPr>
+        <p:txBody>
+          <a:bodyPr/>
+          <a:lstStyle/>
+          <a:p>
+            <a:endParaRPr lang="en-US"/>
+          </a:p>
+        </p:txBody>
       </p:sp>
       <p:sp>
         <p:nvSpPr>
@@ -5415,6 +5378,13 @@
           </a:solidFill>
           <a:ln/>
         </p:spPr>
+        <p:txBody>
+          <a:bodyPr/>
+          <a:lstStyle/>
+          <a:p>
+            <a:endParaRPr lang="en-US"/>
+          </a:p>
+        </p:txBody>
       </p:sp>
       <p:sp>
         <p:nvSpPr>
@@ -5453,11 +5423,6 @@
               </a:rPr>
               <a:t>DNS translates </a:t>
             </a:r>
-            <a:pPr>
-              <a:lnSpc>
-                <a:spcPct val="160000"/>
-              </a:lnSpc>
-            </a:pPr>
             <a:r>
               <a:rPr lang="en-US" sz="1800" b="1" dirty="0">
                 <a:solidFill>
@@ -5469,11 +5434,6 @@
               </a:rPr>
               <a:t>human-readable domain names</a:t>
             </a:r>
-            <a:pPr>
-              <a:lnSpc>
-                <a:spcPct val="160000"/>
-              </a:lnSpc>
-            </a:pPr>
             <a:r>
               <a:rPr lang="en-US" sz="1800" dirty="0">
                 <a:solidFill>
@@ -5485,11 +5445,6 @@
               </a:rPr>
               <a:t> (e.g., google.com) into </a:t>
             </a:r>
-            <a:pPr>
-              <a:lnSpc>
-                <a:spcPct val="160000"/>
-              </a:lnSpc>
-            </a:pPr>
             <a:r>
               <a:rPr lang="en-US" sz="1800" b="1" dirty="0">
                 <a:solidFill>
@@ -5501,11 +5456,6 @@
               </a:rPr>
               <a:t>machine-readable IP addresses</a:t>
             </a:r>
-            <a:pPr>
-              <a:lnSpc>
-                <a:spcPct val="160000"/>
-              </a:lnSpc>
-            </a:pPr>
             <a:r>
               <a:rPr lang="en-US" sz="1800" dirty="0">
                 <a:solidFill>
@@ -5583,6 +5533,13 @@
           </a:solidFill>
           <a:ln/>
         </p:spPr>
+        <p:txBody>
+          <a:bodyPr/>
+          <a:lstStyle/>
+          <a:p>
+            <a:endParaRPr lang="en-US"/>
+          </a:p>
+        </p:txBody>
       </p:sp>
       <p:sp>
         <p:nvSpPr>
@@ -5649,6 +5606,13 @@
             <a:tailEnd type="arrow"/>
           </a:ln>
         </p:spPr>
+        <p:txBody>
+          <a:bodyPr/>
+          <a:lstStyle/>
+          <a:p>
+            <a:endParaRPr lang="en-US"/>
+          </a:p>
+        </p:txBody>
       </p:sp>
       <p:sp>
         <p:nvSpPr>
@@ -5712,6 +5676,13 @@
           </a:solidFill>
           <a:ln/>
         </p:spPr>
+        <p:txBody>
+          <a:bodyPr/>
+          <a:lstStyle/>
+          <a:p>
+            <a:endParaRPr lang="en-US"/>
+          </a:p>
+        </p:txBody>
       </p:sp>
       <p:sp>
         <p:nvSpPr>
@@ -5971,11 +5942,6 @@
               </a:rPr>
               <a:t>1. Browser checks </a:t>
             </a:r>
-            <a:pPr>
-              <a:lnSpc>
-                <a:spcPct val="160000"/>
-              </a:lnSpc>
-            </a:pPr>
             <a:r>
               <a:rPr lang="en-US" sz="1600" b="1" dirty="0">
                 <a:solidFill>
@@ -6006,11 +5972,6 @@
               </a:rPr>
               <a:t>2. Queries </a:t>
             </a:r>
-            <a:pPr>
-              <a:lnSpc>
-                <a:spcPct val="160000"/>
-              </a:lnSpc>
-            </a:pPr>
             <a:r>
               <a:rPr lang="en-US" sz="1600" b="1" dirty="0">
                 <a:solidFill>
@@ -6041,11 +6002,6 @@
               </a:rPr>
               <a:t>3. Asks </a:t>
             </a:r>
-            <a:pPr>
-              <a:lnSpc>
-                <a:spcPct val="160000"/>
-              </a:lnSpc>
-            </a:pPr>
             <a:r>
               <a:rPr lang="en-US" sz="1600" b="1" dirty="0">
                 <a:solidFill>
@@ -6057,11 +6013,6 @@
               </a:rPr>
               <a:t>root</a:t>
             </a:r>
-            <a:pPr>
-              <a:lnSpc>
-                <a:spcPct val="160000"/>
-              </a:lnSpc>
-            </a:pPr>
             <a:r>
               <a:rPr lang="en-US" sz="1600" dirty="0">
                 <a:solidFill>
@@ -6073,11 +6024,6 @@
               </a:rPr>
               <a:t> → </a:t>
             </a:r>
-            <a:pPr>
-              <a:lnSpc>
-                <a:spcPct val="160000"/>
-              </a:lnSpc>
-            </a:pPr>
             <a:r>
               <a:rPr lang="en-US" sz="1600" b="1" dirty="0">
                 <a:solidFill>
@@ -6089,11 +6035,6 @@
               </a:rPr>
               <a:t>TLD</a:t>
             </a:r>
-            <a:pPr>
-              <a:lnSpc>
-                <a:spcPct val="160000"/>
-              </a:lnSpc>
-            </a:pPr>
             <a:r>
               <a:rPr lang="en-US" sz="1600" dirty="0">
                 <a:solidFill>
@@ -6105,11 +6046,6 @@
               </a:rPr>
               <a:t> → </a:t>
             </a:r>
-            <a:pPr>
-              <a:lnSpc>
-                <a:spcPct val="160000"/>
-              </a:lnSpc>
-            </a:pPr>
             <a:r>
               <a:rPr lang="en-US" sz="1600" b="1" dirty="0">
                 <a:solidFill>
@@ -6121,11 +6057,6 @@
               </a:rPr>
               <a:t>authoritative</a:t>
             </a:r>
-            <a:pPr>
-              <a:lnSpc>
-                <a:spcPct val="160000"/>
-              </a:lnSpc>
-            </a:pPr>
             <a:r>
               <a:rPr lang="en-US" sz="1600" dirty="0">
                 <a:solidFill>
@@ -6179,6 +6110,13 @@
           </a:solidFill>
           <a:ln/>
         </p:spPr>
+        <p:txBody>
+          <a:bodyPr/>
+          <a:lstStyle/>
+          <a:p>
+            <a:endParaRPr lang="en-US"/>
+          </a:p>
+        </p:txBody>
       </p:sp>
       <p:sp>
         <p:nvSpPr>
@@ -6269,7 +6207,6 @@
   </p:clrMapOvr>
   <p:transition>
     <p:fade/>
-    <p:spd val="med"/>
   </p:transition>
 </p:sld>
 </file>
@@ -6282,6 +6219,7 @@
         <a:solidFill>
           <a:srgbClr val="F4F1DE"/>
         </a:solidFill>
+        <a:effectLst/>
       </p:bgPr>
     </p:bg>
     <p:spTree>
@@ -6358,6 +6296,13 @@
           </a:solidFill>
           <a:ln/>
         </p:spPr>
+        <p:txBody>
+          <a:bodyPr/>
+          <a:lstStyle/>
+          <a:p>
+            <a:endParaRPr lang="en-US"/>
+          </a:p>
+        </p:txBody>
       </p:sp>
       <p:sp>
         <p:nvSpPr>
@@ -6396,11 +6341,6 @@
               </a:rPr>
               <a:t>ARP</a:t>
             </a:r>
-            <a:pPr>
-              <a:lnSpc>
-                <a:spcPct val="160000"/>
-              </a:lnSpc>
-            </a:pPr>
             <a:r>
               <a:rPr lang="en-US" sz="1800" dirty="0">
                 <a:solidFill>
@@ -6476,6 +6416,13 @@
           </a:solidFill>
           <a:ln/>
         </p:spPr>
+        <p:txBody>
+          <a:bodyPr/>
+          <a:lstStyle/>
+          <a:p>
+            <a:endParaRPr lang="en-US"/>
+          </a:p>
+        </p:txBody>
       </p:sp>
       <p:sp>
         <p:nvSpPr>
@@ -6646,6 +6593,13 @@
             <a:tailEnd type="arrow"/>
           </a:ln>
         </p:spPr>
+        <p:txBody>
+          <a:bodyPr/>
+          <a:lstStyle/>
+          <a:p>
+            <a:endParaRPr lang="en-US"/>
+          </a:p>
+        </p:txBody>
       </p:sp>
       <p:sp>
         <p:nvSpPr>
@@ -6666,6 +6620,13 @@
           </a:solidFill>
           <a:ln/>
         </p:spPr>
+        <p:txBody>
+          <a:bodyPr/>
+          <a:lstStyle/>
+          <a:p>
+            <a:endParaRPr lang="en-US"/>
+          </a:p>
+        </p:txBody>
       </p:sp>
       <p:sp>
         <p:nvSpPr>
@@ -6836,6 +6797,13 @@
             <a:tailEnd type="arrow"/>
           </a:ln>
         </p:spPr>
+        <p:txBody>
+          <a:bodyPr/>
+          <a:lstStyle/>
+          <a:p>
+            <a:endParaRPr lang="en-US"/>
+          </a:p>
+        </p:txBody>
       </p:sp>
       <p:sp>
         <p:nvSpPr>
@@ -6856,6 +6824,13 @@
           </a:solidFill>
           <a:ln/>
         </p:spPr>
+        <p:txBody>
+          <a:bodyPr/>
+          <a:lstStyle/>
+          <a:p>
+            <a:endParaRPr lang="en-US"/>
+          </a:p>
+        </p:txBody>
       </p:sp>
       <p:sp>
         <p:nvSpPr>
@@ -7023,7 +6998,7 @@
       </p:sp>
       <p:graphicFrame>
         <p:nvGraphicFramePr>
-          <p:cNvPr id="14" name="Table 0"/>
+          <p:cNvPr id="21" name="Table 0"/>
           <p:cNvGraphicFramePr>
             <a:graphicFrameLocks noGrp="1"/>
           </p:cNvGraphicFramePr>
@@ -7044,8 +7019,20 @@
             <a:tbl>
               <a:tblPr/>
               <a:tblGrid>
-                <a:gridCol w="3810000"/>
-                <a:gridCol w="3810000"/>
+                <a:gridCol w="3810000">
+                  <a:extLst>
+                    <a:ext uri="{9D8B030D-6E8A-4147-A177-3AD203B41FA5}">
+                      <a16:colId xmlns:a16="http://schemas.microsoft.com/office/drawing/2014/main" val="20000"/>
+                    </a:ext>
+                  </a:extLst>
+                </a:gridCol>
+                <a:gridCol w="3810000">
+                  <a:extLst>
+                    <a:ext uri="{9D8B030D-6E8A-4147-A177-3AD203B41FA5}">
+                      <a16:colId xmlns:a16="http://schemas.microsoft.com/office/drawing/2014/main" val="20001"/>
+                    </a:ext>
+                  </a:extLst>
+                </a:gridCol>
               </a:tblGrid>
               <a:tr h="444500">
                 <a:tc>
@@ -7072,7 +7059,7 @@
                       </a:endParaRPr>
                     </a:p>
                   </a:txBody>
-                  <a:tcPr marL="91440" marR="91440" marT="0" marB="0" anchor="ctr">
+                  <a:tcPr marT="0" marB="0" anchor="ctr">
                     <a:lnL w="12700" cap="flat" cmpd="sng" algn="ctr">
                       <a:solidFill>
                         <a:srgbClr val="8D99AE"/>
@@ -7138,7 +7125,7 @@
                       </a:endParaRPr>
                     </a:p>
                   </a:txBody>
-                  <a:tcPr marL="91440" marR="91440" marT="0" marB="0" anchor="ctr">
+                  <a:tcPr marT="0" marB="0" anchor="ctr">
                     <a:lnL w="12700" cap="flat" cmpd="sng" algn="ctr">
                       <a:solidFill>
                         <a:srgbClr val="8D99AE"/>
@@ -7180,6 +7167,11 @@
                     </a:solidFill>
                   </a:tcPr>
                 </a:tc>
+                <a:extLst>
+                  <a:ext uri="{0D108BD9-81ED-4DB2-BD59-A6C34878D82A}">
+                    <a16:rowId xmlns:a16="http://schemas.microsoft.com/office/drawing/2014/main" val="10000"/>
+                  </a:ext>
+                </a:extLst>
               </a:tr>
               <a:tr h="444500">
                 <a:tc>
@@ -7206,7 +7198,7 @@
                       </a:endParaRPr>
                     </a:p>
                   </a:txBody>
-                  <a:tcPr marL="91440" marR="91440" marT="0" marB="0" anchor="ctr">
+                  <a:tcPr marT="0" marB="0" anchor="ctr">
                     <a:lnL w="12700" cap="flat" cmpd="sng" algn="ctr">
                       <a:solidFill>
                         <a:srgbClr val="8D99AE"/>
@@ -7272,7 +7264,7 @@
                       </a:endParaRPr>
                     </a:p>
                   </a:txBody>
-                  <a:tcPr marL="91440" marR="91440" marT="0" marB="0" anchor="ctr">
+                  <a:tcPr marT="0" marB="0" anchor="ctr">
                     <a:lnL w="12700" cap="flat" cmpd="sng" algn="ctr">
                       <a:solidFill>
                         <a:srgbClr val="8D99AE"/>
@@ -7314,6 +7306,11 @@
                     </a:solidFill>
                   </a:tcPr>
                 </a:tc>
+                <a:extLst>
+                  <a:ext uri="{0D108BD9-81ED-4DB2-BD59-A6C34878D82A}">
+                    <a16:rowId xmlns:a16="http://schemas.microsoft.com/office/drawing/2014/main" val="10001"/>
+                  </a:ext>
+                </a:extLst>
               </a:tr>
               <a:tr h="444500">
                 <a:tc>
@@ -7340,7 +7337,7 @@
                       </a:endParaRPr>
                     </a:p>
                   </a:txBody>
-                  <a:tcPr marL="91440" marR="91440" marT="0" marB="0" anchor="ctr">
+                  <a:tcPr marT="0" marB="0" anchor="ctr">
                     <a:lnL w="12700" cap="flat" cmpd="sng" algn="ctr">
                       <a:solidFill>
                         <a:srgbClr val="8D99AE"/>
@@ -7406,7 +7403,7 @@
                       </a:endParaRPr>
                     </a:p>
                   </a:txBody>
-                  <a:tcPr marL="91440" marR="91440" marT="0" marB="0" anchor="ctr">
+                  <a:tcPr marT="0" marB="0" anchor="ctr">
                     <a:lnL w="12700" cap="flat" cmpd="sng" algn="ctr">
                       <a:solidFill>
                         <a:srgbClr val="8D99AE"/>
@@ -7448,6 +7445,11 @@
                     </a:solidFill>
                   </a:tcPr>
                 </a:tc>
+                <a:extLst>
+                  <a:ext uri="{0D108BD9-81ED-4DB2-BD59-A6C34878D82A}">
+                    <a16:rowId xmlns:a16="http://schemas.microsoft.com/office/drawing/2014/main" val="10002"/>
+                  </a:ext>
+                </a:extLst>
               </a:tr>
               <a:tr h="444500">
                 <a:tc>
@@ -7474,7 +7476,7 @@
                       </a:endParaRPr>
                     </a:p>
                   </a:txBody>
-                  <a:tcPr marL="91440" marR="91440" marT="0" marB="0" anchor="ctr">
+                  <a:tcPr marT="0" marB="0" anchor="ctr">
                     <a:lnL w="12700" cap="flat" cmpd="sng" algn="ctr">
                       <a:solidFill>
                         <a:srgbClr val="8D99AE"/>
@@ -7540,7 +7542,7 @@
                       </a:endParaRPr>
                     </a:p>
                   </a:txBody>
-                  <a:tcPr marL="91440" marR="91440" marT="0" marB="0" anchor="ctr">
+                  <a:tcPr marT="0" marB="0" anchor="ctr">
                     <a:lnL w="12700" cap="flat" cmpd="sng" algn="ctr">
                       <a:solidFill>
                         <a:srgbClr val="8D99AE"/>
@@ -7582,6 +7584,11 @@
                     </a:solidFill>
                   </a:tcPr>
                 </a:tc>
+                <a:extLst>
+                  <a:ext uri="{0D108BD9-81ED-4DB2-BD59-A6C34878D82A}">
+                    <a16:rowId xmlns:a16="http://schemas.microsoft.com/office/drawing/2014/main" val="10003"/>
+                  </a:ext>
+                </a:extLst>
               </a:tr>
             </a:tbl>
           </a:graphicData>
@@ -7606,6 +7613,13 @@
           </a:solidFill>
           <a:ln/>
         </p:spPr>
+        <p:txBody>
+          <a:bodyPr/>
+          <a:lstStyle/>
+          <a:p>
+            <a:endParaRPr lang="en-US"/>
+          </a:p>
+        </p:txBody>
       </p:sp>
       <p:sp>
         <p:nvSpPr>
@@ -7644,11 +7658,6 @@
               </a:rPr>
               <a:t>Important:</a:t>
             </a:r>
-            <a:pPr>
-              <a:lnSpc>
-                <a:spcPct val="160000"/>
-              </a:lnSpc>
-            </a:pPr>
             <a:r>
               <a:rPr lang="en-US" sz="1600" dirty="0">
                 <a:solidFill>
@@ -7712,7 +7721,6 @@
   </p:clrMapOvr>
   <p:transition>
     <p:fade/>
-    <p:spd val="med"/>
   </p:transition>
 </p:sld>
 </file>
@@ -7725,6 +7733,7 @@
         <a:solidFill>
           <a:srgbClr val="F4F1DE"/>
         </a:solidFill>
+        <a:effectLst/>
       </p:bgPr>
     </p:bg>
     <p:spTree>
@@ -7801,6 +7810,13 @@
           </a:solidFill>
           <a:ln/>
         </p:spPr>
+        <p:txBody>
+          <a:bodyPr/>
+          <a:lstStyle/>
+          <a:p>
+            <a:endParaRPr lang="en-US"/>
+          </a:p>
+        </p:txBody>
       </p:sp>
       <p:sp>
         <p:nvSpPr>
@@ -7839,11 +7855,6 @@
               </a:rPr>
               <a:t>NAT</a:t>
             </a:r>
-            <a:pPr>
-              <a:lnSpc>
-                <a:spcPct val="160000"/>
-              </a:lnSpc>
-            </a:pPr>
             <a:r>
               <a:rPr lang="en-US" sz="1800" dirty="0">
                 <a:solidFill>
@@ -7919,6 +7930,13 @@
           </a:solidFill>
           <a:ln/>
         </p:spPr>
+        <p:txBody>
+          <a:bodyPr/>
+          <a:lstStyle/>
+          <a:p>
+            <a:endParaRPr lang="en-US"/>
+          </a:p>
+        </p:txBody>
       </p:sp>
       <p:sp>
         <p:nvSpPr>
@@ -7982,6 +8000,13 @@
           </a:solidFill>
           <a:ln/>
         </p:spPr>
+        <p:txBody>
+          <a:bodyPr/>
+          <a:lstStyle/>
+          <a:p>
+            <a:endParaRPr lang="en-US"/>
+          </a:p>
+        </p:txBody>
       </p:sp>
       <p:sp>
         <p:nvSpPr>
@@ -8064,6 +8089,13 @@
           </a:solidFill>
           <a:ln/>
         </p:spPr>
+        <p:txBody>
+          <a:bodyPr/>
+          <a:lstStyle/>
+          <a:p>
+            <a:endParaRPr lang="en-US"/>
+          </a:p>
+        </p:txBody>
       </p:sp>
       <p:sp>
         <p:nvSpPr>
@@ -8146,6 +8178,13 @@
           </a:solidFill>
           <a:ln/>
         </p:spPr>
+        <p:txBody>
+          <a:bodyPr/>
+          <a:lstStyle/>
+          <a:p>
+            <a:endParaRPr lang="en-US"/>
+          </a:p>
+        </p:txBody>
       </p:sp>
       <p:sp>
         <p:nvSpPr>
@@ -8228,6 +8267,13 @@
           </a:solidFill>
           <a:ln/>
         </p:spPr>
+        <p:txBody>
+          <a:bodyPr/>
+          <a:lstStyle/>
+          <a:p>
+            <a:endParaRPr lang="en-US"/>
+          </a:p>
+        </p:txBody>
       </p:sp>
       <p:sp>
         <p:nvSpPr>
@@ -8310,6 +8356,13 @@
           </a:solidFill>
           <a:ln/>
         </p:spPr>
+        <p:txBody>
+          <a:bodyPr/>
+          <a:lstStyle/>
+          <a:p>
+            <a:endParaRPr lang="en-US"/>
+          </a:p>
+        </p:txBody>
       </p:sp>
       <p:sp>
         <p:nvSpPr>
@@ -8392,6 +8445,13 @@
           </a:solidFill>
           <a:ln/>
         </p:spPr>
+        <p:txBody>
+          <a:bodyPr/>
+          <a:lstStyle/>
+          <a:p>
+            <a:endParaRPr lang="en-US"/>
+          </a:p>
+        </p:txBody>
       </p:sp>
       <p:sp>
         <p:nvSpPr>
@@ -8518,6 +8578,13 @@
             <a:tailEnd type="arrow"/>
           </a:ln>
         </p:spPr>
+        <p:txBody>
+          <a:bodyPr/>
+          <a:lstStyle/>
+          <a:p>
+            <a:endParaRPr lang="en-US"/>
+          </a:p>
+        </p:txBody>
       </p:sp>
       <p:sp>
         <p:nvSpPr>
@@ -8543,6 +8610,13 @@
             <a:tailEnd type="arrow"/>
           </a:ln>
         </p:spPr>
+        <p:txBody>
+          <a:bodyPr/>
+          <a:lstStyle/>
+          <a:p>
+            <a:endParaRPr lang="en-US"/>
+          </a:p>
+        </p:txBody>
       </p:sp>
       <p:sp>
         <p:nvSpPr>
@@ -8563,6 +8637,13 @@
           </a:solidFill>
           <a:ln/>
         </p:spPr>
+        <p:txBody>
+          <a:bodyPr/>
+          <a:lstStyle/>
+          <a:p>
+            <a:endParaRPr lang="en-US"/>
+          </a:p>
+        </p:txBody>
       </p:sp>
       <p:sp>
         <p:nvSpPr>
@@ -8626,6 +8707,13 @@
           </a:solidFill>
           <a:ln/>
         </p:spPr>
+        <p:txBody>
+          <a:bodyPr/>
+          <a:lstStyle/>
+          <a:p>
+            <a:endParaRPr lang="en-US"/>
+          </a:p>
+        </p:txBody>
       </p:sp>
       <p:sp>
         <p:nvSpPr>
@@ -8806,11 +8894,6 @@
               </a:rPr>
               <a:t>Static NAT:</a:t>
             </a:r>
-            <a:pPr>
-              <a:lnSpc>
-                <a:spcPct val="160000"/>
-              </a:lnSpc>
-            </a:pPr>
             <a:r>
               <a:rPr lang="en-US" sz="1600" dirty="0">
                 <a:solidFill>
@@ -8822,11 +8905,6 @@
               </a:rPr>
               <a:t> One private IP maps to one public IP (1:1) | </a:t>
             </a:r>
-            <a:pPr>
-              <a:lnSpc>
-                <a:spcPct val="160000"/>
-              </a:lnSpc>
-            </a:pPr>
             <a:r>
               <a:rPr lang="en-US" sz="1600" b="1" dirty="0">
                 <a:solidFill>
@@ -8838,11 +8916,6 @@
               </a:rPr>
               <a:t>Dynamic NAT:</a:t>
             </a:r>
-            <a:pPr>
-              <a:lnSpc>
-                <a:spcPct val="160000"/>
-              </a:lnSpc>
-            </a:pPr>
             <a:r>
               <a:rPr lang="en-US" sz="1600" dirty="0">
                 <a:solidFill>
@@ -8854,11 +8927,6 @@
               </a:rPr>
               <a:t> Maps to a pool of public IPs | </a:t>
             </a:r>
-            <a:pPr>
-              <a:lnSpc>
-                <a:spcPct val="160000"/>
-              </a:lnSpc>
-            </a:pPr>
             <a:r>
               <a:rPr lang="en-US" sz="1600" b="1" dirty="0">
                 <a:solidFill>
@@ -8870,11 +8938,6 @@
               </a:rPr>
               <a:t>PAT (Port NAT):</a:t>
             </a:r>
-            <a:pPr>
-              <a:lnSpc>
-                <a:spcPct val="160000"/>
-              </a:lnSpc>
-            </a:pPr>
             <a:r>
               <a:rPr lang="en-US" sz="1600" dirty="0">
                 <a:solidFill>
@@ -8938,7 +9001,6 @@
   </p:clrMapOvr>
   <p:transition>
     <p:fade/>
-    <p:spd val="med"/>
   </p:transition>
 </p:sld>
 </file>
@@ -8951,6 +9013,7 @@
         <a:solidFill>
           <a:srgbClr val="F4F1DE"/>
         </a:solidFill>
+        <a:effectLst/>
       </p:bgPr>
     </p:bg>
     <p:spTree>
@@ -9027,6 +9090,13 @@
           </a:solidFill>
           <a:ln/>
         </p:spPr>
+        <p:txBody>
+          <a:bodyPr/>
+          <a:lstStyle/>
+          <a:p>
+            <a:endParaRPr lang="en-US"/>
+          </a:p>
+        </p:txBody>
       </p:sp>
       <p:sp>
         <p:nvSpPr>
@@ -9047,6 +9117,13 @@
           </a:solidFill>
           <a:ln/>
         </p:spPr>
+        <p:txBody>
+          <a:bodyPr/>
+          <a:lstStyle/>
+          <a:p>
+            <a:endParaRPr lang="en-US"/>
+          </a:p>
+        </p:txBody>
       </p:sp>
       <p:sp>
         <p:nvSpPr>
@@ -9195,6 +9272,13 @@
             <a:tailEnd type="arrow"/>
           </a:ln>
         </p:spPr>
+        <p:txBody>
+          <a:bodyPr/>
+          <a:lstStyle/>
+          <a:p>
+            <a:endParaRPr lang="en-US"/>
+          </a:p>
+        </p:txBody>
       </p:sp>
       <p:sp>
         <p:nvSpPr>
@@ -9215,6 +9299,13 @@
           </a:solidFill>
           <a:ln/>
         </p:spPr>
+        <p:txBody>
+          <a:bodyPr/>
+          <a:lstStyle/>
+          <a:p>
+            <a:endParaRPr lang="en-US"/>
+          </a:p>
+        </p:txBody>
       </p:sp>
       <p:sp>
         <p:nvSpPr>
@@ -9363,6 +9454,13 @@
             <a:tailEnd type="arrow"/>
           </a:ln>
         </p:spPr>
+        <p:txBody>
+          <a:bodyPr/>
+          <a:lstStyle/>
+          <a:p>
+            <a:endParaRPr lang="en-US"/>
+          </a:p>
+        </p:txBody>
       </p:sp>
       <p:sp>
         <p:nvSpPr>
@@ -9383,6 +9481,13 @@
           </a:solidFill>
           <a:ln/>
         </p:spPr>
+        <p:txBody>
+          <a:bodyPr/>
+          <a:lstStyle/>
+          <a:p>
+            <a:endParaRPr lang="en-US"/>
+          </a:p>
+        </p:txBody>
       </p:sp>
       <p:sp>
         <p:nvSpPr>
@@ -9531,6 +9636,13 @@
             <a:tailEnd type="arrow"/>
           </a:ln>
         </p:spPr>
+        <p:txBody>
+          <a:bodyPr/>
+          <a:lstStyle/>
+          <a:p>
+            <a:endParaRPr lang="en-US"/>
+          </a:p>
+        </p:txBody>
       </p:sp>
       <p:sp>
         <p:nvSpPr>
@@ -9551,6 +9663,13 @@
           </a:solidFill>
           <a:ln/>
         </p:spPr>
+        <p:txBody>
+          <a:bodyPr/>
+          <a:lstStyle/>
+          <a:p>
+            <a:endParaRPr lang="en-US"/>
+          </a:p>
+        </p:txBody>
       </p:sp>
       <p:sp>
         <p:nvSpPr>
@@ -9699,6 +9818,13 @@
             <a:tailEnd type="arrow"/>
           </a:ln>
         </p:spPr>
+        <p:txBody>
+          <a:bodyPr/>
+          <a:lstStyle/>
+          <a:p>
+            <a:endParaRPr lang="en-US"/>
+          </a:p>
+        </p:txBody>
       </p:sp>
       <p:sp>
         <p:nvSpPr>
@@ -9719,6 +9845,13 @@
           </a:solidFill>
           <a:ln/>
         </p:spPr>
+        <p:txBody>
+          <a:bodyPr/>
+          <a:lstStyle/>
+          <a:p>
+            <a:endParaRPr lang="en-US"/>
+          </a:p>
+        </p:txBody>
       </p:sp>
       <p:sp>
         <p:nvSpPr>
@@ -9903,6 +10036,13 @@
           </a:solidFill>
           <a:ln/>
         </p:spPr>
+        <p:txBody>
+          <a:bodyPr/>
+          <a:lstStyle/>
+          <a:p>
+            <a:endParaRPr lang="en-US"/>
+          </a:p>
+        </p:txBody>
       </p:sp>
       <p:sp>
         <p:nvSpPr>
@@ -9941,11 +10081,6 @@
               </a:rPr>
               <a:t>IP Check</a:t>
             </a:r>
-            <a:pPr algn="ctr">
-              <a:lnSpc>
-                <a:spcPct val="150000"/>
-              </a:lnSpc>
-            </a:pPr>
             <a:r>
               <a:rPr lang="en-US" sz="1600" dirty="0">
                 <a:solidFill>
@@ -9957,11 +10092,6 @@
               </a:rPr>
               <a:t> → </a:t>
             </a:r>
-            <a:pPr algn="ctr">
-              <a:lnSpc>
-                <a:spcPct val="150000"/>
-              </a:lnSpc>
-            </a:pPr>
             <a:r>
               <a:rPr lang="en-US" sz="1600" b="1" dirty="0">
                 <a:solidFill>
@@ -9973,11 +10103,6 @@
               </a:rPr>
               <a:t>ARP Resolution</a:t>
             </a:r>
-            <a:pPr algn="ctr">
-              <a:lnSpc>
-                <a:spcPct val="150000"/>
-              </a:lnSpc>
-            </a:pPr>
             <a:r>
               <a:rPr lang="en-US" sz="1600" dirty="0">
                 <a:solidFill>
@@ -9989,11 +10114,6 @@
               </a:rPr>
               <a:t> → </a:t>
             </a:r>
-            <a:pPr algn="ctr">
-              <a:lnSpc>
-                <a:spcPct val="150000"/>
-              </a:lnSpc>
-            </a:pPr>
             <a:r>
               <a:rPr lang="en-US" sz="1600" b="1" dirty="0">
                 <a:solidFill>
@@ -10005,11 +10125,6 @@
               </a:rPr>
               <a:t>Frame Creation</a:t>
             </a:r>
-            <a:pPr algn="ctr">
-              <a:lnSpc>
-                <a:spcPct val="150000"/>
-              </a:lnSpc>
-            </a:pPr>
             <a:r>
               <a:rPr lang="en-US" sz="1600" dirty="0">
                 <a:solidFill>
@@ -10021,11 +10136,6 @@
               </a:rPr>
               <a:t> → </a:t>
             </a:r>
-            <a:pPr algn="ctr">
-              <a:lnSpc>
-                <a:spcPct val="150000"/>
-              </a:lnSpc>
-            </a:pPr>
             <a:r>
               <a:rPr lang="en-US" sz="1600" b="1" dirty="0">
                 <a:solidFill>
@@ -10037,11 +10147,6 @@
               </a:rPr>
               <a:t>Switch Forwarding</a:t>
             </a:r>
-            <a:pPr algn="ctr">
-              <a:lnSpc>
-                <a:spcPct val="150000"/>
-              </a:lnSpc>
-            </a:pPr>
             <a:r>
               <a:rPr lang="en-US" sz="1600" dirty="0">
                 <a:solidFill>
@@ -10053,11 +10158,6 @@
               </a:rPr>
               <a:t> → </a:t>
             </a:r>
-            <a:pPr algn="ctr">
-              <a:lnSpc>
-                <a:spcPct val="150000"/>
-              </a:lnSpc>
-            </a:pPr>
             <a:r>
               <a:rPr lang="en-US" sz="1600" b="1" dirty="0">
                 <a:solidFill>
@@ -10092,6 +10192,13 @@
           </a:solidFill>
           <a:ln/>
         </p:spPr>
+        <p:txBody>
+          <a:bodyPr/>
+          <a:lstStyle/>
+          <a:p>
+            <a:endParaRPr lang="en-US"/>
+          </a:p>
+        </p:txBody>
       </p:sp>
       <p:sp>
         <p:nvSpPr>
@@ -10130,11 +10237,6 @@
               </a:rPr>
               <a:t>Note:</a:t>
             </a:r>
-            <a:pPr>
-              <a:lnSpc>
-                <a:spcPct val="150000"/>
-              </a:lnSpc>
-            </a:pPr>
             <a:r>
               <a:rPr lang="en-US" sz="1600" dirty="0">
                 <a:solidFill>
@@ -10146,11 +10248,6 @@
               </a:rPr>
               <a:t> If the destination IP is </a:t>
             </a:r>
-            <a:pPr>
-              <a:lnSpc>
-                <a:spcPct val="150000"/>
-              </a:lnSpc>
-            </a:pPr>
             <a:r>
               <a:rPr lang="en-US" sz="1600" i="1" dirty="0">
                 <a:solidFill>
@@ -10162,11 +10259,6 @@
               </a:rPr>
               <a:t>outside</a:t>
             </a:r>
-            <a:pPr>
-              <a:lnSpc>
-                <a:spcPct val="150000"/>
-              </a:lnSpc>
-            </a:pPr>
             <a:r>
               <a:rPr lang="en-US" sz="1600" dirty="0">
                 <a:solidFill>
@@ -10230,7 +10322,6 @@
   </p:clrMapOvr>
   <p:transition>
     <p:fade/>
-    <p:spd val="med"/>
   </p:transition>
 </p:sld>
 </file>
@@ -10243,6 +10334,7 @@
         <a:solidFill>
           <a:srgbClr val="F4F1DE"/>
         </a:solidFill>
+        <a:effectLst/>
       </p:bgPr>
     </p:bg>
     <p:spTree>
@@ -10319,6 +10411,13 @@
           </a:solidFill>
           <a:ln/>
         </p:spPr>
+        <p:txBody>
+          <a:bodyPr/>
+          <a:lstStyle/>
+          <a:p>
+            <a:endParaRPr lang="en-US"/>
+          </a:p>
+        </p:txBody>
       </p:sp>
       <p:sp>
         <p:nvSpPr>
@@ -10339,6 +10438,13 @@
           </a:solidFill>
           <a:ln/>
         </p:spPr>
+        <p:txBody>
+          <a:bodyPr/>
+          <a:lstStyle/>
+          <a:p>
+            <a:endParaRPr lang="en-US"/>
+          </a:p>
+        </p:txBody>
       </p:sp>
       <p:sp>
         <p:nvSpPr>
@@ -10487,6 +10593,13 @@
             <a:tailEnd type="arrow"/>
           </a:ln>
         </p:spPr>
+        <p:txBody>
+          <a:bodyPr/>
+          <a:lstStyle/>
+          <a:p>
+            <a:endParaRPr lang="en-US"/>
+          </a:p>
+        </p:txBody>
       </p:sp>
       <p:sp>
         <p:nvSpPr>
@@ -10507,6 +10620,13 @@
           </a:solidFill>
           <a:ln/>
         </p:spPr>
+        <p:txBody>
+          <a:bodyPr/>
+          <a:lstStyle/>
+          <a:p>
+            <a:endParaRPr lang="en-US"/>
+          </a:p>
+        </p:txBody>
       </p:sp>
       <p:sp>
         <p:nvSpPr>
@@ -10655,6 +10775,13 @@
             <a:tailEnd type="arrow"/>
           </a:ln>
         </p:spPr>
+        <p:txBody>
+          <a:bodyPr/>
+          <a:lstStyle/>
+          <a:p>
+            <a:endParaRPr lang="en-US"/>
+          </a:p>
+        </p:txBody>
       </p:sp>
       <p:sp>
         <p:nvSpPr>
@@ -10675,6 +10802,13 @@
           </a:solidFill>
           <a:ln/>
         </p:spPr>
+        <p:txBody>
+          <a:bodyPr/>
+          <a:lstStyle/>
+          <a:p>
+            <a:endParaRPr lang="en-US"/>
+          </a:p>
+        </p:txBody>
       </p:sp>
       <p:sp>
         <p:nvSpPr>
@@ -10823,6 +10957,13 @@
             <a:tailEnd type="arrow"/>
           </a:ln>
         </p:spPr>
+        <p:txBody>
+          <a:bodyPr/>
+          <a:lstStyle/>
+          <a:p>
+            <a:endParaRPr lang="en-US"/>
+          </a:p>
+        </p:txBody>
       </p:sp>
       <p:sp>
         <p:nvSpPr>
@@ -10843,6 +10984,13 @@
           </a:solidFill>
           <a:ln/>
         </p:spPr>
+        <p:txBody>
+          <a:bodyPr/>
+          <a:lstStyle/>
+          <a:p>
+            <a:endParaRPr lang="en-US"/>
+          </a:p>
+        </p:txBody>
       </p:sp>
       <p:sp>
         <p:nvSpPr>
@@ -10991,6 +11139,13 @@
             <a:tailEnd type="arrow"/>
           </a:ln>
         </p:spPr>
+        <p:txBody>
+          <a:bodyPr/>
+          <a:lstStyle/>
+          <a:p>
+            <a:endParaRPr lang="en-US"/>
+          </a:p>
+        </p:txBody>
       </p:sp>
       <p:sp>
         <p:nvSpPr>
@@ -11011,6 +11166,13 @@
           </a:solidFill>
           <a:ln/>
         </p:spPr>
+        <p:txBody>
+          <a:bodyPr/>
+          <a:lstStyle/>
+          <a:p>
+            <a:endParaRPr lang="en-US"/>
+          </a:p>
+        </p:txBody>
       </p:sp>
       <p:sp>
         <p:nvSpPr>
@@ -11183,7 +11345,6 @@
   </p:clrMapOvr>
   <p:transition>
     <p:fade/>
-    <p:spd val="med"/>
   </p:transition>
 </p:sld>
 </file>
@@ -11196,6 +11357,7 @@
         <a:solidFill>
           <a:srgbClr val="F4F1DE"/>
         </a:solidFill>
+        <a:effectLst/>
       </p:bgPr>
     </p:bg>
     <p:spTree>
@@ -11272,6 +11434,13 @@
           </a:solidFill>
           <a:ln/>
         </p:spPr>
+        <p:txBody>
+          <a:bodyPr/>
+          <a:lstStyle/>
+          <a:p>
+            <a:endParaRPr lang="en-US"/>
+          </a:p>
+        </p:txBody>
       </p:sp>
       <p:sp>
         <p:nvSpPr>
@@ -11292,6 +11461,13 @@
           </a:solidFill>
           <a:ln/>
         </p:spPr>
+        <p:txBody>
+          <a:bodyPr/>
+          <a:lstStyle/>
+          <a:p>
+            <a:endParaRPr lang="en-US"/>
+          </a:p>
+        </p:txBody>
       </p:sp>
       <p:sp>
         <p:nvSpPr>
@@ -11394,6 +11570,13 @@
           </a:solidFill>
           <a:ln/>
         </p:spPr>
+        <p:txBody>
+          <a:bodyPr/>
+          <a:lstStyle/>
+          <a:p>
+            <a:endParaRPr lang="en-US"/>
+          </a:p>
+        </p:txBody>
       </p:sp>
       <p:sp>
         <p:nvSpPr>
@@ -11494,6 +11677,13 @@
           </a:solidFill>
           <a:ln/>
         </p:spPr>
+        <p:txBody>
+          <a:bodyPr/>
+          <a:lstStyle/>
+          <a:p>
+            <a:endParaRPr lang="en-US"/>
+          </a:p>
+        </p:txBody>
       </p:sp>
       <p:sp>
         <p:nvSpPr>
@@ -11554,6 +11744,77 @@
               </a:rPr>
               <a:t>• Data sent in </a:t>
             </a:r>
+            <a:r>
+              <a:rPr lang="en-US" sz="1800" b="1" dirty="0">
+                <a:solidFill>
+                  <a:srgbClr val="2D3142"/>
+                </a:solidFill>
+                <a:latin typeface="QuattrocentoSans" pitchFamily="34" charset="0"/>
+                <a:ea typeface="QuattrocentoSans" pitchFamily="34" charset="-122"/>
+                <a:cs typeface="QuattrocentoSans" pitchFamily="34" charset="-120"/>
+              </a:rPr>
+              <a:t>plain text</a:t>
+            </a:r>
+            <a:endParaRPr lang="en-US" sz="1800" dirty="0"/>
+          </a:p>
+          <a:p>
+            <a:pPr>
+              <a:lnSpc>
+                <a:spcPct val="170000"/>
+              </a:lnSpc>
+            </a:pPr>
+            <a:r>
+              <a:rPr lang="en-US" sz="1800" dirty="0">
+                <a:solidFill>
+                  <a:srgbClr val="2D3142"/>
+                </a:solidFill>
+                <a:latin typeface="QuattrocentoSans" pitchFamily="34" charset="0"/>
+                <a:ea typeface="QuattrocentoSans" pitchFamily="34" charset="-122"/>
+                <a:cs typeface="QuattrocentoSans" pitchFamily="34" charset="-120"/>
+              </a:rPr>
+              <a:t>• Vulnerable to interception</a:t>
+            </a:r>
+            <a:endParaRPr lang="en-US" sz="1800" dirty="0"/>
+          </a:p>
+          <a:p>
+            <a:pPr>
+              <a:lnSpc>
+                <a:spcPct val="170000"/>
+              </a:lnSpc>
+            </a:pPr>
+            <a:r>
+              <a:rPr lang="en-US" sz="1800" dirty="0">
+                <a:solidFill>
+                  <a:srgbClr val="2D3142"/>
+                </a:solidFill>
+                <a:latin typeface="QuattrocentoSans" pitchFamily="34" charset="0"/>
+                <a:ea typeface="QuattrocentoSans" pitchFamily="34" charset="-122"/>
+                <a:cs typeface="QuattrocentoSans" pitchFamily="34" charset="-120"/>
+              </a:rPr>
+              <a:t>• No identity verification</a:t>
+            </a:r>
+            <a:endParaRPr lang="en-US" sz="1800" dirty="0"/>
+          </a:p>
+          <a:p>
+            <a:pPr>
+              <a:lnSpc>
+                <a:spcPct val="170000"/>
+              </a:lnSpc>
+            </a:pPr>
+            <a:r>
+              <a:rPr lang="en-US" sz="1800" dirty="0">
+                <a:solidFill>
+                  <a:srgbClr val="2D3142"/>
+                </a:solidFill>
+                <a:latin typeface="QuattrocentoSans" pitchFamily="34" charset="0"/>
+                <a:ea typeface="QuattrocentoSans" pitchFamily="34" charset="-122"/>
+                <a:cs typeface="QuattrocentoSans" pitchFamily="34" charset="-120"/>
+              </a:rPr>
+              <a:t>• No data integrity checks</a:t>
+            </a:r>
+            <a:endParaRPr lang="en-US" sz="1800" dirty="0"/>
+          </a:p>
+          <a:p>
             <a:pPr>
               <a:lnSpc>
                 <a:spcPct val="170000"/>
@@ -11563,93 +11824,14 @@
               </a:spcBef>
             </a:pPr>
             <a:r>
-              <a:rPr lang="en-US" sz="1800" b="1" dirty="0">
-                <a:solidFill>
-                  <a:srgbClr val="2D3142"/>
+              <a:rPr lang="en-US" sz="1800" i="1" dirty="0">
+                <a:solidFill>
+                  <a:srgbClr val="8D99AE"/>
                 </a:solidFill>
                 <a:latin typeface="QuattrocentoSans" pitchFamily="34" charset="0"/>
                 <a:ea typeface="QuattrocentoSans" pitchFamily="34" charset="-122"/>
                 <a:cs typeface="QuattrocentoSans" pitchFamily="34" charset="-120"/>
               </a:rPr>
-              <a:t>plain text</a:t>
-            </a:r>
-            <a:endParaRPr lang="en-US" sz="1800" dirty="0"/>
-          </a:p>
-          <a:p>
-            <a:pPr>
-              <a:lnSpc>
-                <a:spcPct val="170000"/>
-              </a:lnSpc>
-            </a:pPr>
-            <a:r>
-              <a:rPr lang="en-US" sz="1800" dirty="0">
-                <a:solidFill>
-                  <a:srgbClr val="2D3142"/>
-                </a:solidFill>
-                <a:latin typeface="QuattrocentoSans" pitchFamily="34" charset="0"/>
-                <a:ea typeface="QuattrocentoSans" pitchFamily="34" charset="-122"/>
-                <a:cs typeface="QuattrocentoSans" pitchFamily="34" charset="-120"/>
-              </a:rPr>
-              <a:t>• Vulnerable to interception</a:t>
-            </a:r>
-            <a:endParaRPr lang="en-US" sz="1800" dirty="0"/>
-          </a:p>
-          <a:p>
-            <a:pPr>
-              <a:lnSpc>
-                <a:spcPct val="170000"/>
-              </a:lnSpc>
-            </a:pPr>
-            <a:r>
-              <a:rPr lang="en-US" sz="1800" dirty="0">
-                <a:solidFill>
-                  <a:srgbClr val="2D3142"/>
-                </a:solidFill>
-                <a:latin typeface="QuattrocentoSans" pitchFamily="34" charset="0"/>
-                <a:ea typeface="QuattrocentoSans" pitchFamily="34" charset="-122"/>
-                <a:cs typeface="QuattrocentoSans" pitchFamily="34" charset="-120"/>
-              </a:rPr>
-              <a:t>• No identity verification</a:t>
-            </a:r>
-            <a:endParaRPr lang="en-US" sz="1800" dirty="0"/>
-          </a:p>
-          <a:p>
-            <a:pPr>
-              <a:lnSpc>
-                <a:spcPct val="170000"/>
-              </a:lnSpc>
-            </a:pPr>
-            <a:r>
-              <a:rPr lang="en-US" sz="1800" dirty="0">
-                <a:solidFill>
-                  <a:srgbClr val="2D3142"/>
-                </a:solidFill>
-                <a:latin typeface="QuattrocentoSans" pitchFamily="34" charset="0"/>
-                <a:ea typeface="QuattrocentoSans" pitchFamily="34" charset="-122"/>
-                <a:cs typeface="QuattrocentoSans" pitchFamily="34" charset="-120"/>
-              </a:rPr>
-              <a:t>• No data integrity checks</a:t>
-            </a:r>
-            <a:endParaRPr lang="en-US" sz="1800" dirty="0"/>
-          </a:p>
-          <a:p>
-            <a:pPr>
-              <a:lnSpc>
-                <a:spcPct val="170000"/>
-              </a:lnSpc>
-              <a:spcBef>
-                <a:spcPts val="1000"/>
-              </a:spcBef>
-            </a:pPr>
-            <a:r>
-              <a:rPr lang="en-US" sz="1800" i="1" dirty="0">
-                <a:solidFill>
-                  <a:srgbClr val="8D99AE"/>
-                </a:solidFill>
-                <a:latin typeface="QuattrocentoSans" pitchFamily="34" charset="0"/>
-                <a:ea typeface="QuattrocentoSans" pitchFamily="34" charset="-122"/>
-                <a:cs typeface="QuattrocentoSans" pitchFamily="34" charset="-120"/>
-              </a:rPr>
               <a:t>Unsecured — do not use for sensitive data</a:t>
             </a:r>
             <a:endParaRPr lang="en-US" sz="1800" dirty="0"/>
@@ -11675,6 +11857,13 @@
           </a:solidFill>
           <a:ln/>
         </p:spPr>
+        <p:txBody>
+          <a:bodyPr/>
+          <a:lstStyle/>
+          <a:p>
+            <a:endParaRPr lang="en-US"/>
+          </a:p>
+        </p:txBody>
       </p:sp>
       <p:sp>
         <p:nvSpPr>
@@ -11777,6 +11966,13 @@
           </a:solidFill>
           <a:ln/>
         </p:spPr>
+        <p:txBody>
+          <a:bodyPr/>
+          <a:lstStyle/>
+          <a:p>
+            <a:endParaRPr lang="en-US"/>
+          </a:p>
+        </p:txBody>
       </p:sp>
       <p:sp>
         <p:nvSpPr>
@@ -11877,6 +12073,13 @@
           </a:solidFill>
           <a:ln/>
         </p:spPr>
+        <p:txBody>
+          <a:bodyPr/>
+          <a:lstStyle/>
+          <a:p>
+            <a:endParaRPr lang="en-US"/>
+          </a:p>
+        </p:txBody>
       </p:sp>
       <p:sp>
         <p:nvSpPr>
@@ -11937,6 +12140,77 @@
               </a:rPr>
               <a:t>• Data is </a:t>
             </a:r>
+            <a:r>
+              <a:rPr lang="en-US" sz="1800" b="1" dirty="0">
+                <a:solidFill>
+                  <a:srgbClr val="2D3142"/>
+                </a:solidFill>
+                <a:latin typeface="QuattrocentoSans" pitchFamily="34" charset="0"/>
+                <a:ea typeface="QuattrocentoSans" pitchFamily="34" charset="-122"/>
+                <a:cs typeface="QuattrocentoSans" pitchFamily="34" charset="-120"/>
+              </a:rPr>
+              <a:t>encrypted end-to-end</a:t>
+            </a:r>
+            <a:endParaRPr lang="en-US" sz="1800" dirty="0"/>
+          </a:p>
+          <a:p>
+            <a:pPr>
+              <a:lnSpc>
+                <a:spcPct val="170000"/>
+              </a:lnSpc>
+            </a:pPr>
+            <a:r>
+              <a:rPr lang="en-US" sz="1800" dirty="0">
+                <a:solidFill>
+                  <a:srgbClr val="2D3142"/>
+                </a:solidFill>
+                <a:latin typeface="QuattrocentoSans" pitchFamily="34" charset="0"/>
+                <a:ea typeface="QuattrocentoSans" pitchFamily="34" charset="-122"/>
+                <a:cs typeface="QuattrocentoSans" pitchFamily="34" charset="-120"/>
+              </a:rPr>
+              <a:t>• Server identity verified</a:t>
+            </a:r>
+            <a:endParaRPr lang="en-US" sz="1800" dirty="0"/>
+          </a:p>
+          <a:p>
+            <a:pPr>
+              <a:lnSpc>
+                <a:spcPct val="170000"/>
+              </a:lnSpc>
+            </a:pPr>
+            <a:r>
+              <a:rPr lang="en-US" sz="1800" dirty="0">
+                <a:solidFill>
+                  <a:srgbClr val="2D3142"/>
+                </a:solidFill>
+                <a:latin typeface="QuattrocentoSans" pitchFamily="34" charset="0"/>
+                <a:ea typeface="QuattrocentoSans" pitchFamily="34" charset="-122"/>
+                <a:cs typeface="QuattrocentoSans" pitchFamily="34" charset="-120"/>
+              </a:rPr>
+              <a:t>• Data integrity protected</a:t>
+            </a:r>
+            <a:endParaRPr lang="en-US" sz="1800" dirty="0"/>
+          </a:p>
+          <a:p>
+            <a:pPr>
+              <a:lnSpc>
+                <a:spcPct val="170000"/>
+              </a:lnSpc>
+            </a:pPr>
+            <a:r>
+              <a:rPr lang="en-US" sz="1800" dirty="0">
+                <a:solidFill>
+                  <a:srgbClr val="2D3142"/>
+                </a:solidFill>
+                <a:latin typeface="QuattrocentoSans" pitchFamily="34" charset="0"/>
+                <a:ea typeface="QuattrocentoSans" pitchFamily="34" charset="-122"/>
+                <a:cs typeface="QuattrocentoSans" pitchFamily="34" charset="-120"/>
+              </a:rPr>
+              <a:t>• Prevents MITM attacks</a:t>
+            </a:r>
+            <a:endParaRPr lang="en-US" sz="1800" dirty="0"/>
+          </a:p>
+          <a:p>
             <a:pPr>
               <a:lnSpc>
                 <a:spcPct val="170000"/>
@@ -11946,93 +12220,14 @@
               </a:spcBef>
             </a:pPr>
             <a:r>
-              <a:rPr lang="en-US" sz="1800" b="1" dirty="0">
-                <a:solidFill>
-                  <a:srgbClr val="2D3142"/>
+              <a:rPr lang="en-US" sz="1800" i="1" dirty="0">
+                <a:solidFill>
+                  <a:srgbClr val="E07A5F"/>
                 </a:solidFill>
                 <a:latin typeface="QuattrocentoSans" pitchFamily="34" charset="0"/>
                 <a:ea typeface="QuattrocentoSans" pitchFamily="34" charset="-122"/>
                 <a:cs typeface="QuattrocentoSans" pitchFamily="34" charset="-120"/>
               </a:rPr>
-              <a:t>encrypted end-to-end</a:t>
-            </a:r>
-            <a:endParaRPr lang="en-US" sz="1800" dirty="0"/>
-          </a:p>
-          <a:p>
-            <a:pPr>
-              <a:lnSpc>
-                <a:spcPct val="170000"/>
-              </a:lnSpc>
-            </a:pPr>
-            <a:r>
-              <a:rPr lang="en-US" sz="1800" dirty="0">
-                <a:solidFill>
-                  <a:srgbClr val="2D3142"/>
-                </a:solidFill>
-                <a:latin typeface="QuattrocentoSans" pitchFamily="34" charset="0"/>
-                <a:ea typeface="QuattrocentoSans" pitchFamily="34" charset="-122"/>
-                <a:cs typeface="QuattrocentoSans" pitchFamily="34" charset="-120"/>
-              </a:rPr>
-              <a:t>• Server identity verified</a:t>
-            </a:r>
-            <a:endParaRPr lang="en-US" sz="1800" dirty="0"/>
-          </a:p>
-          <a:p>
-            <a:pPr>
-              <a:lnSpc>
-                <a:spcPct val="170000"/>
-              </a:lnSpc>
-            </a:pPr>
-            <a:r>
-              <a:rPr lang="en-US" sz="1800" dirty="0">
-                <a:solidFill>
-                  <a:srgbClr val="2D3142"/>
-                </a:solidFill>
-                <a:latin typeface="QuattrocentoSans" pitchFamily="34" charset="0"/>
-                <a:ea typeface="QuattrocentoSans" pitchFamily="34" charset="-122"/>
-                <a:cs typeface="QuattrocentoSans" pitchFamily="34" charset="-120"/>
-              </a:rPr>
-              <a:t>• Data integrity protected</a:t>
-            </a:r>
-            <a:endParaRPr lang="en-US" sz="1800" dirty="0"/>
-          </a:p>
-          <a:p>
-            <a:pPr>
-              <a:lnSpc>
-                <a:spcPct val="170000"/>
-              </a:lnSpc>
-            </a:pPr>
-            <a:r>
-              <a:rPr lang="en-US" sz="1800" dirty="0">
-                <a:solidFill>
-                  <a:srgbClr val="2D3142"/>
-                </a:solidFill>
-                <a:latin typeface="QuattrocentoSans" pitchFamily="34" charset="0"/>
-                <a:ea typeface="QuattrocentoSans" pitchFamily="34" charset="-122"/>
-                <a:cs typeface="QuattrocentoSans" pitchFamily="34" charset="-120"/>
-              </a:rPr>
-              <a:t>• Prevents MITM attacks</a:t>
-            </a:r>
-            <a:endParaRPr lang="en-US" sz="1800" dirty="0"/>
-          </a:p>
-          <a:p>
-            <a:pPr>
-              <a:lnSpc>
-                <a:spcPct val="170000"/>
-              </a:lnSpc>
-              <a:spcBef>
-                <a:spcPts val="1000"/>
-              </a:spcBef>
-            </a:pPr>
-            <a:r>
-              <a:rPr lang="en-US" sz="1800" i="1" dirty="0">
-                <a:solidFill>
-                  <a:srgbClr val="E07A5F"/>
-                </a:solidFill>
-                <a:latin typeface="QuattrocentoSans" pitchFamily="34" charset="0"/>
-                <a:ea typeface="QuattrocentoSans" pitchFamily="34" charset="-122"/>
-                <a:cs typeface="QuattrocentoSans" pitchFamily="34" charset="-120"/>
-              </a:rPr>
               <a:t>Standard for all modern websites</a:t>
             </a:r>
             <a:endParaRPr lang="en-US" sz="1800" dirty="0"/>
@@ -12058,6 +12253,13 @@
           </a:solidFill>
           <a:ln/>
         </p:spPr>
+        <p:txBody>
+          <a:bodyPr/>
+          <a:lstStyle/>
+          <a:p>
+            <a:endParaRPr lang="en-US"/>
+          </a:p>
+        </p:txBody>
       </p:sp>
       <p:sp>
         <p:nvSpPr>
@@ -12096,11 +12298,6 @@
               </a:rPr>
               <a:t>TLS provides three protections:</a:t>
             </a:r>
-            <a:pPr algn="ctr">
-              <a:lnSpc>
-                <a:spcPct val="100000"/>
-              </a:lnSpc>
-            </a:pPr>
             <a:r>
               <a:rPr lang="en-US" sz="1600" dirty="0">
                 <a:solidFill>
@@ -12164,7 +12361,6 @@
   </p:clrMapOvr>
   <p:transition>
     <p:fade/>
-    <p:spd val="med"/>
   </p:transition>
 </p:sld>
 </file>
@@ -12177,6 +12373,7 @@
         <a:solidFill>
           <a:srgbClr val="F4F1DE"/>
         </a:solidFill>
+        <a:effectLst/>
       </p:bgPr>
     </p:bg>
     <p:spTree>
@@ -12253,6 +12450,13 @@
           </a:solidFill>
           <a:ln/>
         </p:spPr>
+        <p:txBody>
+          <a:bodyPr/>
+          <a:lstStyle/>
+          <a:p>
+            <a:endParaRPr lang="en-US"/>
+          </a:p>
+        </p:txBody>
       </p:sp>
       <p:sp>
         <p:nvSpPr>
@@ -12273,6 +12477,13 @@
           </a:solidFill>
           <a:ln/>
         </p:spPr>
+        <p:txBody>
+          <a:bodyPr/>
+          <a:lstStyle/>
+          <a:p>
+            <a:endParaRPr lang="en-US"/>
+          </a:p>
+        </p:txBody>
       </p:sp>
       <p:sp>
         <p:nvSpPr>
@@ -12411,6 +12622,13 @@
           </a:solidFill>
           <a:ln/>
         </p:spPr>
+        <p:txBody>
+          <a:bodyPr/>
+          <a:lstStyle/>
+          <a:p>
+            <a:endParaRPr lang="en-US"/>
+          </a:p>
+        </p:txBody>
       </p:sp>
       <p:sp>
         <p:nvSpPr>
@@ -12472,6 +12690,13 @@
           </a:solidFill>
           <a:ln/>
         </p:spPr>
+        <p:txBody>
+          <a:bodyPr/>
+          <a:lstStyle/>
+          <a:p>
+            <a:endParaRPr lang="en-US"/>
+          </a:p>
+        </p:txBody>
       </p:sp>
       <p:sp>
         <p:nvSpPr>
@@ -12617,6 +12842,13 @@
             <a:tailEnd type="arrow"/>
           </a:ln>
         </p:spPr>
+        <p:txBody>
+          <a:bodyPr/>
+          <a:lstStyle/>
+          <a:p>
+            <a:endParaRPr lang="en-US"/>
+          </a:p>
+        </p:txBody>
       </p:sp>
       <p:sp>
         <p:nvSpPr>
@@ -12678,6 +12910,13 @@
           </a:solidFill>
           <a:ln/>
         </p:spPr>
+        <p:txBody>
+          <a:bodyPr/>
+          <a:lstStyle/>
+          <a:p>
+            <a:endParaRPr lang="en-US"/>
+          </a:p>
+        </p:txBody>
       </p:sp>
       <p:sp>
         <p:nvSpPr>
@@ -12874,6 +13113,13 @@
           </a:solidFill>
           <a:ln/>
         </p:spPr>
+        <p:txBody>
+          <a:bodyPr/>
+          <a:lstStyle/>
+          <a:p>
+            <a:endParaRPr lang="en-US"/>
+          </a:p>
+        </p:txBody>
       </p:sp>
       <p:sp>
         <p:nvSpPr>
@@ -12935,6 +13181,13 @@
           </a:solidFill>
           <a:ln/>
         </p:spPr>
+        <p:txBody>
+          <a:bodyPr/>
+          <a:lstStyle/>
+          <a:p>
+            <a:endParaRPr lang="en-US"/>
+          </a:p>
+        </p:txBody>
       </p:sp>
       <p:sp>
         <p:nvSpPr>
@@ -13080,6 +13333,13 @@
             <a:tailEnd type="none"/>
           </a:ln>
         </p:spPr>
+        <p:txBody>
+          <a:bodyPr/>
+          <a:lstStyle/>
+          <a:p>
+            <a:endParaRPr lang="en-US"/>
+          </a:p>
+        </p:txBody>
       </p:sp>
       <p:sp>
         <p:nvSpPr>
@@ -13141,6 +13401,13 @@
           </a:solidFill>
           <a:ln/>
         </p:spPr>
+        <p:txBody>
+          <a:bodyPr/>
+          <a:lstStyle/>
+          <a:p>
+            <a:endParaRPr lang="en-US"/>
+          </a:p>
+        </p:txBody>
       </p:sp>
       <p:sp>
         <p:nvSpPr>
@@ -13279,6 +13546,13 @@
           </a:solidFill>
           <a:ln/>
         </p:spPr>
+        <p:txBody>
+          <a:bodyPr/>
+          <a:lstStyle/>
+          <a:p>
+            <a:endParaRPr lang="en-US"/>
+          </a:p>
+        </p:txBody>
       </p:sp>
       <p:sp>
         <p:nvSpPr>
@@ -13340,6 +13614,13 @@
           </a:solidFill>
           <a:ln/>
         </p:spPr>
+        <p:txBody>
+          <a:bodyPr/>
+          <a:lstStyle/>
+          <a:p>
+            <a:endParaRPr lang="en-US"/>
+          </a:p>
+        </p:txBody>
       </p:sp>
       <p:sp>
         <p:nvSpPr>
@@ -13521,6 +13802,13 @@
           </a:solidFill>
           <a:ln/>
         </p:spPr>
+        <p:txBody>
+          <a:bodyPr/>
+          <a:lstStyle/>
+          <a:p>
+            <a:endParaRPr lang="en-US"/>
+          </a:p>
+        </p:txBody>
       </p:sp>
       <p:sp>
         <p:nvSpPr>
@@ -13559,11 +13847,6 @@
               </a:rPr>
               <a:t>Client</a:t>
             </a:r>
-            <a:pPr algn="ctr">
-              <a:lnSpc>
-                <a:spcPct val="150000"/>
-              </a:lnSpc>
-            </a:pPr>
             <a:r>
               <a:rPr lang="en-US" sz="1600" dirty="0">
                 <a:solidFill>
@@ -13575,11 +13858,6 @@
               </a:rPr>
               <a:t> sends HTTP Request → </a:t>
             </a:r>
-            <a:pPr algn="ctr">
-              <a:lnSpc>
-                <a:spcPct val="150000"/>
-              </a:lnSpc>
-            </a:pPr>
             <a:r>
               <a:rPr lang="en-US" sz="1600" b="1" dirty="0">
                 <a:solidFill>
@@ -13591,11 +13869,6 @@
               </a:rPr>
               <a:t>Server</a:t>
             </a:r>
-            <a:pPr algn="ctr">
-              <a:lnSpc>
-                <a:spcPct val="150000"/>
-              </a:lnSpc>
-            </a:pPr>
             <a:r>
               <a:rPr lang="en-US" sz="1600" dirty="0">
                 <a:solidFill>
@@ -13607,11 +13880,6 @@
               </a:rPr>
               <a:t> processes + queries </a:t>
             </a:r>
-            <a:pPr algn="ctr">
-              <a:lnSpc>
-                <a:spcPct val="150000"/>
-              </a:lnSpc>
-            </a:pPr>
             <a:r>
               <a:rPr lang="en-US" sz="1600" b="1" dirty="0">
                 <a:solidFill>
@@ -13623,11 +13891,6 @@
               </a:rPr>
               <a:t>Database</a:t>
             </a:r>
-            <a:pPr algn="ctr">
-              <a:lnSpc>
-                <a:spcPct val="150000"/>
-              </a:lnSpc>
-            </a:pPr>
             <a:r>
               <a:rPr lang="en-US" sz="1600" dirty="0">
                 <a:solidFill>
@@ -13639,11 +13902,6 @@
               </a:rPr>
               <a:t> → Server builds Response → </a:t>
             </a:r>
-            <a:pPr algn="ctr">
-              <a:lnSpc>
-                <a:spcPct val="150000"/>
-              </a:lnSpc>
-            </a:pPr>
             <a:r>
               <a:rPr lang="en-US" sz="1600" b="1" dirty="0">
                 <a:solidFill>
@@ -13655,11 +13913,6 @@
               </a:rPr>
               <a:t>Client</a:t>
             </a:r>
-            <a:pPr algn="ctr">
-              <a:lnSpc>
-                <a:spcPct val="150000"/>
-              </a:lnSpc>
-            </a:pPr>
             <a:r>
               <a:rPr lang="en-US" sz="1600" dirty="0">
                 <a:solidFill>
@@ -13694,6 +13947,13 @@
           </a:solidFill>
           <a:ln/>
         </p:spPr>
+        <p:txBody>
+          <a:bodyPr/>
+          <a:lstStyle/>
+          <a:p>
+            <a:endParaRPr lang="en-US"/>
+          </a:p>
+        </p:txBody>
       </p:sp>
       <p:sp>
         <p:nvSpPr>
@@ -13784,7 +14044,6 @@
   </p:clrMapOvr>
   <p:transition>
     <p:fade/>
-    <p:spd val="med"/>
   </p:transition>
 </p:sld>
 </file>
@@ -13808,15 +14067,15 @@
       </p:grpSpPr>
       <p:pic>
         <p:nvPicPr>
-          <p:cNvPr id="2" name="Image 0" descr="https://kimi-img.moonshot.cn/pub/slides/okc/sm26tdp357svy/mnt/agents/output/networking-for-developers/images/3_Free_Fiber_Optic_Cables_Image_Technology.png">    </p:cNvPr>
+          <p:cNvPr id="2" name="Image 0" descr="https://kimi-img.moonshot.cn/pub/slides/okc/sm26tdp357svy/mnt/agents/output/networking-for-developers/images/3_Free_Fiber_Optic_Cables_Image_Technology.png"/>
           <p:cNvPicPr>
             <a:picLocks noChangeAspect="1"/>
           </p:cNvPicPr>
           <p:nvPr/>
         </p:nvPicPr>
         <p:blipFill>
-          <a:blip r:embed="rId1"/>
-          <a:srcRect l="183" r="183" t="0" b="0"/>
+          <a:blip r:embed="rId3"/>
+          <a:srcRect l="183" r="183"/>
           <a:stretch/>
         </p:blipFill>
         <p:spPr>
@@ -13843,7 +14102,7 @@
           <a:prstGeom prst="rect">
             <a:avLst/>
           </a:prstGeom>
-          <a:gradFill rotWithShape="1" flip="none">
+          <a:gradFill flip="none" rotWithShape="1">
             <a:gsLst>
               <a:gs pos="0">
                 <a:srgbClr val="2D3142">
@@ -13870,6 +14129,13 @@
             <a:prstDash val="solid"/>
           </a:ln>
         </p:spPr>
+        <p:txBody>
+          <a:bodyPr/>
+          <a:lstStyle/>
+          <a:p>
+            <a:endParaRPr lang="en-US"/>
+          </a:p>
+        </p:txBody>
       </p:sp>
       <p:sp>
         <p:nvSpPr>
@@ -13892,6 +14158,13 @@
           </a:solidFill>
           <a:ln/>
         </p:spPr>
+        <p:txBody>
+          <a:bodyPr/>
+          <a:lstStyle/>
+          <a:p>
+            <a:endParaRPr lang="en-US"/>
+          </a:p>
+        </p:txBody>
       </p:sp>
       <p:sp>
         <p:nvSpPr>
@@ -13914,6 +14187,13 @@
           </a:solidFill>
           <a:ln/>
         </p:spPr>
+        <p:txBody>
+          <a:bodyPr/>
+          <a:lstStyle/>
+          <a:p>
+            <a:endParaRPr lang="en-US"/>
+          </a:p>
+        </p:txBody>
       </p:sp>
       <p:sp>
         <p:nvSpPr>
@@ -13942,7 +14222,7 @@
               </a:lnSpc>
             </a:pPr>
             <a:r>
-              <a:rPr lang="en-US" sz="1600" b="1" spc="400" kern="0" dirty="0">
+              <a:rPr lang="en-US" sz="1600" b="1" kern="0" spc="400" dirty="0">
                 <a:solidFill>
                   <a:srgbClr val="E07A5F"/>
                 </a:solidFill>
@@ -13975,6 +14255,13 @@
           </a:solidFill>
           <a:ln/>
         </p:spPr>
+        <p:txBody>
+          <a:bodyPr/>
+          <a:lstStyle/>
+          <a:p>
+            <a:endParaRPr lang="en-US"/>
+          </a:p>
+        </p:txBody>
       </p:sp>
       <p:sp>
         <p:nvSpPr>
@@ -14085,7 +14372,7 @@
               </a:lnSpc>
             </a:pPr>
             <a:r>
-              <a:rPr lang="en-US" sz="1400" spc="100" kern="0" dirty="0">
+              <a:rPr lang="en-US" sz="1400" kern="0" spc="100" dirty="0">
                 <a:solidFill>
                   <a:srgbClr val="8D99AE"/>
                 </a:solidFill>
@@ -14106,7 +14393,6 @@
   </p:clrMapOvr>
   <p:transition>
     <p:fade/>
-    <p:spd val="med"/>
   </p:transition>
 </p:sld>
 </file>
@@ -14119,6 +14405,7 @@
         <a:solidFill>
           <a:srgbClr val="F4F1DE"/>
         </a:solidFill>
+        <a:effectLst/>
       </p:bgPr>
     </p:bg>
     <p:spTree>
@@ -14195,6 +14482,13 @@
           </a:solidFill>
           <a:ln/>
         </p:spPr>
+        <p:txBody>
+          <a:bodyPr/>
+          <a:lstStyle/>
+          <a:p>
+            <a:endParaRPr lang="en-US"/>
+          </a:p>
+        </p:txBody>
       </p:sp>
       <p:sp>
         <p:nvSpPr>
@@ -14215,6 +14509,13 @@
           </a:solidFill>
           <a:ln/>
         </p:spPr>
+        <p:txBody>
+          <a:bodyPr/>
+          <a:lstStyle/>
+          <a:p>
+            <a:endParaRPr lang="en-US"/>
+          </a:p>
+        </p:txBody>
       </p:sp>
       <p:sp>
         <p:nvSpPr>
@@ -14317,6 +14618,13 @@
           </a:solidFill>
           <a:ln/>
         </p:spPr>
+        <p:txBody>
+          <a:bodyPr/>
+          <a:lstStyle/>
+          <a:p>
+            <a:endParaRPr lang="en-US"/>
+          </a:p>
+        </p:txBody>
       </p:sp>
       <p:sp>
         <p:nvSpPr>
@@ -14435,6 +14743,13 @@
           </a:solidFill>
           <a:ln/>
         </p:spPr>
+        <p:txBody>
+          <a:bodyPr/>
+          <a:lstStyle/>
+          <a:p>
+            <a:endParaRPr lang="en-US"/>
+          </a:p>
+        </p:txBody>
       </p:sp>
       <p:sp>
         <p:nvSpPr>
@@ -14537,6 +14852,13 @@
           </a:solidFill>
           <a:ln/>
         </p:spPr>
+        <p:txBody>
+          <a:bodyPr/>
+          <a:lstStyle/>
+          <a:p>
+            <a:endParaRPr lang="en-US"/>
+          </a:p>
+        </p:txBody>
       </p:sp>
       <p:sp>
         <p:nvSpPr>
@@ -14655,6 +14977,13 @@
           </a:solidFill>
           <a:ln/>
         </p:spPr>
+        <p:txBody>
+          <a:bodyPr/>
+          <a:lstStyle/>
+          <a:p>
+            <a:endParaRPr lang="en-US"/>
+          </a:p>
+        </p:txBody>
       </p:sp>
       <p:sp>
         <p:nvSpPr>
@@ -14757,6 +15086,13 @@
           </a:solidFill>
           <a:ln/>
         </p:spPr>
+        <p:txBody>
+          <a:bodyPr/>
+          <a:lstStyle/>
+          <a:p>
+            <a:endParaRPr lang="en-US"/>
+          </a:p>
+        </p:txBody>
       </p:sp>
       <p:sp>
         <p:nvSpPr>
@@ -14837,6 +15173,13 @@
           </a:solidFill>
           <a:ln/>
         </p:spPr>
+        <p:txBody>
+          <a:bodyPr/>
+          <a:lstStyle/>
+          <a:p>
+            <a:endParaRPr lang="en-US"/>
+          </a:p>
+        </p:txBody>
       </p:sp>
       <p:sp>
         <p:nvSpPr>
@@ -14939,6 +15282,13 @@
           </a:solidFill>
           <a:ln/>
         </p:spPr>
+        <p:txBody>
+          <a:bodyPr/>
+          <a:lstStyle/>
+          <a:p>
+            <a:endParaRPr lang="en-US"/>
+          </a:p>
+        </p:txBody>
       </p:sp>
       <p:sp>
         <p:nvSpPr>
@@ -15007,7 +15357,6 @@
   </p:clrMapOvr>
   <p:transition>
     <p:fade/>
-    <p:spd val="med"/>
   </p:transition>
 </p:sld>
 </file>
@@ -15020,6 +15369,7 @@
         <a:solidFill>
           <a:srgbClr val="F4F1DE"/>
         </a:solidFill>
+        <a:effectLst/>
       </p:bgPr>
     </p:bg>
     <p:spTree>
@@ -15096,6 +15446,13 @@
           </a:solidFill>
           <a:ln/>
         </p:spPr>
+        <p:txBody>
+          <a:bodyPr/>
+          <a:lstStyle/>
+          <a:p>
+            <a:endParaRPr lang="en-US"/>
+          </a:p>
+        </p:txBody>
       </p:sp>
       <p:sp>
         <p:nvSpPr>
@@ -15116,6 +15473,13 @@
           </a:solidFill>
           <a:ln/>
         </p:spPr>
+        <p:txBody>
+          <a:bodyPr/>
+          <a:lstStyle/>
+          <a:p>
+            <a:endParaRPr lang="en-US"/>
+          </a:p>
+        </p:txBody>
       </p:sp>
       <p:sp>
         <p:nvSpPr>
@@ -15154,11 +15518,6 @@
               </a:rPr>
               <a:t>A </a:t>
             </a:r>
-            <a:pPr>
-              <a:lnSpc>
-                <a:spcPct val="160000"/>
-              </a:lnSpc>
-            </a:pPr>
             <a:r>
               <a:rPr lang="en-US" sz="2000" b="1" dirty="0">
                 <a:solidFill>
@@ -15170,11 +15529,6 @@
               </a:rPr>
               <a:t>network</a:t>
             </a:r>
-            <a:pPr>
-              <a:lnSpc>
-                <a:spcPct val="160000"/>
-              </a:lnSpc>
-            </a:pPr>
             <a:r>
               <a:rPr lang="en-US" sz="2000" dirty="0">
                 <a:solidFill>
@@ -15370,6 +15724,13 @@
           </a:solidFill>
           <a:ln/>
         </p:spPr>
+        <p:txBody>
+          <a:bodyPr/>
+          <a:lstStyle/>
+          <a:p>
+            <a:endParaRPr lang="en-US"/>
+          </a:p>
+        </p:txBody>
       </p:sp>
       <p:sp>
         <p:nvSpPr>
@@ -15696,6 +16057,13 @@
           </a:solidFill>
           <a:ln/>
         </p:spPr>
+        <p:txBody>
+          <a:bodyPr/>
+          <a:lstStyle/>
+          <a:p>
+            <a:endParaRPr lang="en-US"/>
+          </a:p>
+        </p:txBody>
       </p:sp>
       <p:sp>
         <p:nvSpPr>
@@ -15948,6 +16316,13 @@
           </a:solidFill>
           <a:ln/>
         </p:spPr>
+        <p:txBody>
+          <a:bodyPr/>
+          <a:lstStyle/>
+          <a:p>
+            <a:endParaRPr lang="en-US"/>
+          </a:p>
+        </p:txBody>
       </p:sp>
       <p:sp>
         <p:nvSpPr>
@@ -16154,6 +16529,13 @@
           </a:solidFill>
           <a:ln/>
         </p:spPr>
+        <p:txBody>
+          <a:bodyPr/>
+          <a:lstStyle/>
+          <a:p>
+            <a:endParaRPr lang="en-US"/>
+          </a:p>
+        </p:txBody>
       </p:sp>
       <p:sp>
         <p:nvSpPr>
@@ -16256,6 +16638,13 @@
           </a:solidFill>
           <a:ln/>
         </p:spPr>
+        <p:txBody>
+          <a:bodyPr/>
+          <a:lstStyle/>
+          <a:p>
+            <a:endParaRPr lang="en-US"/>
+          </a:p>
+        </p:txBody>
       </p:sp>
       <p:sp>
         <p:nvSpPr>
@@ -16381,6 +16770,13 @@
           </a:solidFill>
           <a:ln/>
         </p:spPr>
+        <p:txBody>
+          <a:bodyPr/>
+          <a:lstStyle/>
+          <a:p>
+            <a:endParaRPr lang="en-US"/>
+          </a:p>
+        </p:txBody>
       </p:sp>
       <p:sp>
         <p:nvSpPr>
@@ -16419,11 +16815,6 @@
               </a:rPr>
               <a:t>Core Purpose:</a:t>
             </a:r>
-            <a:pPr>
-              <a:lnSpc>
-                <a:spcPct val="150000"/>
-              </a:lnSpc>
-            </a:pPr>
             <a:r>
               <a:rPr lang="en-US" sz="1800" dirty="0">
                 <a:solidFill>
@@ -16487,7 +16878,6 @@
   </p:clrMapOvr>
   <p:transition>
     <p:fade/>
-    <p:spd val="med"/>
   </p:transition>
 </p:sld>
 </file>
@@ -16500,6 +16890,7 @@
         <a:solidFill>
           <a:srgbClr val="F4F1DE"/>
         </a:solidFill>
+        <a:effectLst/>
       </p:bgPr>
     </p:bg>
     <p:spTree>
@@ -16576,6 +16967,13 @@
           </a:solidFill>
           <a:ln/>
         </p:spPr>
+        <p:txBody>
+          <a:bodyPr/>
+          <a:lstStyle/>
+          <a:p>
+            <a:endParaRPr lang="en-US"/>
+          </a:p>
+        </p:txBody>
       </p:sp>
       <p:sp>
         <p:nvSpPr>
@@ -16596,6 +16994,13 @@
           </a:solidFill>
           <a:ln/>
         </p:spPr>
+        <p:txBody>
+          <a:bodyPr/>
+          <a:lstStyle/>
+          <a:p>
+            <a:endParaRPr lang="en-US"/>
+          </a:p>
+        </p:txBody>
       </p:sp>
       <p:sp>
         <p:nvSpPr>
@@ -16830,6 +17235,13 @@
           </a:solidFill>
           <a:ln/>
         </p:spPr>
+        <p:txBody>
+          <a:bodyPr/>
+          <a:lstStyle/>
+          <a:p>
+            <a:endParaRPr lang="en-US"/>
+          </a:p>
+        </p:txBody>
       </p:sp>
       <p:sp>
         <p:nvSpPr>
@@ -16932,6 +17344,13 @@
           </a:solidFill>
           <a:ln/>
         </p:spPr>
+        <p:txBody>
+          <a:bodyPr/>
+          <a:lstStyle/>
+          <a:p>
+            <a:endParaRPr lang="en-US"/>
+          </a:p>
+        </p:txBody>
       </p:sp>
       <p:sp>
         <p:nvSpPr>
@@ -17072,6 +17491,13 @@
           </a:solidFill>
           <a:ln/>
         </p:spPr>
+        <p:txBody>
+          <a:bodyPr/>
+          <a:lstStyle/>
+          <a:p>
+            <a:endParaRPr lang="en-US"/>
+          </a:p>
+        </p:txBody>
       </p:sp>
       <p:sp>
         <p:nvSpPr>
@@ -17481,6 +17907,13 @@
           </a:solidFill>
           <a:ln/>
         </p:spPr>
+        <p:txBody>
+          <a:bodyPr/>
+          <a:lstStyle/>
+          <a:p>
+            <a:endParaRPr lang="en-US"/>
+          </a:p>
+        </p:txBody>
       </p:sp>
       <p:sp>
         <p:nvSpPr>
@@ -17583,6 +18016,13 @@
           </a:solidFill>
           <a:ln/>
         </p:spPr>
+        <p:txBody>
+          <a:bodyPr/>
+          <a:lstStyle/>
+          <a:p>
+            <a:endParaRPr lang="en-US"/>
+          </a:p>
+        </p:txBody>
       </p:sp>
       <p:sp>
         <p:nvSpPr>
@@ -17723,6 +18163,13 @@
           </a:solidFill>
           <a:ln/>
         </p:spPr>
+        <p:txBody>
+          <a:bodyPr/>
+          <a:lstStyle/>
+          <a:p>
+            <a:endParaRPr lang="en-US"/>
+          </a:p>
+        </p:txBody>
       </p:sp>
       <p:sp>
         <p:nvSpPr>
@@ -17893,6 +18340,13 @@
           </a:solidFill>
           <a:ln/>
         </p:spPr>
+        <p:txBody>
+          <a:bodyPr/>
+          <a:lstStyle/>
+          <a:p>
+            <a:endParaRPr lang="en-US"/>
+          </a:p>
+        </p:txBody>
       </p:sp>
       <p:sp>
         <p:nvSpPr>
@@ -17995,6 +18449,13 @@
           </a:solidFill>
           <a:ln/>
         </p:spPr>
+        <p:txBody>
+          <a:bodyPr/>
+          <a:lstStyle/>
+          <a:p>
+            <a:endParaRPr lang="en-US"/>
+          </a:p>
+        </p:txBody>
       </p:sp>
       <p:sp>
         <p:nvSpPr>
@@ -18135,6 +18596,13 @@
           </a:solidFill>
           <a:ln/>
         </p:spPr>
+        <p:txBody>
+          <a:bodyPr/>
+          <a:lstStyle/>
+          <a:p>
+            <a:endParaRPr lang="en-US"/>
+          </a:p>
+        </p:txBody>
       </p:sp>
       <p:sp>
         <p:nvSpPr>
@@ -18173,11 +18641,6 @@
               </a:rPr>
               <a:t>Key Differentiator:</a:t>
             </a:r>
-            <a:pPr>
-              <a:lnSpc>
-                <a:spcPct val="150000"/>
-              </a:lnSpc>
-            </a:pPr>
             <a:r>
               <a:rPr lang="en-US" sz="1800" dirty="0">
                 <a:solidFill>
@@ -18241,7 +18704,6 @@
   </p:clrMapOvr>
   <p:transition>
     <p:fade/>
-    <p:spd val="med"/>
   </p:transition>
 </p:sld>
 </file>
@@ -18254,6 +18716,7 @@
         <a:solidFill>
           <a:srgbClr val="F4F1DE"/>
         </a:solidFill>
+        <a:effectLst/>
       </p:bgPr>
     </p:bg>
     <p:spTree>
@@ -18330,6 +18793,13 @@
           </a:solidFill>
           <a:ln/>
         </p:spPr>
+        <p:txBody>
+          <a:bodyPr/>
+          <a:lstStyle/>
+          <a:p>
+            <a:endParaRPr lang="en-US"/>
+          </a:p>
+        </p:txBody>
       </p:sp>
       <p:sp>
         <p:nvSpPr>
@@ -18350,6 +18820,13 @@
           </a:solidFill>
           <a:ln/>
         </p:spPr>
+        <p:txBody>
+          <a:bodyPr/>
+          <a:lstStyle/>
+          <a:p>
+            <a:endParaRPr lang="en-US"/>
+          </a:p>
+        </p:txBody>
       </p:sp>
       <p:sp>
         <p:nvSpPr>
@@ -18571,6 +19048,13 @@
           </a:solidFill>
           <a:ln/>
         </p:spPr>
+        <p:txBody>
+          <a:bodyPr/>
+          <a:lstStyle/>
+          <a:p>
+            <a:endParaRPr lang="en-US"/>
+          </a:p>
+        </p:txBody>
       </p:sp>
       <p:sp>
         <p:nvSpPr>
@@ -18650,11 +19134,6 @@
               </a:rPr>
               <a:t>Directs data between </a:t>
             </a:r>
-            <a:pPr>
-              <a:lnSpc>
-                <a:spcPct val="160000"/>
-              </a:lnSpc>
-            </a:pPr>
             <a:r>
               <a:rPr lang="en-US" sz="1600" b="1" dirty="0">
                 <a:solidFill>
@@ -18666,11 +19145,6 @@
               </a:rPr>
               <a:t>different networks</a:t>
             </a:r>
-            <a:pPr>
-              <a:lnSpc>
-                <a:spcPct val="160000"/>
-              </a:lnSpc>
-            </a:pPr>
             <a:r>
               <a:rPr lang="en-US" sz="1600" dirty="0">
                 <a:solidFill>
@@ -18727,6 +19201,13 @@
           </a:solidFill>
           <a:ln/>
         </p:spPr>
+        <p:txBody>
+          <a:bodyPr/>
+          <a:lstStyle/>
+          <a:p>
+            <a:endParaRPr lang="en-US"/>
+          </a:p>
+        </p:txBody>
       </p:sp>
       <p:sp>
         <p:nvSpPr>
@@ -18959,6 +19440,13 @@
           </a:solidFill>
           <a:ln/>
         </p:spPr>
+        <p:txBody>
+          <a:bodyPr/>
+          <a:lstStyle/>
+          <a:p>
+            <a:endParaRPr lang="en-US"/>
+          </a:p>
+        </p:txBody>
       </p:sp>
       <p:sp>
         <p:nvSpPr>
@@ -19038,11 +19526,6 @@
               </a:rPr>
               <a:t>Connects devices </a:t>
             </a:r>
-            <a:pPr>
-              <a:lnSpc>
-                <a:spcPct val="160000"/>
-              </a:lnSpc>
-            </a:pPr>
             <a:r>
               <a:rPr lang="en-US" sz="1600" b="1" dirty="0">
                 <a:solidFill>
@@ -19054,11 +19537,6 @@
               </a:rPr>
               <a:t>within the same network</a:t>
             </a:r>
-            <a:pPr>
-              <a:lnSpc>
-                <a:spcPct val="160000"/>
-              </a:lnSpc>
-            </a:pPr>
             <a:r>
               <a:rPr lang="en-US" sz="1600" dirty="0">
                 <a:solidFill>
@@ -19068,9 +19546,77 @@
                 <a:ea typeface="QuattrocentoSans" pitchFamily="34" charset="-122"/>
                 <a:cs typeface="QuattrocentoSans" pitchFamily="34" charset="-120"/>
               </a:rPr>
-              <a:t> using MAC addresses. Enables efficient local communication by forwarding data only to the intended recipient.</a:t>
-            </a:r>
-            <a:endParaRPr lang="en-US" sz="1800" dirty="0"/>
+              <a:t> using MAC addresses. Enables </a:t>
+            </a:r>
+            <a:r>
+              <a:rPr lang="en-US" sz="1600" dirty="0">
+                <a:solidFill>
+                  <a:srgbClr val="2D3142"/>
+                </a:solidFill>
+                <a:highlight>
+                  <a:srgbClr val="C0C0C0"/>
+                </a:highlight>
+                <a:latin typeface="QuattrocentoSans" pitchFamily="34" charset="0"/>
+                <a:ea typeface="QuattrocentoSans" pitchFamily="34" charset="-122"/>
+                <a:cs typeface="QuattrocentoSans" pitchFamily="34" charset="-120"/>
+              </a:rPr>
+              <a:t>efficient local communication </a:t>
+            </a:r>
+            <a:r>
+              <a:rPr lang="en-US" sz="1600" dirty="0">
+                <a:solidFill>
+                  <a:srgbClr val="2D3142"/>
+                </a:solidFill>
+                <a:latin typeface="QuattrocentoSans" pitchFamily="34" charset="0"/>
+                <a:ea typeface="QuattrocentoSans" pitchFamily="34" charset="-122"/>
+                <a:cs typeface="QuattrocentoSans" pitchFamily="34" charset="-120"/>
+              </a:rPr>
+              <a:t>by </a:t>
+            </a:r>
+            <a:r>
+              <a:rPr lang="en-US" sz="1600" dirty="0">
+                <a:solidFill>
+                  <a:srgbClr val="2D3142"/>
+                </a:solidFill>
+                <a:highlight>
+                  <a:srgbClr val="C0C0C0"/>
+                </a:highlight>
+                <a:latin typeface="QuattrocentoSans" pitchFamily="34" charset="0"/>
+                <a:ea typeface="QuattrocentoSans" pitchFamily="34" charset="-122"/>
+                <a:cs typeface="QuattrocentoSans" pitchFamily="34" charset="-120"/>
+              </a:rPr>
+              <a:t>forwarding data only </a:t>
+            </a:r>
+            <a:r>
+              <a:rPr lang="en-US" sz="1600" dirty="0">
+                <a:solidFill>
+                  <a:srgbClr val="2D3142"/>
+                </a:solidFill>
+                <a:latin typeface="QuattrocentoSans" pitchFamily="34" charset="0"/>
+                <a:ea typeface="QuattrocentoSans" pitchFamily="34" charset="-122"/>
+                <a:cs typeface="QuattrocentoSans" pitchFamily="34" charset="-120"/>
+              </a:rPr>
+              <a:t>to </a:t>
+            </a:r>
+            <a:r>
+              <a:rPr lang="en-US" sz="1600" dirty="0">
+                <a:solidFill>
+                  <a:srgbClr val="2D3142"/>
+                </a:solidFill>
+                <a:highlight>
+                  <a:srgbClr val="00FF00"/>
+                </a:highlight>
+                <a:latin typeface="QuattrocentoSans" pitchFamily="34" charset="0"/>
+                <a:ea typeface="QuattrocentoSans" pitchFamily="34" charset="-122"/>
+                <a:cs typeface="QuattrocentoSans" pitchFamily="34" charset="-120"/>
+              </a:rPr>
+              <a:t>the intended recipient.</a:t>
+            </a:r>
+            <a:endParaRPr lang="en-US" sz="1800" dirty="0">
+              <a:highlight>
+                <a:srgbClr val="00FF00"/>
+              </a:highlight>
+            </a:endParaRPr>
           </a:p>
           <a:p>
             <a:pPr>
@@ -19115,6 +19661,13 @@
           </a:solidFill>
           <a:ln/>
         </p:spPr>
+        <p:txBody>
+          <a:bodyPr/>
+          <a:lstStyle/>
+          <a:p>
+            <a:endParaRPr lang="en-US"/>
+          </a:p>
+        </p:txBody>
       </p:sp>
       <p:sp>
         <p:nvSpPr>
@@ -19359,6 +19912,13 @@
           </a:solidFill>
           <a:ln/>
         </p:spPr>
+        <p:txBody>
+          <a:bodyPr/>
+          <a:lstStyle/>
+          <a:p>
+            <a:endParaRPr lang="en-US"/>
+          </a:p>
+        </p:txBody>
       </p:sp>
       <p:sp>
         <p:nvSpPr>
@@ -19438,11 +19998,6 @@
               </a:rPr>
               <a:t>Converts </a:t>
             </a:r>
-            <a:pPr>
-              <a:lnSpc>
-                <a:spcPct val="160000"/>
-              </a:lnSpc>
-            </a:pPr>
             <a:r>
               <a:rPr lang="en-US" sz="1600" b="1" dirty="0">
                 <a:solidFill>
@@ -19454,11 +20009,6 @@
               </a:rPr>
               <a:t>digital signals to analog</a:t>
             </a:r>
-            <a:pPr>
-              <a:lnSpc>
-                <a:spcPct val="160000"/>
-              </a:lnSpc>
-            </a:pPr>
             <a:r>
               <a:rPr lang="en-US" sz="1600" dirty="0">
                 <a:solidFill>
@@ -19468,7 +20018,32 @@
                 <a:ea typeface="QuattrocentoSans" pitchFamily="34" charset="-122"/>
                 <a:cs typeface="QuattrocentoSans" pitchFamily="34" charset="-120"/>
               </a:rPr>
-              <a:t> (and vice versa) for transmission over ISP lines. Bridges your local network to the Internet.</a:t>
+              <a:t> (and vice versa) for transmission over ISP lines. </a:t>
+            </a:r>
+            <a:r>
+              <a:rPr lang="en-US" sz="1600" dirty="0">
+                <a:solidFill>
+                  <a:srgbClr val="2D3142"/>
+                </a:solidFill>
+                <a:highlight>
+                  <a:srgbClr val="C0C0C0"/>
+                </a:highlight>
+                <a:latin typeface="QuattrocentoSans" pitchFamily="34" charset="0"/>
+                <a:ea typeface="QuattrocentoSans" pitchFamily="34" charset="-122"/>
+                <a:cs typeface="QuattrocentoSans" pitchFamily="34" charset="-120"/>
+              </a:rPr>
+              <a:t>Bridges your local network to the Internet</a:t>
+            </a:r>
+            <a:r>
+              <a:rPr lang="en-US" sz="1600" dirty="0">
+                <a:solidFill>
+                  <a:srgbClr val="2D3142"/>
+                </a:solidFill>
+                <a:latin typeface="QuattrocentoSans" pitchFamily="34" charset="0"/>
+                <a:ea typeface="QuattrocentoSans" pitchFamily="34" charset="-122"/>
+                <a:cs typeface="QuattrocentoSans" pitchFamily="34" charset="-120"/>
+              </a:rPr>
+              <a:t>.</a:t>
             </a:r>
             <a:endParaRPr lang="en-US" sz="1800" dirty="0"/>
           </a:p>
@@ -19515,6 +20090,13 @@
           </a:solidFill>
           <a:ln/>
         </p:spPr>
+        <p:txBody>
+          <a:bodyPr/>
+          <a:lstStyle/>
+          <a:p>
+            <a:endParaRPr lang="en-US"/>
+          </a:p>
+        </p:txBody>
       </p:sp>
       <p:sp>
         <p:nvSpPr>
@@ -19807,6 +20389,13 @@
           </a:solidFill>
           <a:ln/>
         </p:spPr>
+        <p:txBody>
+          <a:bodyPr/>
+          <a:lstStyle/>
+          <a:p>
+            <a:endParaRPr lang="en-US"/>
+          </a:p>
+        </p:txBody>
       </p:sp>
       <p:sp>
         <p:nvSpPr>
@@ -19886,11 +20475,6 @@
               </a:rPr>
               <a:t>Creates a </a:t>
             </a:r>
-            <a:pPr>
-              <a:lnSpc>
-                <a:spcPct val="160000"/>
-              </a:lnSpc>
-            </a:pPr>
             <a:r>
               <a:rPr lang="en-US" sz="1600" b="1" dirty="0">
                 <a:solidFill>
@@ -19902,11 +20486,6 @@
               </a:rPr>
               <a:t>wireless (WiFi)</a:t>
             </a:r>
-            <a:pPr>
-              <a:lnSpc>
-                <a:spcPct val="160000"/>
-              </a:lnSpc>
-            </a:pPr>
             <a:r>
               <a:rPr lang="en-US" sz="1600" dirty="0">
                 <a:solidFill>
@@ -19992,7 +20571,6 @@
   </p:clrMapOvr>
   <p:transition>
     <p:fade/>
-    <p:spd val="med"/>
   </p:transition>
 </p:sld>
 </file>
@@ -20005,6 +20583,7 @@
         <a:solidFill>
           <a:srgbClr val="F4F1DE"/>
         </a:solidFill>
+        <a:effectLst/>
       </p:bgPr>
     </p:bg>
     <p:spTree>
@@ -20081,6 +20660,13 @@
           </a:solidFill>
           <a:ln/>
         </p:spPr>
+        <p:txBody>
+          <a:bodyPr/>
+          <a:lstStyle/>
+          <a:p>
+            <a:endParaRPr lang="en-US"/>
+          </a:p>
+        </p:txBody>
       </p:sp>
       <p:sp>
         <p:nvSpPr>
@@ -20101,6 +20687,13 @@
           </a:solidFill>
           <a:ln/>
         </p:spPr>
+        <p:txBody>
+          <a:bodyPr/>
+          <a:lstStyle/>
+          <a:p>
+            <a:endParaRPr lang="en-US"/>
+          </a:p>
+        </p:txBody>
       </p:sp>
       <p:sp>
         <p:nvSpPr>
@@ -20203,6 +20796,13 @@
           </a:solidFill>
           <a:ln/>
         </p:spPr>
+        <p:txBody>
+          <a:bodyPr/>
+          <a:lstStyle/>
+          <a:p>
+            <a:endParaRPr lang="en-US"/>
+          </a:p>
+        </p:txBody>
       </p:sp>
       <p:sp>
         <p:nvSpPr>
@@ -20406,6 +21006,13 @@
           </a:solidFill>
           <a:ln/>
         </p:spPr>
+        <p:txBody>
+          <a:bodyPr/>
+          <a:lstStyle/>
+          <a:p>
+            <a:endParaRPr lang="en-US"/>
+          </a:p>
+        </p:txBody>
       </p:sp>
       <p:sp>
         <p:nvSpPr>
@@ -20508,6 +21115,13 @@
           </a:solidFill>
           <a:ln/>
         </p:spPr>
+        <p:txBody>
+          <a:bodyPr/>
+          <a:lstStyle/>
+          <a:p>
+            <a:endParaRPr lang="en-US"/>
+          </a:p>
+        </p:txBody>
       </p:sp>
       <p:sp>
         <p:nvSpPr>
@@ -20711,6 +21325,13 @@
           </a:solidFill>
           <a:ln/>
         </p:spPr>
+        <p:txBody>
+          <a:bodyPr/>
+          <a:lstStyle/>
+          <a:p>
+            <a:endParaRPr lang="en-US"/>
+          </a:p>
+        </p:txBody>
       </p:sp>
       <p:sp>
         <p:nvSpPr>
@@ -20749,11 +21370,6 @@
               </a:rPr>
               <a:t>Key Difference:</a:t>
             </a:r>
-            <a:pPr algn="ctr">
-              <a:lnSpc>
-                <a:spcPct val="100000"/>
-              </a:lnSpc>
-            </a:pPr>
             <a:r>
               <a:rPr lang="en-US" sz="1800" dirty="0">
                 <a:solidFill>
@@ -20765,11 +21381,6 @@
               </a:rPr>
               <a:t> Router handles traffic </a:t>
             </a:r>
-            <a:pPr algn="ctr">
-              <a:lnSpc>
-                <a:spcPct val="100000"/>
-              </a:lnSpc>
-            </a:pPr>
             <a:r>
               <a:rPr lang="en-US" sz="1800" i="1" dirty="0">
                 <a:solidFill>
@@ -20781,11 +21392,6 @@
               </a:rPr>
               <a:t>between</a:t>
             </a:r>
-            <a:pPr algn="ctr">
-              <a:lnSpc>
-                <a:spcPct val="100000"/>
-              </a:lnSpc>
-            </a:pPr>
             <a:r>
               <a:rPr lang="en-US" sz="1800" dirty="0">
                 <a:solidFill>
@@ -20797,11 +21403,6 @@
               </a:rPr>
               <a:t> networks | Switch handles traffic </a:t>
             </a:r>
-            <a:pPr algn="ctr">
-              <a:lnSpc>
-                <a:spcPct val="100000"/>
-              </a:lnSpc>
-            </a:pPr>
             <a:r>
               <a:rPr lang="en-US" sz="1800" i="1" dirty="0">
                 <a:solidFill>
@@ -20813,11 +21414,6 @@
               </a:rPr>
               <a:t>within</a:t>
             </a:r>
-            <a:pPr algn="ctr">
-              <a:lnSpc>
-                <a:spcPct val="100000"/>
-              </a:lnSpc>
-            </a:pPr>
             <a:r>
               <a:rPr lang="en-US" sz="1800" dirty="0">
                 <a:solidFill>
@@ -20881,7 +21477,6 @@
   </p:clrMapOvr>
   <p:transition>
     <p:fade/>
-    <p:spd val="med"/>
   </p:transition>
 </p:sld>
 </file>
@@ -20894,6 +21489,7 @@
         <a:solidFill>
           <a:srgbClr val="F4F1DE"/>
         </a:solidFill>
+        <a:effectLst/>
       </p:bgPr>
     </p:bg>
     <p:spTree>
@@ -20970,6 +21566,13 @@
           </a:solidFill>
           <a:ln/>
         </p:spPr>
+        <p:txBody>
+          <a:bodyPr/>
+          <a:lstStyle/>
+          <a:p>
+            <a:endParaRPr lang="en-US"/>
+          </a:p>
+        </p:txBody>
       </p:sp>
       <p:sp>
         <p:nvSpPr>
@@ -21008,11 +21611,6 @@
               </a:rPr>
               <a:t>An </a:t>
             </a:r>
-            <a:pPr>
-              <a:lnSpc>
-                <a:spcPct val="150000"/>
-              </a:lnSpc>
-            </a:pPr>
             <a:r>
               <a:rPr lang="en-US" sz="1800" b="1" dirty="0">
                 <a:solidFill>
@@ -21024,11 +21622,6 @@
               </a:rPr>
               <a:t>IP (Internet Protocol) address</a:t>
             </a:r>
-            <a:pPr>
-              <a:lnSpc>
-                <a:spcPct val="150000"/>
-              </a:lnSpc>
-            </a:pPr>
             <a:r>
               <a:rPr lang="en-US" sz="1800" dirty="0">
                 <a:solidFill>
@@ -21063,6 +21656,13 @@
           </a:solidFill>
           <a:ln/>
         </p:spPr>
+        <p:txBody>
+          <a:bodyPr/>
+          <a:lstStyle/>
+          <a:p>
+            <a:endParaRPr lang="en-US"/>
+          </a:p>
+        </p:txBody>
       </p:sp>
       <p:sp>
         <p:nvSpPr>
@@ -21285,6 +21885,13 @@
           </a:solidFill>
           <a:ln/>
         </p:spPr>
+        <p:txBody>
+          <a:bodyPr/>
+          <a:lstStyle/>
+          <a:p>
+            <a:endParaRPr lang="en-US"/>
+          </a:p>
+        </p:txBody>
       </p:sp>
       <p:sp>
         <p:nvSpPr>
@@ -21507,6 +22114,13 @@
           </a:solidFill>
           <a:ln/>
         </p:spPr>
+        <p:txBody>
+          <a:bodyPr/>
+          <a:lstStyle/>
+          <a:p>
+            <a:endParaRPr lang="en-US"/>
+          </a:p>
+        </p:txBody>
       </p:sp>
       <p:sp>
         <p:nvSpPr>
@@ -21720,7 +22334,6 @@
   </p:clrMapOvr>
   <p:transition>
     <p:fade/>
-    <p:spd val="med"/>
   </p:transition>
 </p:sld>
 </file>
@@ -21733,6 +22346,7 @@
         <a:solidFill>
           <a:srgbClr val="F4F1DE"/>
         </a:solidFill>
+        <a:effectLst/>
       </p:bgPr>
     </p:bg>
     <p:spTree>
@@ -21809,6 +22423,13 @@
           </a:solidFill>
           <a:ln/>
         </p:spPr>
+        <p:txBody>
+          <a:bodyPr/>
+          <a:lstStyle/>
+          <a:p>
+            <a:endParaRPr lang="en-US"/>
+          </a:p>
+        </p:txBody>
       </p:sp>
       <p:sp>
         <p:nvSpPr>
@@ -21874,9 +22495,27 @@
             <a:tbl>
               <a:tblPr/>
               <a:tblGrid>
-                <a:gridCol w="2946400"/>
-                <a:gridCol w="5892800"/>
-                <a:gridCol w="5892800"/>
+                <a:gridCol w="2946400">
+                  <a:extLst>
+                    <a:ext uri="{9D8B030D-6E8A-4147-A177-3AD203B41FA5}">
+                      <a16:colId xmlns:a16="http://schemas.microsoft.com/office/drawing/2014/main" val="20000"/>
+                    </a:ext>
+                  </a:extLst>
+                </a:gridCol>
+                <a:gridCol w="5892800">
+                  <a:extLst>
+                    <a:ext uri="{9D8B030D-6E8A-4147-A177-3AD203B41FA5}">
+                      <a16:colId xmlns:a16="http://schemas.microsoft.com/office/drawing/2014/main" val="20001"/>
+                    </a:ext>
+                  </a:extLst>
+                </a:gridCol>
+                <a:gridCol w="5892800">
+                  <a:extLst>
+                    <a:ext uri="{9D8B030D-6E8A-4147-A177-3AD203B41FA5}">
+                      <a16:colId xmlns:a16="http://schemas.microsoft.com/office/drawing/2014/main" val="20002"/>
+                    </a:ext>
+                  </a:extLst>
+                </a:gridCol>
               </a:tblGrid>
               <a:tr h="571500">
                 <a:tc>
@@ -21903,7 +22542,7 @@
                       </a:endParaRPr>
                     </a:p>
                   </a:txBody>
-                  <a:tcPr marL="91440" marR="91440" marT="0" marB="0" anchor="ctr">
+                  <a:tcPr marT="0" marB="0" anchor="ctr">
                     <a:lnL w="12700" cap="flat" cmpd="sng" algn="ctr">
                       <a:solidFill>
                         <a:srgbClr val="8D99AE"/>
@@ -21969,7 +22608,7 @@
                       </a:endParaRPr>
                     </a:p>
                   </a:txBody>
-                  <a:tcPr marL="91440" marR="91440" marT="0" marB="0" anchor="ctr">
+                  <a:tcPr marT="0" marB="0" anchor="ctr">
                     <a:lnL w="12700" cap="flat" cmpd="sng" algn="ctr">
                       <a:solidFill>
                         <a:srgbClr val="8D99AE"/>
@@ -22035,7 +22674,7 @@
                       </a:endParaRPr>
                     </a:p>
                   </a:txBody>
-                  <a:tcPr marL="91440" marR="91440" marT="0" marB="0" anchor="ctr">
+                  <a:tcPr marT="0" marB="0" anchor="ctr">
                     <a:lnL w="12700" cap="flat" cmpd="sng" algn="ctr">
                       <a:solidFill>
                         <a:srgbClr val="8D99AE"/>
@@ -22077,6 +22716,11 @@
                     </a:solidFill>
                   </a:tcPr>
                 </a:tc>
+                <a:extLst>
+                  <a:ext uri="{0D108BD9-81ED-4DB2-BD59-A6C34878D82A}">
+                    <a16:rowId xmlns:a16="http://schemas.microsoft.com/office/drawing/2014/main" val="10000"/>
+                  </a:ext>
+                </a:extLst>
               </a:tr>
               <a:tr h="571500">
                 <a:tc>
@@ -22103,7 +22747,7 @@
                       </a:endParaRPr>
                     </a:p>
                   </a:txBody>
-                  <a:tcPr marL="91440" marR="91440" marT="0" marB="0" anchor="ctr">
+                  <a:tcPr marT="0" marB="0" anchor="ctr">
                     <a:lnL w="12700" cap="flat" cmpd="sng" algn="ctr">
                       <a:solidFill>
                         <a:srgbClr val="8D99AE"/>
@@ -22169,7 +22813,7 @@
                       </a:endParaRPr>
                     </a:p>
                   </a:txBody>
-                  <a:tcPr marL="91440" marR="91440" marT="0" marB="0" anchor="ctr">
+                  <a:tcPr marT="0" marB="0" anchor="ctr">
                     <a:lnL w="12700" cap="flat" cmpd="sng" algn="ctr">
                       <a:solidFill>
                         <a:srgbClr val="8D99AE"/>
@@ -22235,7 +22879,7 @@
                       </a:endParaRPr>
                     </a:p>
                   </a:txBody>
-                  <a:tcPr marL="91440" marR="91440" marT="0" marB="0" anchor="ctr">
+                  <a:tcPr marT="0" marB="0" anchor="ctr">
                     <a:lnL w="12700" cap="flat" cmpd="sng" algn="ctr">
                       <a:solidFill>
                         <a:srgbClr val="8D99AE"/>
@@ -22277,6 +22921,11 @@
                     </a:solidFill>
                   </a:tcPr>
                 </a:tc>
+                <a:extLst>
+                  <a:ext uri="{0D108BD9-81ED-4DB2-BD59-A6C34878D82A}">
+                    <a16:rowId xmlns:a16="http://schemas.microsoft.com/office/drawing/2014/main" val="10001"/>
+                  </a:ext>
+                </a:extLst>
               </a:tr>
               <a:tr h="571500">
                 <a:tc>
@@ -22303,7 +22952,7 @@
                       </a:endParaRPr>
                     </a:p>
                   </a:txBody>
-                  <a:tcPr marL="91440" marR="91440" marT="0" marB="0" anchor="ctr">
+                  <a:tcPr marT="0" marB="0" anchor="ctr">
                     <a:lnL w="12700" cap="flat" cmpd="sng" algn="ctr">
                       <a:solidFill>
                         <a:srgbClr val="8D99AE"/>
@@ -22369,7 +23018,7 @@
                       </a:endParaRPr>
                     </a:p>
                   </a:txBody>
-                  <a:tcPr marL="91440" marR="91440" marT="0" marB="0" anchor="ctr">
+                  <a:tcPr marT="0" marB="0" anchor="ctr">
                     <a:lnL w="12700" cap="flat" cmpd="sng" algn="ctr">
                       <a:solidFill>
                         <a:srgbClr val="8D99AE"/>
@@ -22435,7 +23084,7 @@
                       </a:endParaRPr>
                     </a:p>
                   </a:txBody>
-                  <a:tcPr marL="91440" marR="91440" marT="0" marB="0" anchor="ctr">
+                  <a:tcPr marT="0" marB="0" anchor="ctr">
                     <a:lnL w="12700" cap="flat" cmpd="sng" algn="ctr">
                       <a:solidFill>
                         <a:srgbClr val="8D99AE"/>
@@ -22477,6 +23126,11 @@
                     </a:solidFill>
                   </a:tcPr>
                 </a:tc>
+                <a:extLst>
+                  <a:ext uri="{0D108BD9-81ED-4DB2-BD59-A6C34878D82A}">
+                    <a16:rowId xmlns:a16="http://schemas.microsoft.com/office/drawing/2014/main" val="10002"/>
+                  </a:ext>
+                </a:extLst>
               </a:tr>
               <a:tr h="571500">
                 <a:tc>
@@ -22503,7 +23157,7 @@
                       </a:endParaRPr>
                     </a:p>
                   </a:txBody>
-                  <a:tcPr marL="91440" marR="91440" marT="0" marB="0" anchor="ctr">
+                  <a:tcPr marT="0" marB="0" anchor="ctr">
                     <a:lnL w="12700" cap="flat" cmpd="sng" algn="ctr">
                       <a:solidFill>
                         <a:srgbClr val="8D99AE"/>
@@ -22569,7 +23223,7 @@
                       </a:endParaRPr>
                     </a:p>
                   </a:txBody>
-                  <a:tcPr marL="91440" marR="91440" marT="0" marB="0" anchor="ctr">
+                  <a:tcPr marT="0" marB="0" anchor="ctr">
                     <a:lnL w="12700" cap="flat" cmpd="sng" algn="ctr">
                       <a:solidFill>
                         <a:srgbClr val="8D99AE"/>
@@ -22635,7 +23289,7 @@
                       </a:endParaRPr>
                     </a:p>
                   </a:txBody>
-                  <a:tcPr marL="91440" marR="91440" marT="0" marB="0" anchor="ctr">
+                  <a:tcPr marT="0" marB="0" anchor="ctr">
                     <a:lnL w="12700" cap="flat" cmpd="sng" algn="ctr">
                       <a:solidFill>
                         <a:srgbClr val="8D99AE"/>
@@ -22677,6 +23331,11 @@
                     </a:solidFill>
                   </a:tcPr>
                 </a:tc>
+                <a:extLst>
+                  <a:ext uri="{0D108BD9-81ED-4DB2-BD59-A6C34878D82A}">
+                    <a16:rowId xmlns:a16="http://schemas.microsoft.com/office/drawing/2014/main" val="10003"/>
+                  </a:ext>
+                </a:extLst>
               </a:tr>
             </a:tbl>
           </a:graphicData>
@@ -22701,6 +23360,13 @@
           </a:solidFill>
           <a:ln/>
         </p:spPr>
+        <p:txBody>
+          <a:bodyPr/>
+          <a:lstStyle/>
+          <a:p>
+            <a:endParaRPr lang="en-US"/>
+          </a:p>
+        </p:txBody>
       </p:sp>
       <p:sp>
         <p:nvSpPr>
@@ -22871,6 +23537,13 @@
           </a:solidFill>
           <a:ln/>
         </p:spPr>
+        <p:txBody>
+          <a:bodyPr/>
+          <a:lstStyle/>
+          <a:p>
+            <a:endParaRPr lang="en-US"/>
+          </a:p>
+        </p:txBody>
       </p:sp>
       <p:sp>
         <p:nvSpPr>
@@ -22915,7 +23588,7 @@
       </p:sp>
       <p:sp>
         <p:nvSpPr>
-          <p:cNvPr id="9" name="Text 6"/>
+          <p:cNvPr id="5" name="Text 6"/>
           <p:cNvSpPr/>
           <p:nvPr/>
         </p:nvSpPr>
@@ -23033,6 +23706,13 @@
           </a:solidFill>
           <a:ln/>
         </p:spPr>
+        <p:txBody>
+          <a:bodyPr/>
+          <a:lstStyle/>
+          <a:p>
+            <a:endParaRPr lang="en-US"/>
+          </a:p>
+        </p:txBody>
       </p:sp>
       <p:sp>
         <p:nvSpPr>
@@ -23060,6 +23740,13 @@
           </a:solidFill>
           <a:ln/>
         </p:spPr>
+        <p:txBody>
+          <a:bodyPr/>
+          <a:lstStyle/>
+          <a:p>
+            <a:endParaRPr lang="en-US"/>
+          </a:p>
+        </p:txBody>
       </p:sp>
       <p:sp>
         <p:nvSpPr>
@@ -23251,7 +23938,6 @@
   </p:clrMapOvr>
   <p:transition>
     <p:fade/>
-    <p:spd val="med"/>
   </p:transition>
 </p:sld>
 </file>
@@ -23264,6 +23950,7 @@
         <a:solidFill>
           <a:srgbClr val="F4F1DE"/>
         </a:solidFill>
+        <a:effectLst/>
       </p:bgPr>
     </p:bg>
     <p:spTree>
@@ -23340,6 +24027,13 @@
           </a:solidFill>
           <a:ln/>
         </p:spPr>
+        <p:txBody>
+          <a:bodyPr/>
+          <a:lstStyle/>
+          <a:p>
+            <a:endParaRPr lang="en-US"/>
+          </a:p>
+        </p:txBody>
       </p:sp>
       <p:sp>
         <p:nvSpPr>
@@ -23360,6 +24054,13 @@
           </a:solidFill>
           <a:ln/>
         </p:spPr>
+        <p:txBody>
+          <a:bodyPr/>
+          <a:lstStyle/>
+          <a:p>
+            <a:endParaRPr lang="en-US"/>
+          </a:p>
+        </p:txBody>
       </p:sp>
       <p:sp>
         <p:nvSpPr>
@@ -23398,11 +24099,6 @@
               </a:rPr>
               <a:t>MAC (Media Access Control)</a:t>
             </a:r>
-            <a:pPr>
-              <a:lnSpc>
-                <a:spcPct val="160000"/>
-              </a:lnSpc>
-            </a:pPr>
             <a:r>
               <a:rPr lang="en-US" sz="1800" dirty="0">
                 <a:solidFill>
@@ -23478,6 +24174,13 @@
           </a:solidFill>
           <a:ln/>
         </p:spPr>
+        <p:txBody>
+          <a:bodyPr/>
+          <a:lstStyle/>
+          <a:p>
+            <a:endParaRPr lang="en-US"/>
+          </a:p>
+        </p:txBody>
       </p:sp>
       <p:sp>
         <p:nvSpPr>
@@ -23618,6 +24321,13 @@
           </a:solidFill>
           <a:ln/>
         </p:spPr>
+        <p:txBody>
+          <a:bodyPr/>
+          <a:lstStyle/>
+          <a:p>
+            <a:endParaRPr lang="en-US"/>
+          </a:p>
+        </p:txBody>
       </p:sp>
       <p:sp>
         <p:nvSpPr>
@@ -23679,6 +24389,13 @@
           </a:solidFill>
           <a:ln/>
         </p:spPr>
+        <p:txBody>
+          <a:bodyPr/>
+          <a:lstStyle/>
+          <a:p>
+            <a:endParaRPr lang="en-US"/>
+          </a:p>
+        </p:txBody>
       </p:sp>
       <p:sp>
         <p:nvSpPr>
@@ -23841,6 +24558,13 @@
           </a:solidFill>
           <a:ln/>
         </p:spPr>
+        <p:txBody>
+          <a:bodyPr/>
+          <a:lstStyle/>
+          <a:p>
+            <a:endParaRPr lang="en-US"/>
+          </a:p>
+        </p:txBody>
       </p:sp>
       <p:sp>
         <p:nvSpPr>
@@ -23931,7 +24655,6 @@
   </p:clrMapOvr>
   <p:transition>
     <p:fade/>
-    <p:spd val="med"/>
   </p:transition>
 </p:sld>
 </file>
@@ -23944,31 +24667,31 @@
         <a:srgbClr val="000000"/>
       </a:dk1>
       <a:lt1>
-        <a:srgbClr val="ffffff"/>
+        <a:srgbClr val="FFFFFF"/>
       </a:lt1>
       <a:dk2>
         <a:srgbClr val="333333"/>
       </a:dk2>
       <a:lt2>
-        <a:srgbClr val="eeeeee"/>
+        <a:srgbClr val="EEEEEE"/>
       </a:lt2>
       <a:accent1>
-        <a:srgbClr val="8daac2"/>
+        <a:srgbClr val="8DAAC2"/>
       </a:accent1>
       <a:accent2>
-        <a:srgbClr val="ed7d31"/>
+        <a:srgbClr val="ED7D31"/>
       </a:accent2>
       <a:accent3>
-        <a:srgbClr val="a5a5a5"/>
+        <a:srgbClr val="A5A5A5"/>
       </a:accent3>
       <a:accent4>
-        <a:srgbClr val="ffc000"/>
+        <a:srgbClr val="FFC000"/>
       </a:accent4>
       <a:accent5>
-        <a:srgbClr val="4472c4"/>
+        <a:srgbClr val="4472C4"/>
       </a:accent5>
       <a:accent6>
-        <a:srgbClr val="70ad47"/>
+        <a:srgbClr val="70AD47"/>
       </a:accent6>
       <a:hlink>
         <a:srgbClr val="0563C1"/>
@@ -24229,4 +24952,319 @@
     </a:ext>
   </a:extLst>
 </a:theme>
+</file>
+
+<file path=ppt/theme/theme2.xml><?xml version="1.0" encoding="utf-8"?>
+<a:theme xmlns:a="http://schemas.openxmlformats.org/drawingml/2006/main" name="Office Theme">
+  <a:themeElements>
+    <a:clrScheme name="Office">
+      <a:dk1>
+        <a:sysClr val="windowText" lastClr="000000"/>
+      </a:dk1>
+      <a:lt1>
+        <a:sysClr val="window" lastClr="FFFFFF"/>
+      </a:lt1>
+      <a:dk2>
+        <a:srgbClr val="0E2841"/>
+      </a:dk2>
+      <a:lt2>
+        <a:srgbClr val="E8E8E8"/>
+      </a:lt2>
+      <a:accent1>
+        <a:srgbClr val="156082"/>
+      </a:accent1>
+      <a:accent2>
+        <a:srgbClr val="E97132"/>
+      </a:accent2>
+      <a:accent3>
+        <a:srgbClr val="196B24"/>
+      </a:accent3>
+      <a:accent4>
+        <a:srgbClr val="0F9ED5"/>
+      </a:accent4>
+      <a:accent5>
+        <a:srgbClr val="A02B93"/>
+      </a:accent5>
+      <a:accent6>
+        <a:srgbClr val="4EA72E"/>
+      </a:accent6>
+      <a:hlink>
+        <a:srgbClr val="467886"/>
+      </a:hlink>
+      <a:folHlink>
+        <a:srgbClr val="96607D"/>
+      </a:folHlink>
+    </a:clrScheme>
+    <a:fontScheme name="Office">
+      <a:majorFont>
+        <a:latin typeface="Aptos Display" panose="02110004020202020204"/>
+        <a:ea typeface=""/>
+        <a:cs typeface=""/>
+        <a:font script="Jpan" typeface="游ゴシック Light"/>
+        <a:font script="Hang" typeface="맑은 고딕"/>
+        <a:font script="Hans" typeface="等线 Light"/>
+        <a:font script="Hant" typeface="新細明體"/>
+        <a:font script="Arab" typeface="Times New Roman"/>
+        <a:font script="Hebr" typeface="Times New Roman"/>
+        <a:font script="Thai" typeface="Angsana New"/>
+        <a:font script="Ethi" typeface="Nyala"/>
+        <a:font script="Beng" typeface="Vrinda"/>
+        <a:font script="Gujr" typeface="Shruti"/>
+        <a:font script="Khmr" typeface="MoolBoran"/>
+        <a:font script="Knda" typeface="Tunga"/>
+        <a:font script="Guru" typeface="Raavi"/>
+        <a:font script="Cans" typeface="Euphemia"/>
+        <a:font script="Cher" typeface="Plantagenet Cherokee"/>
+        <a:font script="Yiii" typeface="Microsoft Yi Baiti"/>
+        <a:font script="Tibt" typeface="Microsoft Himalaya"/>
+        <a:font script="Thaa" typeface="MV Boli"/>
+        <a:font script="Deva" typeface="Mangal"/>
+        <a:font script="Telu" typeface="Gautami"/>
+        <a:font script="Taml" typeface="Latha"/>
+        <a:font script="Syrc" typeface="Estrangelo Edessa"/>
+        <a:font script="Orya" typeface="Kalinga"/>
+        <a:font script="Mlym" typeface="Kartika"/>
+        <a:font script="Laoo" typeface="DokChampa"/>
+        <a:font script="Sinh" typeface="Iskoola Pota"/>
+        <a:font script="Mong" typeface="Mongolian Baiti"/>
+        <a:font script="Viet" typeface="Times New Roman"/>
+        <a:font script="Uigh" typeface="Microsoft Uighur"/>
+        <a:font script="Geor" typeface="Sylfaen"/>
+        <a:font script="Armn" typeface="Arial"/>
+        <a:font script="Bugi" typeface="Leelawadee UI"/>
+        <a:font script="Bopo" typeface="Microsoft JhengHei"/>
+        <a:font script="Java" typeface="Javanese Text"/>
+        <a:font script="Lisu" typeface="Segoe UI"/>
+        <a:font script="Mymr" typeface="Myanmar Text"/>
+        <a:font script="Nkoo" typeface="Ebrima"/>
+        <a:font script="Olck" typeface="Nirmala UI"/>
+        <a:font script="Osma" typeface="Ebrima"/>
+        <a:font script="Phag" typeface="Phagspa"/>
+        <a:font script="Syrn" typeface="Estrangelo Edessa"/>
+        <a:font script="Syrj" typeface="Estrangelo Edessa"/>
+        <a:font script="Syre" typeface="Estrangelo Edessa"/>
+        <a:font script="Sora" typeface="Nirmala UI"/>
+        <a:font script="Tale" typeface="Microsoft Tai Le"/>
+        <a:font script="Talu" typeface="Microsoft New Tai Lue"/>
+        <a:font script="Tfng" typeface="Ebrima"/>
+      </a:majorFont>
+      <a:minorFont>
+        <a:latin typeface="Aptos" panose="02110004020202020204"/>
+        <a:ea typeface=""/>
+        <a:cs typeface=""/>
+        <a:font script="Jpan" typeface="游ゴシック"/>
+        <a:font script="Hang" typeface="맑은 고딕"/>
+        <a:font script="Hans" typeface="等线"/>
+        <a:font script="Hant" typeface="新細明體"/>
+        <a:font script="Arab" typeface="Arial"/>
+        <a:font script="Hebr" typeface="Arial"/>
+        <a:font script="Thai" typeface="Cordia New"/>
+        <a:font script="Ethi" typeface="Nyala"/>
+        <a:font script="Beng" typeface="Vrinda"/>
+        <a:font script="Gujr" typeface="Shruti"/>
+        <a:font script="Khmr" typeface="DaunPenh"/>
+        <a:font script="Knda" typeface="Tunga"/>
+        <a:font script="Guru" typeface="Raavi"/>
+        <a:font script="Cans" typeface="Euphemia"/>
+        <a:font script="Cher" typeface="Plantagenet Cherokee"/>
+        <a:font script="Yiii" typeface="Microsoft Yi Baiti"/>
+        <a:font script="Tibt" typeface="Microsoft Himalaya"/>
+        <a:font script="Thaa" typeface="MV Boli"/>
+        <a:font script="Deva" typeface="Mangal"/>
+        <a:font script="Telu" typeface="Gautami"/>
+        <a:font script="Taml" typeface="Latha"/>
+        <a:font script="Syrc" typeface="Estrangelo Edessa"/>
+        <a:font script="Orya" typeface="Kalinga"/>
+        <a:font script="Mlym" typeface="Kartika"/>
+        <a:font script="Laoo" typeface="DokChampa"/>
+        <a:font script="Sinh" typeface="Iskoola Pota"/>
+        <a:font script="Mong" typeface="Mongolian Baiti"/>
+        <a:font script="Viet" typeface="Arial"/>
+        <a:font script="Uigh" typeface="Microsoft Uighur"/>
+        <a:font script="Geor" typeface="Sylfaen"/>
+        <a:font script="Armn" typeface="Arial"/>
+        <a:font script="Bugi" typeface="Leelawadee UI"/>
+        <a:font script="Bopo" typeface="Microsoft JhengHei"/>
+        <a:font script="Java" typeface="Javanese Text"/>
+        <a:font script="Lisu" typeface="Segoe UI"/>
+        <a:font script="Mymr" typeface="Myanmar Text"/>
+        <a:font script="Nkoo" typeface="Ebrima"/>
+        <a:font script="Olck" typeface="Nirmala UI"/>
+        <a:font script="Osma" typeface="Ebrima"/>
+        <a:font script="Phag" typeface="Phagspa"/>
+        <a:font script="Syrn" typeface="Estrangelo Edessa"/>
+        <a:font script="Syrj" typeface="Estrangelo Edessa"/>
+        <a:font script="Syre" typeface="Estrangelo Edessa"/>
+        <a:font script="Sora" typeface="Nirmala UI"/>
+        <a:font script="Tale" typeface="Microsoft Tai Le"/>
+        <a:font script="Talu" typeface="Microsoft New Tai Lue"/>
+        <a:font script="Tfng" typeface="Ebrima"/>
+      </a:minorFont>
+    </a:fontScheme>
+    <a:fmtScheme name="Office">
+      <a:fillStyleLst>
+        <a:solidFill>
+          <a:schemeClr val="phClr"/>
+        </a:solidFill>
+        <a:gradFill rotWithShape="1">
+          <a:gsLst>
+            <a:gs pos="0">
+              <a:schemeClr val="phClr">
+                <a:lumMod val="110000"/>
+                <a:satMod val="105000"/>
+                <a:tint val="67000"/>
+              </a:schemeClr>
+            </a:gs>
+            <a:gs pos="50000">
+              <a:schemeClr val="phClr">
+                <a:lumMod val="105000"/>
+                <a:satMod val="103000"/>
+                <a:tint val="73000"/>
+              </a:schemeClr>
+            </a:gs>
+            <a:gs pos="100000">
+              <a:schemeClr val="phClr">
+                <a:lumMod val="105000"/>
+                <a:satMod val="109000"/>
+                <a:tint val="81000"/>
+              </a:schemeClr>
+            </a:gs>
+          </a:gsLst>
+          <a:lin ang="5400000" scaled="0"/>
+        </a:gradFill>
+        <a:gradFill rotWithShape="1">
+          <a:gsLst>
+            <a:gs pos="0">
+              <a:schemeClr val="phClr">
+                <a:satMod val="103000"/>
+                <a:lumMod val="102000"/>
+                <a:tint val="94000"/>
+              </a:schemeClr>
+            </a:gs>
+            <a:gs pos="50000">
+              <a:schemeClr val="phClr">
+                <a:satMod val="110000"/>
+                <a:lumMod val="100000"/>
+                <a:shade val="100000"/>
+              </a:schemeClr>
+            </a:gs>
+            <a:gs pos="100000">
+              <a:schemeClr val="phClr">
+                <a:lumMod val="99000"/>
+                <a:satMod val="120000"/>
+                <a:shade val="78000"/>
+              </a:schemeClr>
+            </a:gs>
+          </a:gsLst>
+          <a:lin ang="5400000" scaled="0"/>
+        </a:gradFill>
+      </a:fillStyleLst>
+      <a:lnStyleLst>
+        <a:ln w="12700" cap="flat" cmpd="sng" algn="ctr">
+          <a:solidFill>
+            <a:schemeClr val="phClr"/>
+          </a:solidFill>
+          <a:prstDash val="solid"/>
+          <a:miter lim="800000"/>
+        </a:ln>
+        <a:ln w="19050" cap="flat" cmpd="sng" algn="ctr">
+          <a:solidFill>
+            <a:schemeClr val="phClr"/>
+          </a:solidFill>
+          <a:prstDash val="solid"/>
+          <a:miter lim="800000"/>
+        </a:ln>
+        <a:ln w="25400" cap="flat" cmpd="sng" algn="ctr">
+          <a:solidFill>
+            <a:schemeClr val="phClr"/>
+          </a:solidFill>
+          <a:prstDash val="solid"/>
+          <a:miter lim="800000"/>
+        </a:ln>
+      </a:lnStyleLst>
+      <a:effectStyleLst>
+        <a:effectStyle>
+          <a:effectLst/>
+        </a:effectStyle>
+        <a:effectStyle>
+          <a:effectLst/>
+        </a:effectStyle>
+        <a:effectStyle>
+          <a:effectLst>
+            <a:outerShdw blurRad="57150" dist="19050" dir="5400000" algn="ctr" rotWithShape="0">
+              <a:srgbClr val="000000">
+                <a:alpha val="63000"/>
+              </a:srgbClr>
+            </a:outerShdw>
+          </a:effectLst>
+        </a:effectStyle>
+      </a:effectStyleLst>
+      <a:bgFillStyleLst>
+        <a:solidFill>
+          <a:schemeClr val="phClr"/>
+        </a:solidFill>
+        <a:solidFill>
+          <a:schemeClr val="phClr">
+            <a:tint val="95000"/>
+            <a:satMod val="170000"/>
+          </a:schemeClr>
+        </a:solidFill>
+        <a:gradFill rotWithShape="1">
+          <a:gsLst>
+            <a:gs pos="0">
+              <a:schemeClr val="phClr">
+                <a:tint val="93000"/>
+                <a:satMod val="150000"/>
+                <a:shade val="98000"/>
+                <a:lumMod val="102000"/>
+              </a:schemeClr>
+            </a:gs>
+            <a:gs pos="50000">
+              <a:schemeClr val="phClr">
+                <a:tint val="98000"/>
+                <a:satMod val="130000"/>
+                <a:shade val="90000"/>
+                <a:lumMod val="103000"/>
+              </a:schemeClr>
+            </a:gs>
+            <a:gs pos="100000">
+              <a:schemeClr val="phClr">
+                <a:shade val="63000"/>
+                <a:satMod val="120000"/>
+              </a:schemeClr>
+            </a:gs>
+          </a:gsLst>
+          <a:lin ang="5400000" scaled="0"/>
+        </a:gradFill>
+      </a:bgFillStyleLst>
+    </a:fmtScheme>
+  </a:themeElements>
+  <a:objectDefaults>
+    <a:lnDef>
+      <a:spPr/>
+      <a:bodyPr/>
+      <a:lstStyle/>
+      <a:style>
+        <a:lnRef idx="2">
+          <a:schemeClr val="accent1"/>
+        </a:lnRef>
+        <a:fillRef idx="0">
+          <a:schemeClr val="accent1"/>
+        </a:fillRef>
+        <a:effectRef idx="1">
+          <a:schemeClr val="accent1"/>
+        </a:effectRef>
+        <a:fontRef idx="minor">
+          <a:schemeClr val="tx1"/>
+        </a:fontRef>
+      </a:style>
+    </a:lnDef>
+  </a:objectDefaults>
+  <a:extraClrSchemeLst/>
+  <a:extLst>
+    <a:ext uri="{05A4C25C-085E-4340-85A3-A5531E510DB2}">
+      <thm15:themeFamily xmlns:thm15="http://schemas.microsoft.com/office/thememl/2012/main" name="Office Theme" id="{2E142A2C-CD16-42D6-873A-C26D2A0506FA}" vid="{1BDDFF52-6CD6-40A5-AB3C-68EB2F1E4D0A}"/>
+    </a:ext>
+  </a:extLst>
+</a:theme>
 </file>
--- a/network/sir-slides/4. Networking for Web Developers.pptx
+++ b/network/sir-slides/4. Networking for Web Developers.pptx
@@ -21259,7 +21259,73 @@
                 <a:ea typeface="QuattrocentoSans" pitchFamily="34" charset="-122"/>
                 <a:cs typeface="QuattrocentoSans" pitchFamily="34" charset="-120"/>
               </a:rPr>
-              <a:t>Intra-network communication</a:t>
+              <a:t>Intra-network communication (</a:t>
+            </a:r>
+            <a:r>
+              <a:rPr lang="en-US" sz="1800" dirty="0" err="1">
+                <a:solidFill>
+                  <a:srgbClr val="2D3142"/>
+                </a:solidFill>
+                <a:latin typeface="QuattrocentoSans" pitchFamily="34" charset="0"/>
+                <a:ea typeface="QuattrocentoSans" pitchFamily="34" charset="-122"/>
+                <a:cs typeface="QuattrocentoSans" pitchFamily="34" charset="-120"/>
+              </a:rPr>
+              <a:t>Eg.</a:t>
+            </a:r>
+            <a:r>
+              <a:rPr lang="en-US" sz="1800" dirty="0">
+                <a:solidFill>
+                  <a:srgbClr val="2D3142"/>
+                </a:solidFill>
+                <a:latin typeface="QuattrocentoSans" pitchFamily="34" charset="0"/>
+                <a:ea typeface="QuattrocentoSans" pitchFamily="34" charset="-122"/>
+                <a:cs typeface="QuattrocentoSans" pitchFamily="34" charset="-120"/>
+              </a:rPr>
+              <a:t> Data pass via </a:t>
+            </a:r>
+            <a:r>
+              <a:rPr lang="en-US" dirty="0">
+                <a:solidFill>
+                  <a:srgbClr val="2D3142"/>
+                </a:solidFill>
+                <a:latin typeface="QuattrocentoSans" pitchFamily="34" charset="0"/>
+                <a:ea typeface="QuattrocentoSans" pitchFamily="34" charset="-122"/>
+                <a:cs typeface="QuattrocentoSans" pitchFamily="34" charset="-120"/>
+              </a:rPr>
+              <a:t>Local share </a:t>
+            </a:r>
+            <a:r>
+              <a:rPr lang="en-US" sz="1800" dirty="0">
+                <a:solidFill>
+                  <a:srgbClr val="2D3142"/>
+                </a:solidFill>
+                <a:latin typeface="QuattrocentoSans" pitchFamily="34" charset="0"/>
+                <a:ea typeface="QuattrocentoSans" pitchFamily="34" charset="-122"/>
+                <a:cs typeface="QuattrocentoSans" pitchFamily="34" charset="-120"/>
+              </a:rPr>
+              <a:t>Software like, </a:t>
+            </a:r>
+            <a:r>
+              <a:rPr lang="en-US" sz="1800" dirty="0" err="1">
+                <a:solidFill>
+                  <a:srgbClr val="2D3142"/>
+                </a:solidFill>
+                <a:latin typeface="QuattrocentoSans" pitchFamily="34" charset="0"/>
+                <a:ea typeface="QuattrocentoSans" pitchFamily="34" charset="-122"/>
+                <a:cs typeface="QuattrocentoSans" pitchFamily="34" charset="-120"/>
+              </a:rPr>
+              <a:t>shareIt</a:t>
+            </a:r>
+            <a:r>
+              <a:rPr lang="en-US" sz="1800">
+                <a:solidFill>
+                  <a:srgbClr val="2D3142"/>
+                </a:solidFill>
+                <a:latin typeface="QuattrocentoSans" pitchFamily="34" charset="0"/>
+                <a:ea typeface="QuattrocentoSans" pitchFamily="34" charset="-122"/>
+                <a:cs typeface="QuattrocentoSans" pitchFamily="34" charset="-120"/>
+              </a:rPr>
+              <a:t>) </a:t>
             </a:r>
             <a:endParaRPr lang="en-US" sz="1800" dirty="0"/>
           </a:p>

--- a/network/sir-slides/4. Networking for Web Developers.pptx
+++ b/network/sir-slides/4. Networking for Web Developers.pptx
@@ -2670,7 +2670,7 @@
         </p:nvGraphicFramePr>
         <p:xfrm>
           <a:off x="762000" y="1524000"/>
-          <a:ext cx="14732000" cy="5080000"/>
+          <a:ext cx="14732000" cy="5080001"/>
         </p:xfrm>
         <a:graphic>
           <a:graphicData uri="http://schemas.openxmlformats.org/drawingml/2006/table">
@@ -21259,10 +21259,10 @@
                 <a:ea typeface="QuattrocentoSans" pitchFamily="34" charset="-122"/>
                 <a:cs typeface="QuattrocentoSans" pitchFamily="34" charset="-120"/>
               </a:rPr>
-              <a:t>Intra-network communication (</a:t>
-            </a:r>
-            <a:r>
-              <a:rPr lang="en-US" sz="1800" dirty="0" err="1">
+              <a:t>Intra-network communication </a:t>
+            </a:r>
+            <a:r>
+              <a:rPr lang="en-US" sz="1200" dirty="0">
                 <a:solidFill>
                   <a:srgbClr val="2D3142"/>
                 </a:solidFill>
@@ -21270,10 +21270,10 @@
                 <a:ea typeface="QuattrocentoSans" pitchFamily="34" charset="-122"/>
                 <a:cs typeface="QuattrocentoSans" pitchFamily="34" charset="-120"/>
               </a:rPr>
-              <a:t>Eg.</a:t>
-            </a:r>
-            <a:r>
-              <a:rPr lang="en-US" sz="1800" dirty="0">
+              <a:t>(</a:t>
+            </a:r>
+            <a:r>
+              <a:rPr lang="en-US" sz="1200" dirty="0" err="1">
                 <a:solidFill>
                   <a:srgbClr val="2D3142"/>
                 </a:solidFill>
@@ -21281,10 +21281,10 @@
                 <a:ea typeface="QuattrocentoSans" pitchFamily="34" charset="-122"/>
                 <a:cs typeface="QuattrocentoSans" pitchFamily="34" charset="-120"/>
               </a:rPr>
-              <a:t> Data pass via </a:t>
-            </a:r>
-            <a:r>
-              <a:rPr lang="en-US" dirty="0">
+              <a:t>Eg.</a:t>
+            </a:r>
+            <a:r>
+              <a:rPr lang="en-US" sz="1200" dirty="0">
                 <a:solidFill>
                   <a:srgbClr val="2D3142"/>
                 </a:solidFill>
@@ -21292,10 +21292,10 @@
                 <a:ea typeface="QuattrocentoSans" pitchFamily="34" charset="-122"/>
                 <a:cs typeface="QuattrocentoSans" pitchFamily="34" charset="-120"/>
               </a:rPr>
-              <a:t>Local share </a:t>
-            </a:r>
-            <a:r>
-              <a:rPr lang="en-US" sz="1800" dirty="0">
+              <a:t> Data pass via Local share Software like, </a:t>
+            </a:r>
+            <a:r>
+              <a:rPr lang="en-US" sz="1200" dirty="0" err="1">
                 <a:solidFill>
                   <a:srgbClr val="2D3142"/>
                 </a:solidFill>
@@ -21303,21 +21303,10 @@
                 <a:ea typeface="QuattrocentoSans" pitchFamily="34" charset="-122"/>
                 <a:cs typeface="QuattrocentoSans" pitchFamily="34" charset="-120"/>
               </a:rPr>
-              <a:t>Software like, </a:t>
-            </a:r>
-            <a:r>
-              <a:rPr lang="en-US" sz="1800" dirty="0" err="1">
-                <a:solidFill>
-                  <a:srgbClr val="2D3142"/>
-                </a:solidFill>
-                <a:latin typeface="QuattrocentoSans" pitchFamily="34" charset="0"/>
-                <a:ea typeface="QuattrocentoSans" pitchFamily="34" charset="-122"/>
-                <a:cs typeface="QuattrocentoSans" pitchFamily="34" charset="-120"/>
-              </a:rPr>
               <a:t>shareIt</a:t>
             </a:r>
             <a:r>
-              <a:rPr lang="en-US" sz="1800">
+              <a:rPr lang="en-US" sz="1200" dirty="0">
                 <a:solidFill>
                   <a:srgbClr val="2D3142"/>
                 </a:solidFill>
@@ -21798,7 +21787,7 @@
               </a:lnSpc>
             </a:pPr>
             <a:r>
-              <a:rPr lang="en-US" sz="1400" dirty="0">
+              <a:rPr lang="en-US" sz="1400" b="1" dirty="0">
                 <a:solidFill>
                   <a:srgbClr val="8D99AE"/>
                 </a:solidFill>
@@ -21808,7 +21797,7 @@
               </a:rPr>
               <a:t>32-bit address</a:t>
             </a:r>
-            <a:endParaRPr lang="en-US" sz="1600" dirty="0"/>
+            <a:endParaRPr lang="en-US" sz="1600" b="1" dirty="0"/>
           </a:p>
         </p:txBody>
       </p:sp>
@@ -21888,7 +21877,7 @@
                 <a:ea typeface="QuattrocentoSans" pitchFamily="34" charset="-122"/>
                 <a:cs typeface="QuattrocentoSans" pitchFamily="34" charset="-120"/>
               </a:rPr>
-              <a:t>• Four octets (0-255) separated by dots</a:t>
+              <a:t>• Four octets (0-255) separated by dots </a:t>
             </a:r>
             <a:endParaRPr lang="en-US" sz="1800" dirty="0"/>
           </a:p>
@@ -22027,7 +22016,7 @@
               </a:lnSpc>
             </a:pPr>
             <a:r>
-              <a:rPr lang="en-US" sz="1400" dirty="0">
+              <a:rPr lang="en-US" sz="1400" b="1" dirty="0">
                 <a:solidFill>
                   <a:srgbClr val="8D99AE"/>
                 </a:solidFill>
@@ -22037,7 +22026,7 @@
               </a:rPr>
               <a:t>128-bit address</a:t>
             </a:r>
-            <a:endParaRPr lang="en-US" sz="1600" dirty="0"/>
+            <a:endParaRPr lang="en-US" sz="1600" b="1" dirty="0"/>
           </a:p>
         </p:txBody>
       </p:sp>
@@ -23683,13 +23672,45 @@
                 <a:solidFill>
                   <a:srgbClr val="2D3142"/>
                 </a:solidFill>
+                <a:highlight>
+                  <a:srgbClr val="FFFF00"/>
+                </a:highlight>
                 <a:latin typeface="QuattrocentoSans" pitchFamily="34" charset="0"/>
                 <a:ea typeface="QuattrocentoSans" pitchFamily="34" charset="-122"/>
                 <a:cs typeface="QuattrocentoSans" pitchFamily="34" charset="-120"/>
               </a:rPr>
-              <a:t>Globally unique address reachable from anywhere on the Internet</a:t>
-            </a:r>
-            <a:endParaRPr lang="en-US" sz="1800" dirty="0"/>
+              <a:t>Globally unique</a:t>
+            </a:r>
+            <a:r>
+              <a:rPr lang="en-US" sz="1600" dirty="0">
+                <a:solidFill>
+                  <a:srgbClr val="2D3142"/>
+                </a:solidFill>
+                <a:latin typeface="QuattrocentoSans" pitchFamily="34" charset="0"/>
+                <a:ea typeface="QuattrocentoSans" pitchFamily="34" charset="-122"/>
+                <a:cs typeface="QuattrocentoSans" pitchFamily="34" charset="-120"/>
+              </a:rPr>
+              <a:t> address </a:t>
+            </a:r>
+            <a:r>
+              <a:rPr lang="en-US" sz="1600" dirty="0">
+                <a:solidFill>
+                  <a:srgbClr val="2D3142"/>
+                </a:solidFill>
+                <a:highlight>
+                  <a:srgbClr val="FFFF00"/>
+                </a:highlight>
+                <a:latin typeface="QuattrocentoSans" pitchFamily="34" charset="0"/>
+                <a:ea typeface="QuattrocentoSans" pitchFamily="34" charset="-122"/>
+                <a:cs typeface="QuattrocentoSans" pitchFamily="34" charset="-120"/>
+              </a:rPr>
+              <a:t>reachable from anywhere on the Internet</a:t>
+            </a:r>
+            <a:endParaRPr lang="en-US" sz="1800" dirty="0">
+              <a:highlight>
+                <a:srgbClr val="FFFF00"/>
+              </a:highlight>
+            </a:endParaRPr>
           </a:p>
           <a:p>
             <a:pPr>
@@ -23890,7 +23911,25 @@
                 <a:ea typeface="QuattrocentoSans" pitchFamily="34" charset="-122"/>
                 <a:cs typeface="QuattrocentoSans" pitchFamily="34" charset="-120"/>
               </a:rPr>
-              <a:t>The router assigns private IPs via DHCP and manages the single public IP from ISP</a:t>
+              <a:t>The router assigns private IPs via DHCP (Dynamic Host Configuration Protocol)</a:t>
+            </a:r>
+          </a:p>
+          <a:p>
+            <a:pPr>
+              <a:lnSpc>
+                <a:spcPct val="160000"/>
+              </a:lnSpc>
+            </a:pPr>
+            <a:r>
+              <a:rPr lang="en-US" sz="1600" dirty="0">
+                <a:solidFill>
+                  <a:srgbClr val="2D3142"/>
+                </a:solidFill>
+                <a:latin typeface="QuattrocentoSans" pitchFamily="34" charset="0"/>
+                <a:ea typeface="QuattrocentoSans" pitchFamily="34" charset="-122"/>
+                <a:cs typeface="QuattrocentoSans" pitchFamily="34" charset="-120"/>
+              </a:rPr>
+              <a:t> and manages the single public IP from ISP</a:t>
             </a:r>
             <a:endParaRPr lang="en-US" sz="1800" dirty="0"/>
           </a:p>

--- a/network/sir-slides/4. Networking for Web Developers.pptx
+++ b/network/sir-slides/4. Networking for Web Developers.pptx
@@ -23698,7 +23698,7 @@
                   <a:srgbClr val="2D3142"/>
                 </a:solidFill>
                 <a:highlight>
-                  <a:srgbClr val="FFFF00"/>
+                  <a:srgbClr val="00FF00"/>
                 </a:highlight>
                 <a:latin typeface="QuattrocentoSans" pitchFamily="34" charset="0"/>
                 <a:ea typeface="QuattrocentoSans" pitchFamily="34" charset="-122"/>
@@ -23708,7 +23708,7 @@
             </a:r>
             <a:endParaRPr lang="en-US" sz="1800" dirty="0">
               <a:highlight>
-                <a:srgbClr val="FFFF00"/>
+                <a:srgbClr val="00FF00"/>
               </a:highlight>
             </a:endParaRPr>
           </a:p>
@@ -23730,28 +23730,27 @@
                 <a:ea typeface="QuattrocentoSans" pitchFamily="34" charset="-122"/>
                 <a:cs typeface="QuattrocentoSans" pitchFamily="34" charset="-120"/>
               </a:rPr>
-              <a:t>• Assigned by your ISP</a:t>
-            </a:r>
-            <a:endParaRPr lang="en-US" sz="1800" dirty="0"/>
-          </a:p>
-          <a:p>
-            <a:pPr>
-              <a:lnSpc>
-                <a:spcPct val="160000"/>
-              </a:lnSpc>
-            </a:pPr>
+              <a:t>• Assigned by your </a:t>
+            </a:r>
             <a:r>
               <a:rPr lang="en-US" sz="1600" dirty="0">
                 <a:solidFill>
                   <a:srgbClr val="2D3142"/>
                 </a:solidFill>
+                <a:highlight>
+                  <a:srgbClr val="00FF00"/>
+                </a:highlight>
                 <a:latin typeface="QuattrocentoSans" pitchFamily="34" charset="0"/>
                 <a:ea typeface="QuattrocentoSans" pitchFamily="34" charset="-122"/>
                 <a:cs typeface="QuattrocentoSans" pitchFamily="34" charset="-120"/>
               </a:rPr>
-              <a:t>• One per network (typically)</a:t>
-            </a:r>
-            <a:endParaRPr lang="en-US" sz="1800" dirty="0"/>
+              <a:t>ISP</a:t>
+            </a:r>
+            <a:endParaRPr lang="en-US" sz="1800" dirty="0">
+              <a:highlight>
+                <a:srgbClr val="00FF00"/>
+              </a:highlight>
+            </a:endParaRPr>
           </a:p>
           <a:p>
             <a:pPr>
@@ -23768,9 +23767,71 @@
                 <a:ea typeface="QuattrocentoSans" pitchFamily="34" charset="-122"/>
                 <a:cs typeface="QuattrocentoSans" pitchFamily="34" charset="-120"/>
               </a:rPr>
-              <a:t>• Required for Internet access</a:t>
+              <a:t>• </a:t>
+            </a:r>
+            <a:r>
+              <a:rPr lang="en-US" sz="1600" dirty="0">
+                <a:solidFill>
+                  <a:srgbClr val="2D3142"/>
+                </a:solidFill>
+                <a:highlight>
+                  <a:srgbClr val="00FF00"/>
+                </a:highlight>
+                <a:latin typeface="QuattrocentoSans" pitchFamily="34" charset="0"/>
+                <a:ea typeface="QuattrocentoSans" pitchFamily="34" charset="-122"/>
+                <a:cs typeface="QuattrocentoSans" pitchFamily="34" charset="-120"/>
+              </a:rPr>
+              <a:t>One per network </a:t>
+            </a:r>
+            <a:r>
+              <a:rPr lang="en-US" sz="1600" dirty="0">
+                <a:solidFill>
+                  <a:srgbClr val="2D3142"/>
+                </a:solidFill>
+                <a:latin typeface="QuattrocentoSans" pitchFamily="34" charset="0"/>
+                <a:ea typeface="QuattrocentoSans" pitchFamily="34" charset="-122"/>
+                <a:cs typeface="QuattrocentoSans" pitchFamily="34" charset="-120"/>
+              </a:rPr>
+              <a:t>(typically)</a:t>
             </a:r>
             <a:endParaRPr lang="en-US" sz="1800" dirty="0"/>
+          </a:p>
+          <a:p>
+            <a:pPr>
+              <a:lnSpc>
+                <a:spcPct val="160000"/>
+              </a:lnSpc>
+            </a:pPr>
+            <a:r>
+              <a:rPr lang="en-US" sz="1600" dirty="0">
+                <a:solidFill>
+                  <a:srgbClr val="2D3142"/>
+                </a:solidFill>
+                <a:latin typeface="QuattrocentoSans" pitchFamily="34" charset="0"/>
+                <a:ea typeface="QuattrocentoSans" pitchFamily="34" charset="-122"/>
+                <a:cs typeface="QuattrocentoSans" pitchFamily="34" charset="-120"/>
+              </a:rPr>
+              <a:t>• </a:t>
+            </a:r>
+            <a:r>
+              <a:rPr lang="en-US" sz="1600" dirty="0">
+                <a:solidFill>
+                  <a:srgbClr val="2D3142"/>
+                </a:solidFill>
+                <a:highlight>
+                  <a:srgbClr val="00FF00"/>
+                </a:highlight>
+                <a:latin typeface="QuattrocentoSans" pitchFamily="34" charset="0"/>
+                <a:ea typeface="QuattrocentoSans" pitchFamily="34" charset="-122"/>
+                <a:cs typeface="QuattrocentoSans" pitchFamily="34" charset="-120"/>
+              </a:rPr>
+              <a:t>Required for Internet access</a:t>
+            </a:r>
+            <a:endParaRPr lang="en-US" sz="1800" dirty="0">
+              <a:highlight>
+                <a:srgbClr val="00FF00"/>
+              </a:highlight>
+            </a:endParaRPr>
           </a:p>
         </p:txBody>
       </p:sp>
@@ -23911,27 +23972,70 @@
                 <a:ea typeface="QuattrocentoSans" pitchFamily="34" charset="-122"/>
                 <a:cs typeface="QuattrocentoSans" pitchFamily="34" charset="-120"/>
               </a:rPr>
-              <a:t>The router assigns private IPs via DHCP (Dynamic Host Configuration Protocol)</a:t>
-            </a:r>
-          </a:p>
-          <a:p>
-            <a:pPr>
-              <a:lnSpc>
-                <a:spcPct val="160000"/>
-              </a:lnSpc>
-            </a:pPr>
+              <a:t>The </a:t>
+            </a:r>
             <a:r>
               <a:rPr lang="en-US" sz="1600" dirty="0">
                 <a:solidFill>
                   <a:srgbClr val="2D3142"/>
                 </a:solidFill>
+                <a:highlight>
+                  <a:srgbClr val="FFFF00"/>
+                </a:highlight>
                 <a:latin typeface="QuattrocentoSans" pitchFamily="34" charset="0"/>
                 <a:ea typeface="QuattrocentoSans" pitchFamily="34" charset="-122"/>
                 <a:cs typeface="QuattrocentoSans" pitchFamily="34" charset="-120"/>
               </a:rPr>
-              <a:t> and manages the single public IP from ISP</a:t>
-            </a:r>
-            <a:endParaRPr lang="en-US" sz="1800" dirty="0"/>
+              <a:t>router assigns private IPs via DHCP </a:t>
+            </a:r>
+            <a:r>
+              <a:rPr lang="en-US" sz="1600" dirty="0">
+                <a:solidFill>
+                  <a:srgbClr val="2D3142"/>
+                </a:solidFill>
+                <a:latin typeface="QuattrocentoSans" pitchFamily="34" charset="0"/>
+                <a:ea typeface="QuattrocentoSans" pitchFamily="34" charset="-122"/>
+                <a:cs typeface="QuattrocentoSans" pitchFamily="34" charset="-120"/>
+              </a:rPr>
+              <a:t>(Dynamic Host Configuration Protocol)</a:t>
+            </a:r>
+          </a:p>
+          <a:p>
+            <a:pPr>
+              <a:lnSpc>
+                <a:spcPct val="160000"/>
+              </a:lnSpc>
+            </a:pPr>
+            <a:r>
+              <a:rPr lang="en-US" sz="1600" dirty="0">
+                <a:solidFill>
+                  <a:srgbClr val="2D3142"/>
+                </a:solidFill>
+                <a:latin typeface="QuattrocentoSans" pitchFamily="34" charset="0"/>
+                <a:ea typeface="QuattrocentoSans" pitchFamily="34" charset="-122"/>
+                <a:cs typeface="QuattrocentoSans" pitchFamily="34" charset="-120"/>
+              </a:rPr>
+              <a:t> and </a:t>
+            </a:r>
+            <a:r>
+              <a:rPr lang="en-US" sz="1600" dirty="0">
+                <a:solidFill>
+                  <a:srgbClr val="2D3142"/>
+                </a:solidFill>
+                <a:highlight>
+                  <a:srgbClr val="00FF00"/>
+                </a:highlight>
+                <a:latin typeface="QuattrocentoSans" pitchFamily="34" charset="0"/>
+                <a:ea typeface="QuattrocentoSans" pitchFamily="34" charset="-122"/>
+                <a:cs typeface="QuattrocentoSans" pitchFamily="34" charset="-120"/>
+              </a:rPr>
+              <a:t>manages the single public IP from ISP</a:t>
+            </a:r>
+            <a:endParaRPr lang="en-US" sz="1800" dirty="0">
+              <a:highlight>
+                <a:srgbClr val="00FF00"/>
+              </a:highlight>
+            </a:endParaRPr>
           </a:p>
           <a:p>
             <a:pPr>
@@ -23951,16 +24055,12 @@
                 <a:ea typeface="QuattrocentoSans" pitchFamily="34" charset="-122"/>
                 <a:cs typeface="QuattrocentoSans" pitchFamily="34" charset="-120"/>
               </a:rPr>
-              <a:t>• NAT translates between them</a:t>
-            </a:r>
-            <a:endParaRPr lang="en-US" sz="1800" dirty="0"/>
-          </a:p>
-          <a:p>
-            <a:pPr>
-              <a:lnSpc>
-                <a:spcPct val="160000"/>
-              </a:lnSpc>
-            </a:pPr>
+              <a:t>• NAT (</a:t>
+            </a:r>
+            <a:r>
+              <a:rPr lang="en-US" sz="1600" dirty="0"/>
+              <a:t>Network Address Translation)</a:t>
+            </a:r>
             <a:r>
               <a:rPr lang="en-US" sz="1600" dirty="0">
                 <a:solidFill>
@@ -23970,7 +24070,7 @@
                 <a:ea typeface="QuattrocentoSans" pitchFamily="34" charset="-122"/>
                 <a:cs typeface="QuattrocentoSans" pitchFamily="34" charset="-120"/>
               </a:rPr>
-              <a:t>• ~18M devices reuse same ranges</a:t>
+              <a:t> translates between them</a:t>
             </a:r>
             <a:endParaRPr lang="en-US" sz="1800" dirty="0"/>
           </a:p>
@@ -23989,7 +24089,94 @@
                 <a:ea typeface="QuattrocentoSans" pitchFamily="34" charset="-122"/>
                 <a:cs typeface="QuattrocentoSans" pitchFamily="34" charset="-120"/>
               </a:rPr>
-              <a:t>• Isolates local from global traffic</a:t>
+              <a:t>• ~18M devices </a:t>
+            </a:r>
+            <a:r>
+              <a:rPr lang="en-US" sz="1600" dirty="0">
+                <a:solidFill>
+                  <a:srgbClr val="2D3142"/>
+                </a:solidFill>
+                <a:highlight>
+                  <a:srgbClr val="00FF00"/>
+                </a:highlight>
+                <a:latin typeface="QuattrocentoSans" pitchFamily="34" charset="0"/>
+                <a:ea typeface="QuattrocentoSans" pitchFamily="34" charset="-122"/>
+                <a:cs typeface="QuattrocentoSans" pitchFamily="34" charset="-120"/>
+              </a:rPr>
+              <a:t>reuse</a:t>
+            </a:r>
+            <a:r>
+              <a:rPr lang="en-US" sz="1600" dirty="0">
+                <a:solidFill>
+                  <a:srgbClr val="2D3142"/>
+                </a:solidFill>
+                <a:latin typeface="QuattrocentoSans" pitchFamily="34" charset="0"/>
+                <a:ea typeface="QuattrocentoSans" pitchFamily="34" charset="-122"/>
+                <a:cs typeface="QuattrocentoSans" pitchFamily="34" charset="-120"/>
+              </a:rPr>
+              <a:t> </a:t>
+            </a:r>
+            <a:r>
+              <a:rPr lang="en-US" sz="1600" dirty="0">
+                <a:solidFill>
+                  <a:srgbClr val="2D3142"/>
+                </a:solidFill>
+                <a:highlight>
+                  <a:srgbClr val="00FF00"/>
+                </a:highlight>
+                <a:latin typeface="QuattrocentoSans" pitchFamily="34" charset="0"/>
+                <a:ea typeface="QuattrocentoSans" pitchFamily="34" charset="-122"/>
+                <a:cs typeface="QuattrocentoSans" pitchFamily="34" charset="-120"/>
+              </a:rPr>
+              <a:t>same ranges</a:t>
+            </a:r>
+            <a:endParaRPr lang="en-US" sz="1800" dirty="0">
+              <a:highlight>
+                <a:srgbClr val="00FF00"/>
+              </a:highlight>
+            </a:endParaRPr>
+          </a:p>
+          <a:p>
+            <a:pPr>
+              <a:lnSpc>
+                <a:spcPct val="160000"/>
+              </a:lnSpc>
+            </a:pPr>
+            <a:r>
+              <a:rPr lang="en-US" sz="1600" dirty="0">
+                <a:solidFill>
+                  <a:srgbClr val="2D3142"/>
+                </a:solidFill>
+                <a:latin typeface="QuattrocentoSans" pitchFamily="34" charset="0"/>
+                <a:ea typeface="QuattrocentoSans" pitchFamily="34" charset="-122"/>
+                <a:cs typeface="QuattrocentoSans" pitchFamily="34" charset="-120"/>
+              </a:rPr>
+              <a:t>• </a:t>
+            </a:r>
+            <a:r>
+              <a:rPr lang="en-US" sz="1600" dirty="0">
+                <a:solidFill>
+                  <a:srgbClr val="2D3142"/>
+                </a:solidFill>
+                <a:highlight>
+                  <a:srgbClr val="00FF00"/>
+                </a:highlight>
+                <a:latin typeface="QuattrocentoSans" pitchFamily="34" charset="0"/>
+                <a:ea typeface="QuattrocentoSans" pitchFamily="34" charset="-122"/>
+                <a:cs typeface="QuattrocentoSans" pitchFamily="34" charset="-120"/>
+              </a:rPr>
+              <a:t>Isolates local </a:t>
+            </a:r>
+            <a:r>
+              <a:rPr lang="en-US" sz="1600" dirty="0">
+                <a:solidFill>
+                  <a:srgbClr val="2D3142"/>
+                </a:solidFill>
+                <a:latin typeface="QuattrocentoSans" pitchFamily="34" charset="0"/>
+                <a:ea typeface="QuattrocentoSans" pitchFamily="34" charset="-122"/>
+                <a:cs typeface="QuattrocentoSans" pitchFamily="34" charset="-120"/>
+              </a:rPr>
+              <a:t>from global traffic</a:t>
             </a:r>
             <a:endParaRPr lang="en-US" sz="1800" dirty="0"/>
           </a:p>
@@ -24213,7 +24400,51 @@
                 <a:ea typeface="QuattrocentoSans" pitchFamily="34" charset="-122"/>
                 <a:cs typeface="QuattrocentoSans" pitchFamily="34" charset="-120"/>
               </a:rPr>
-              <a:t> address is a hardware-level identifier burned into every Network Interface Card (NIC). It serves as a permanent, unique identity for each network device.</a:t>
+              <a:t> address is a </a:t>
+            </a:r>
+            <a:r>
+              <a:rPr lang="en-US" sz="1800" b="1" dirty="0">
+                <a:solidFill>
+                  <a:srgbClr val="2D3142"/>
+                </a:solidFill>
+                <a:latin typeface="QuattrocentoSans" pitchFamily="34" charset="0"/>
+                <a:ea typeface="QuattrocentoSans" pitchFamily="34" charset="-122"/>
+                <a:cs typeface="QuattrocentoSans" pitchFamily="34" charset="-120"/>
+              </a:rPr>
+              <a:t>hardware-level identifier </a:t>
+            </a:r>
+            <a:r>
+              <a:rPr lang="en-US" sz="1800" dirty="0">
+                <a:solidFill>
+                  <a:srgbClr val="2D3142"/>
+                </a:solidFill>
+                <a:latin typeface="QuattrocentoSans" pitchFamily="34" charset="0"/>
+                <a:ea typeface="QuattrocentoSans" pitchFamily="34" charset="-122"/>
+                <a:cs typeface="QuattrocentoSans" pitchFamily="34" charset="-120"/>
+              </a:rPr>
+              <a:t>burned into every </a:t>
+            </a:r>
+            <a:r>
+              <a:rPr lang="en-US" sz="1800" b="1" dirty="0">
+                <a:solidFill>
+                  <a:srgbClr val="2D3142"/>
+                </a:solidFill>
+                <a:latin typeface="QuattrocentoSans" pitchFamily="34" charset="0"/>
+                <a:ea typeface="QuattrocentoSans" pitchFamily="34" charset="-122"/>
+                <a:cs typeface="QuattrocentoSans" pitchFamily="34" charset="-120"/>
+              </a:rPr>
+              <a:t>Network Interface Card (NIC). </a:t>
+            </a:r>
+            <a:r>
+              <a:rPr lang="en-US" sz="1800" dirty="0">
+                <a:solidFill>
+                  <a:srgbClr val="2D3142"/>
+                </a:solidFill>
+                <a:latin typeface="QuattrocentoSans" pitchFamily="34" charset="0"/>
+                <a:ea typeface="QuattrocentoSans" pitchFamily="34" charset="-122"/>
+                <a:cs typeface="QuattrocentoSans" pitchFamily="34" charset="-120"/>
+              </a:rPr>
+              <a:t>It serves as a permanent, unique identity for each network device.</a:t>
             </a:r>
             <a:endParaRPr lang="en-US" sz="1800" dirty="0"/>
           </a:p>
@@ -24401,9 +24632,20 @@
                 <a:ea typeface="QuattrocentoSans" pitchFamily="34" charset="-122"/>
                 <a:cs typeface="QuattrocentoSans" pitchFamily="34" charset="-120"/>
               </a:rPr>
-              <a:t>• First 3 pairs = manufacturer (OUI)</a:t>
-            </a:r>
-            <a:endParaRPr lang="en-US" sz="1800" dirty="0"/>
+              <a:t>• First 3 pairs = </a:t>
+            </a:r>
+            <a:r>
+              <a:rPr lang="en-US" sz="1600" b="1" dirty="0">
+                <a:solidFill>
+                  <a:srgbClr val="2D3142"/>
+                </a:solidFill>
+                <a:latin typeface="QuattrocentoSans" pitchFamily="34" charset="0"/>
+                <a:ea typeface="QuattrocentoSans" pitchFamily="34" charset="-122"/>
+                <a:cs typeface="QuattrocentoSans" pitchFamily="34" charset="-120"/>
+              </a:rPr>
+              <a:t>manufacturer (OUI)</a:t>
+            </a:r>
+            <a:endParaRPr lang="en-US" sz="1800" b="1" dirty="0"/>
           </a:p>
         </p:txBody>
       </p:sp>
@@ -24634,13 +24876,48 @@
                 <a:solidFill>
                   <a:srgbClr val="2D3142"/>
                 </a:solidFill>
+                <a:highlight>
+                  <a:srgbClr val="00FF00"/>
+                </a:highlight>
                 <a:latin typeface="QuattrocentoSans" pitchFamily="34" charset="0"/>
                 <a:ea typeface="QuattrocentoSans" pitchFamily="34" charset="-122"/>
                 <a:cs typeface="QuattrocentoSans" pitchFamily="34" charset="-120"/>
               </a:rPr>
-              <a:t>Used for local network communication only</a:t>
-            </a:r>
-            <a:endParaRPr lang="en-US" sz="1800" dirty="0"/>
+              <a:t>Used for </a:t>
+            </a:r>
+            <a:r>
+              <a:rPr lang="en-US" sz="1600" dirty="0">
+                <a:solidFill>
+                  <a:srgbClr val="2D3142"/>
+                </a:solidFill>
+                <a:highlight>
+                  <a:srgbClr val="FFFF00"/>
+                </a:highlight>
+                <a:latin typeface="QuattrocentoSans" pitchFamily="34" charset="0"/>
+                <a:ea typeface="QuattrocentoSans" pitchFamily="34" charset="-122"/>
+                <a:cs typeface="QuattrocentoSans" pitchFamily="34" charset="-120"/>
+              </a:rPr>
+              <a:t>local network communication </a:t>
+            </a:r>
+            <a:r>
+              <a:rPr lang="en-US" sz="1600" dirty="0">
+                <a:solidFill>
+                  <a:srgbClr val="2D3142"/>
+                </a:solidFill>
+                <a:highlight>
+                  <a:srgbClr val="00FF00"/>
+                </a:highlight>
+                <a:latin typeface="QuattrocentoSans" pitchFamily="34" charset="0"/>
+                <a:ea typeface="QuattrocentoSans" pitchFamily="34" charset="-122"/>
+                <a:cs typeface="QuattrocentoSans" pitchFamily="34" charset="-120"/>
+              </a:rPr>
+              <a:t>only</a:t>
+            </a:r>
+            <a:endParaRPr lang="en-US" sz="1800" dirty="0">
+              <a:highlight>
+                <a:srgbClr val="00FF00"/>
+              </a:highlight>
+            </a:endParaRPr>
           </a:p>
         </p:txBody>
       </p:sp>

--- a/network/sir-slides/4. Networking for Web Developers.pptx
+++ b/network/sir-slides/4. Networking for Web Developers.pptx
@@ -6153,9 +6153,27 @@
                 <a:ea typeface="Quattrocento Sans" pitchFamily="34" charset="-122"/>
                 <a:cs typeface="Quattrocento Sans" pitchFamily="34" charset="-120"/>
               </a:rPr>
-              <a:t>DNS is one of the most critical systems on the Internet — every web request starts with a DNS lookup</a:t>
-            </a:r>
-            <a:endParaRPr lang="en-US" sz="1600" dirty="0"/>
+              <a:t>DNS is one of the most critical systems on the Internet — </a:t>
+            </a:r>
+            <a:r>
+              <a:rPr lang="en-US" sz="1800" b="1" dirty="0">
+                <a:solidFill>
+                  <a:srgbClr val="F4F1DE"/>
+                </a:solidFill>
+                <a:highlight>
+                  <a:srgbClr val="008000"/>
+                </a:highlight>
+                <a:latin typeface="Quattrocento Sans" pitchFamily="34" charset="0"/>
+                <a:ea typeface="Quattrocento Sans" pitchFamily="34" charset="-122"/>
+                <a:cs typeface="Quattrocento Sans" pitchFamily="34" charset="-120"/>
+              </a:rPr>
+              <a:t>every web request starts with a DNS lookup</a:t>
+            </a:r>
+            <a:endParaRPr lang="en-US" sz="1600" b="1" dirty="0">
+              <a:highlight>
+                <a:srgbClr val="008000"/>
+              </a:highlight>
+            </a:endParaRPr>
           </a:p>
         </p:txBody>
       </p:sp>
@@ -10025,7 +10043,7 @@
         </p:nvSpPr>
         <p:spPr>
           <a:xfrm>
-            <a:off x="762000" y="5651500"/>
+            <a:off x="2349500" y="5842000"/>
             <a:ext cx="14732000" cy="1016000"/>
           </a:xfrm>
           <a:prstGeom prst="rect">
@@ -10268,7 +10286,117 @@
                 <a:ea typeface="Quattrocento Sans" pitchFamily="34" charset="-122"/>
                 <a:cs typeface="Quattrocento Sans" pitchFamily="34" charset="-120"/>
               </a:rPr>
-              <a:t> the local subnet, the device sends the frame to the default gateway (router) instead, which then routes it to the external network.</a:t>
+              <a:t> the local subnet, the device sends the frame to the default gateway (router) instead, which then routes it to the external network. (website click </a:t>
+            </a:r>
+            <a:r>
+              <a:rPr lang="en-US" sz="1600" dirty="0" err="1">
+                <a:solidFill>
+                  <a:srgbClr val="F4F1DE"/>
+                </a:solidFill>
+                <a:latin typeface="Quattrocento Sans" pitchFamily="34" charset="0"/>
+                <a:ea typeface="Quattrocento Sans" pitchFamily="34" charset="-122"/>
+                <a:cs typeface="Quattrocento Sans" pitchFamily="34" charset="-120"/>
+              </a:rPr>
+              <a:t>korle</a:t>
+            </a:r>
+            <a:r>
+              <a:rPr lang="en-US" sz="1600" dirty="0">
+                <a:solidFill>
+                  <a:srgbClr val="F4F1DE"/>
+                </a:solidFill>
+                <a:latin typeface="Quattrocento Sans" pitchFamily="34" charset="0"/>
+                <a:ea typeface="Quattrocento Sans" pitchFamily="34" charset="-122"/>
+                <a:cs typeface="Quattrocento Sans" pitchFamily="34" charset="-120"/>
+              </a:rPr>
+              <a:t> gateway er </a:t>
+            </a:r>
+            <a:r>
+              <a:rPr lang="en-US" sz="1600" dirty="0" err="1">
+                <a:solidFill>
+                  <a:srgbClr val="F4F1DE"/>
+                </a:solidFill>
+                <a:latin typeface="Quattrocento Sans" pitchFamily="34" charset="0"/>
+                <a:ea typeface="Quattrocento Sans" pitchFamily="34" charset="-122"/>
+                <a:cs typeface="Quattrocento Sans" pitchFamily="34" charset="-120"/>
+              </a:rPr>
+              <a:t>kachhe</a:t>
+            </a:r>
+            <a:r>
+              <a:rPr lang="en-US" sz="1600" dirty="0">
+                <a:solidFill>
+                  <a:srgbClr val="F4F1DE"/>
+                </a:solidFill>
+                <a:latin typeface="Quattrocento Sans" pitchFamily="34" charset="0"/>
+                <a:ea typeface="Quattrocento Sans" pitchFamily="34" charset="-122"/>
+                <a:cs typeface="Quattrocento Sans" pitchFamily="34" charset="-120"/>
+              </a:rPr>
+              <a:t> jay </a:t>
+            </a:r>
+            <a:r>
+              <a:rPr lang="en-US" sz="1600" dirty="0" err="1">
+                <a:solidFill>
+                  <a:srgbClr val="F4F1DE"/>
+                </a:solidFill>
+                <a:latin typeface="Quattrocento Sans" pitchFamily="34" charset="0"/>
+                <a:ea typeface="Quattrocento Sans" pitchFamily="34" charset="-122"/>
+                <a:cs typeface="Quattrocento Sans" pitchFamily="34" charset="-120"/>
+              </a:rPr>
+              <a:t>tokhon</a:t>
+            </a:r>
+            <a:r>
+              <a:rPr lang="en-US" sz="1600" dirty="0">
+                <a:solidFill>
+                  <a:srgbClr val="F4F1DE"/>
+                </a:solidFill>
+                <a:latin typeface="Quattrocento Sans" pitchFamily="34" charset="0"/>
+                <a:ea typeface="Quattrocento Sans" pitchFamily="34" charset="-122"/>
+                <a:cs typeface="Quattrocento Sans" pitchFamily="34" charset="-120"/>
+              </a:rPr>
+              <a:t> ARP </a:t>
+            </a:r>
+            <a:r>
+              <a:rPr lang="en-US" sz="1600" dirty="0" err="1">
+                <a:solidFill>
+                  <a:srgbClr val="F4F1DE"/>
+                </a:solidFill>
+                <a:latin typeface="Quattrocento Sans" pitchFamily="34" charset="0"/>
+                <a:ea typeface="Quattrocento Sans" pitchFamily="34" charset="-122"/>
+                <a:cs typeface="Quattrocento Sans" pitchFamily="34" charset="-120"/>
+              </a:rPr>
+              <a:t>na</a:t>
+            </a:r>
+            <a:r>
+              <a:rPr lang="en-US" sz="1600" dirty="0">
+                <a:solidFill>
+                  <a:srgbClr val="F4F1DE"/>
+                </a:solidFill>
+                <a:latin typeface="Quattrocento Sans" pitchFamily="34" charset="0"/>
+                <a:ea typeface="Quattrocento Sans" pitchFamily="34" charset="-122"/>
+                <a:cs typeface="Quattrocento Sans" pitchFamily="34" charset="-120"/>
+              </a:rPr>
+              <a:t> NAT er </a:t>
+            </a:r>
+            <a:r>
+              <a:rPr lang="en-US" sz="1600" dirty="0" err="1">
+                <a:solidFill>
+                  <a:srgbClr val="F4F1DE"/>
+                </a:solidFill>
+                <a:latin typeface="Quattrocento Sans" pitchFamily="34" charset="0"/>
+                <a:ea typeface="Quattrocento Sans" pitchFamily="34" charset="-122"/>
+                <a:cs typeface="Quattrocento Sans" pitchFamily="34" charset="-120"/>
+              </a:rPr>
+              <a:t>kachhe</a:t>
+            </a:r>
+            <a:r>
+              <a:rPr lang="en-US" sz="1600">
+                <a:solidFill>
+                  <a:srgbClr val="F4F1DE"/>
+                </a:solidFill>
+                <a:latin typeface="Quattrocento Sans" pitchFamily="34" charset="0"/>
+                <a:ea typeface="Quattrocento Sans" pitchFamily="34" charset="-122"/>
+                <a:cs typeface="Quattrocento Sans" pitchFamily="34" charset="-120"/>
+              </a:rPr>
+              <a:t> jay) </a:t>
             </a:r>
             <a:endParaRPr lang="en-US" sz="1600" dirty="0"/>
           </a:p>
